--- a/docs/manual-company.pptx
+++ b/docs/manual-company.pptx
@@ -14,9 +14,10 @@
     <p:sldId id="262" r:id="rId8"/>
     <p:sldId id="263" r:id="rId9"/>
     <p:sldId id="264" r:id="rId10"/>
+    <p:sldId id="265" r:id="rId11"/>
   </p:sldIdLst>
   <p:notesMasterIdLst>
-    <p:notesMasterId r:id="rId11"/>
+    <p:notesMasterId r:id="rId12"/>
   </p:notesMasterIdLst>
   <p:sldSz cx="7562088" cy="10689336"/>
   <p:notesSz cx="10689336" cy="7562088"/>
@@ -534,6 +535,94 @@
             <a:fld id="{F7021451-1387-4CA6-816F-3879F97B5CBC}" type="slidenum">
               <a:rPr lang="en-US"/>
               <a:t>1</a:t>
+            </a:fld>
+            <a:endParaRPr lang="en-US"/>
+          </a:p>
+        </p:txBody>
+      </p:sp>
+    </p:spTree>
+    <p:extLst>
+      <p:ext uri="{BB962C8B-B14F-4D97-AF65-F5344CB8AC3E}">
+        <p14:creationId xmlns:p14="http://schemas.microsoft.com/office/powerpoint/2010/main" val="1024086991"/>
+      </p:ext>
+    </p:extLst>
+  </p:cSld>
+  <p:clrMapOvr>
+    <a:masterClrMapping/>
+  </p:clrMapOvr>
+</p:notes>
+</file>
+
+<file path=ppt/notesSlides/notesSlide10.xml><?xml version="1.0" encoding="utf-8"?>
+<p:notes xmlns:a="http://schemas.openxmlformats.org/drawingml/2006/main" xmlns:r="http://schemas.openxmlformats.org/officeDocument/2006/relationships" xmlns:p="http://schemas.openxmlformats.org/presentationml/2006/main">
+  <p:cSld>
+    <p:spTree>
+      <p:nvGrpSpPr>
+        <p:cNvPr id="1" name=""/>
+        <p:cNvGrpSpPr/>
+        <p:nvPr/>
+      </p:nvGrpSpPr>
+      <p:grpSpPr>
+        <a:xfrm>
+          <a:off x="0" y="0"/>
+          <a:ext cx="0" cy="0"/>
+          <a:chOff x="0" y="0"/>
+          <a:chExt cx="0" cy="0"/>
+        </a:xfrm>
+      </p:grpSpPr>
+      <p:sp>
+        <p:nvSpPr>
+          <p:cNvPr id="2" name="Slide Image Placeholder 1"/>
+          <p:cNvSpPr>
+            <a:spLocks noGrp="1" noRot="1" noChangeAspect="1"/>
+          </p:cNvSpPr>
+          <p:nvPr>
+            <p:ph type="sldImg"/>
+          </p:nvPr>
+        </p:nvSpPr>
+        <p:spPr/>
+      </p:sp>
+      <p:sp>
+        <p:nvSpPr>
+          <p:cNvPr id="3" name="Notes Placeholder 2"/>
+          <p:cNvSpPr>
+            <a:spLocks noGrp="1"/>
+          </p:cNvSpPr>
+          <p:nvPr>
+            <p:ph type="body" idx="1"/>
+          </p:nvPr>
+        </p:nvSpPr>
+        <p:spPr/>
+        <p:txBody>
+          <a:bodyPr/>
+          <a:lstStyle/>
+          <a:p>
+            <a:r>
+              <a:rPr lang="en-US" dirty="0"/>
+              <a:t/>
+            </a:r>
+            <a:endParaRPr lang="en-US" dirty="0"/>
+          </a:p>
+        </p:txBody>
+      </p:sp>
+      <p:sp>
+        <p:nvSpPr>
+          <p:cNvPr id="4" name="Slide Number Placeholder 3"/>
+          <p:cNvSpPr>
+            <a:spLocks noGrp="1"/>
+          </p:cNvSpPr>
+          <p:nvPr>
+            <p:ph type="sldNum" sz="quarter" idx="10"/>
+          </p:nvPr>
+        </p:nvSpPr>
+        <p:spPr/>
+        <p:txBody>
+          <a:bodyPr/>
+          <a:lstStyle/>
+          <a:p>
+            <a:fld id="{F7021451-1387-4CA6-816F-3879F97B5CBC}" type="slidenum">
+              <a:rPr lang="en-US"/>
+              <a:t>10</a:t>
             </a:fld>
             <a:endParaRPr lang="en-US"/>
           </a:p>
@@ -1740,9 +1829,739 @@
                 <a:ea typeface="Calibri" pitchFamily="34" charset="-122"/>
                 <a:cs typeface="Calibri" pitchFamily="34" charset="-120"/>
               </a:rPr>
-              <a:t>A4縦で印刷できます。スクリーンショットの枠は、実際の画面を撮って貼り替えてください。</a:t>
+              <a:t>A4縦で印刷できます。画面例はテスト環境のもので、実際の表示とは名称や件数が異なる場合があります。</a:t>
             </a:r>
             <a:endParaRPr lang="en-US" sz="950" dirty="0"/>
+          </a:p>
+        </p:txBody>
+      </p:sp>
+    </p:spTree>
+  </p:cSld>
+  <p:clrMapOvr>
+    <a:masterClrMapping/>
+  </p:clrMapOvr>
+</p:sld>
+</file>
+
+<file path=ppt/slides/slide10.xml><?xml version="1.0" encoding="utf-8"?>
+<p:sld xmlns:a="http://schemas.openxmlformats.org/drawingml/2006/main" xmlns:r="http://schemas.openxmlformats.org/officeDocument/2006/relationships" xmlns:p="http://schemas.openxmlformats.org/presentationml/2006/main">
+  <p:cSld name="Slide 10">
+    <p:bg>
+      <p:bgPr>
+        <a:solidFill>
+          <a:srgbClr val="FFFFFF"/>
+        </a:solidFill>
+      </p:bgPr>
+    </p:bg>
+    <p:spTree>
+      <p:nvGrpSpPr>
+        <p:cNvPr id="1" name=""/>
+        <p:cNvGrpSpPr/>
+        <p:nvPr/>
+      </p:nvGrpSpPr>
+      <p:grpSpPr>
+        <a:xfrm>
+          <a:off x="0" y="0"/>
+          <a:ext cx="0" cy="0"/>
+          <a:chOff x="0" y="0"/>
+          <a:chExt cx="0" cy="0"/>
+        </a:xfrm>
+      </p:grpSpPr>
+      <p:sp>
+        <p:nvSpPr>
+          <p:cNvPr id="2" name="Text 0"/>
+          <p:cNvSpPr txBox="1"/>
+          <p:nvPr/>
+        </p:nvSpPr>
+        <p:spPr>
+          <a:xfrm>
+            <a:off x="566928" y="457200"/>
+            <a:ext cx="6428232" cy="237744"/>
+          </a:xfrm>
+          <a:prstGeom prst="rect">
+            <a:avLst/>
+          </a:prstGeom>
+          <a:noFill/>
+          <a:ln/>
+        </p:spPr>
+        <p:txBody>
+          <a:bodyPr wrap="square" lIns="0" tIns="0" rIns="0" bIns="0" rtlCol="0" anchor="ctr"/>
+          <a:lstStyle/>
+          <a:p>
+            <a:pPr indent="0" marL="0">
+              <a:buNone/>
+            </a:pPr>
+            <a:r>
+              <a:rPr lang="en-US" sz="1000" b="1" dirty="0">
+                <a:solidFill>
+                  <a:srgbClr val="1C7293"/>
+                </a:solidFill>
+                <a:latin typeface="Calibri" pitchFamily="34" charset="0"/>
+                <a:ea typeface="Calibri" pitchFamily="34" charset="-122"/>
+                <a:cs typeface="Calibri" pitchFamily="34" charset="-120"/>
+              </a:rPr>
+              <a:t>企業担当者マニュアル</a:t>
+            </a:r>
+            <a:endParaRPr lang="en-US" sz="1000" dirty="0"/>
+          </a:p>
+        </p:txBody>
+      </p:sp>
+      <p:sp>
+        <p:nvSpPr>
+          <p:cNvPr id="3" name="Text 1"/>
+          <p:cNvSpPr txBox="1"/>
+          <p:nvPr/>
+        </p:nvSpPr>
+        <p:spPr>
+          <a:xfrm>
+            <a:off x="566928" y="713232"/>
+            <a:ext cx="6428232" cy="640080"/>
+          </a:xfrm>
+          <a:prstGeom prst="rect">
+            <a:avLst/>
+          </a:prstGeom>
+          <a:noFill/>
+          <a:ln/>
+        </p:spPr>
+        <p:txBody>
+          <a:bodyPr wrap="square" lIns="0" tIns="0" rIns="0" bIns="0" rtlCol="0" anchor="t"/>
+          <a:lstStyle/>
+          <a:p>
+            <a:pPr indent="0" marL="0">
+              <a:buNone/>
+            </a:pPr>
+            <a:r>
+              <a:rPr lang="en-US" sz="2200" b="1" dirty="0">
+                <a:solidFill>
+                  <a:srgbClr val="222222"/>
+                </a:solidFill>
+                <a:latin typeface="Calibri" pitchFamily="34" charset="0"/>
+                <a:ea typeface="Calibri" pitchFamily="34" charset="-122"/>
+                <a:cs typeface="Calibri" pitchFamily="34" charset="-120"/>
+              </a:rPr>
+              <a:t>よくある質問</a:t>
+            </a:r>
+            <a:endParaRPr lang="en-US" sz="2200" dirty="0"/>
+          </a:p>
+        </p:txBody>
+      </p:sp>
+      <p:sp>
+        <p:nvSpPr>
+          <p:cNvPr id="4" name="Text 2"/>
+          <p:cNvSpPr txBox="1"/>
+          <p:nvPr/>
+        </p:nvSpPr>
+        <p:spPr>
+          <a:xfrm>
+            <a:off x="566928" y="1591056"/>
+            <a:ext cx="6428232" cy="257810"/>
+          </a:xfrm>
+          <a:prstGeom prst="rect">
+            <a:avLst/>
+          </a:prstGeom>
+          <a:noFill/>
+          <a:ln/>
+        </p:spPr>
+        <p:txBody>
+          <a:bodyPr wrap="square" lIns="0" tIns="0" rIns="0" bIns="0" rtlCol="0" anchor="t"/>
+          <a:lstStyle/>
+          <a:p>
+            <a:pPr indent="0" marL="0">
+              <a:buNone/>
+            </a:pPr>
+            <a:r>
+              <a:rPr lang="en-US" sz="1400" b="1" dirty="0">
+                <a:solidFill>
+                  <a:srgbClr val="1C7293"/>
+                </a:solidFill>
+                <a:latin typeface="Calibri" pitchFamily="34" charset="0"/>
+                <a:ea typeface="Calibri" pitchFamily="34" charset="-122"/>
+                <a:cs typeface="Calibri" pitchFamily="34" charset="-120"/>
+              </a:rPr>
+              <a:t>他社の回答は見られますか</a:t>
+            </a:r>
+            <a:endParaRPr lang="en-US" sz="1400" dirty="0"/>
+          </a:p>
+        </p:txBody>
+      </p:sp>
+      <p:sp>
+        <p:nvSpPr>
+          <p:cNvPr id="5" name="Text 3"/>
+          <p:cNvSpPr txBox="1"/>
+          <p:nvPr/>
+        </p:nvSpPr>
+        <p:spPr>
+          <a:xfrm>
+            <a:off x="566928" y="1922018"/>
+            <a:ext cx="6428232" cy="257429"/>
+          </a:xfrm>
+          <a:prstGeom prst="rect">
+            <a:avLst/>
+          </a:prstGeom>
+          <a:noFill/>
+          <a:ln/>
+        </p:spPr>
+        <p:txBody>
+          <a:bodyPr wrap="square" lIns="0" tIns="0" rIns="0" bIns="0" rtlCol="0" anchor="t"/>
+          <a:lstStyle/>
+          <a:p>
+            <a:pPr indent="0" marL="0">
+              <a:lnSpc>
+                <a:spcPct val="125000"/>
+              </a:lnSpc>
+              <a:buNone/>
+            </a:pPr>
+            <a:r>
+              <a:rPr lang="en-US" sz="1100" dirty="0">
+                <a:solidFill>
+                  <a:srgbClr val="222222"/>
+                </a:solidFill>
+                <a:latin typeface="Calibri" pitchFamily="34" charset="0"/>
+                <a:ea typeface="Calibri" pitchFamily="34" charset="-122"/>
+                <a:cs typeface="Calibri" pitchFamily="34" charset="-120"/>
+              </a:rPr>
+              <a:t>見られません。他社のIDでURLを直接開いても「ページが見つかりません」と表示されます。</a:t>
+            </a:r>
+            <a:endParaRPr lang="en-US" sz="1100" dirty="0"/>
+          </a:p>
+        </p:txBody>
+      </p:sp>
+      <p:sp>
+        <p:nvSpPr>
+          <p:cNvPr id="6" name="Text 4"/>
+          <p:cNvSpPr txBox="1"/>
+          <p:nvPr/>
+        </p:nvSpPr>
+        <p:spPr>
+          <a:xfrm>
+            <a:off x="566928" y="2325751"/>
+            <a:ext cx="6428232" cy="257810"/>
+          </a:xfrm>
+          <a:prstGeom prst="rect">
+            <a:avLst/>
+          </a:prstGeom>
+          <a:noFill/>
+          <a:ln/>
+        </p:spPr>
+        <p:txBody>
+          <a:bodyPr wrap="square" lIns="0" tIns="0" rIns="0" bIns="0" rtlCol="0" anchor="t"/>
+          <a:lstStyle/>
+          <a:p>
+            <a:pPr indent="0" marL="0">
+              <a:buNone/>
+            </a:pPr>
+            <a:r>
+              <a:rPr lang="en-US" sz="1400" b="1" dirty="0">
+                <a:solidFill>
+                  <a:srgbClr val="1C7293"/>
+                </a:solidFill>
+                <a:latin typeface="Calibri" pitchFamily="34" charset="0"/>
+                <a:ea typeface="Calibri" pitchFamily="34" charset="-122"/>
+                <a:cs typeface="Calibri" pitchFamily="34" charset="-120"/>
+              </a:rPr>
+              <a:t>来場者の名前やメールアドレスは分かりますか</a:t>
+            </a:r>
+            <a:endParaRPr lang="en-US" sz="1400" dirty="0"/>
+          </a:p>
+        </p:txBody>
+      </p:sp>
+      <p:sp>
+        <p:nvSpPr>
+          <p:cNvPr id="7" name="Text 5"/>
+          <p:cNvSpPr txBox="1"/>
+          <p:nvPr/>
+        </p:nvSpPr>
+        <p:spPr>
+          <a:xfrm>
+            <a:off x="566928" y="2656713"/>
+            <a:ext cx="6428232" cy="459994"/>
+          </a:xfrm>
+          <a:prstGeom prst="rect">
+            <a:avLst/>
+          </a:prstGeom>
+          <a:noFill/>
+          <a:ln/>
+        </p:spPr>
+        <p:txBody>
+          <a:bodyPr wrap="square" lIns="0" tIns="0" rIns="0" bIns="0" rtlCol="0" anchor="t"/>
+          <a:lstStyle/>
+          <a:p>
+            <a:pPr indent="0" marL="0">
+              <a:lnSpc>
+                <a:spcPct val="125000"/>
+              </a:lnSpc>
+              <a:buNone/>
+            </a:pPr>
+            <a:r>
+              <a:rPr lang="en-US" sz="1100" dirty="0">
+                <a:solidFill>
+                  <a:srgbClr val="222222"/>
+                </a:solidFill>
+                <a:latin typeface="Calibri" pitchFamily="34" charset="0"/>
+                <a:ea typeface="Calibri" pitchFamily="34" charset="-122"/>
+                <a:cs typeface="Calibri" pitchFamily="34" charset="-120"/>
+              </a:rPr>
+              <a:t>分かりません。このシステムでは氏名・住所を一切集めていません。メールアドレスは、イベント終了後の全体アンケートの案内にのみ使われ、事務局側で管理されます（企業には共有されません）。</a:t>
+            </a:r>
+            <a:endParaRPr lang="en-US" sz="1100" dirty="0"/>
+          </a:p>
+        </p:txBody>
+      </p:sp>
+      <p:sp>
+        <p:nvSpPr>
+          <p:cNvPr id="8" name="Text 6"/>
+          <p:cNvSpPr txBox="1"/>
+          <p:nvPr/>
+        </p:nvSpPr>
+        <p:spPr>
+          <a:xfrm>
+            <a:off x="566928" y="3263011"/>
+            <a:ext cx="6428232" cy="257810"/>
+          </a:xfrm>
+          <a:prstGeom prst="rect">
+            <a:avLst/>
+          </a:prstGeom>
+          <a:noFill/>
+          <a:ln/>
+        </p:spPr>
+        <p:txBody>
+          <a:bodyPr wrap="square" lIns="0" tIns="0" rIns="0" bIns="0" rtlCol="0" anchor="t"/>
+          <a:lstStyle/>
+          <a:p>
+            <a:pPr indent="0" marL="0">
+              <a:buNone/>
+            </a:pPr>
+            <a:r>
+              <a:rPr lang="en-US" sz="1400" b="1" dirty="0">
+                <a:solidFill>
+                  <a:srgbClr val="1C7293"/>
+                </a:solidFill>
+                <a:latin typeface="Calibri" pitchFamily="34" charset="0"/>
+                <a:ea typeface="Calibri" pitchFamily="34" charset="-122"/>
+                <a:cs typeface="Calibri" pitchFamily="34" charset="-120"/>
+              </a:rPr>
+              <a:t>同じ人が何社まわったか分かりますか</a:t>
+            </a:r>
+            <a:endParaRPr lang="en-US" sz="1400" dirty="0"/>
+          </a:p>
+        </p:txBody>
+      </p:sp>
+      <p:sp>
+        <p:nvSpPr>
+          <p:cNvPr id="9" name="Text 7"/>
+          <p:cNvSpPr txBox="1"/>
+          <p:nvPr/>
+        </p:nvSpPr>
+        <p:spPr>
+          <a:xfrm>
+            <a:off x="566928" y="3593973"/>
+            <a:ext cx="6428232" cy="257429"/>
+          </a:xfrm>
+          <a:prstGeom prst="rect">
+            <a:avLst/>
+          </a:prstGeom>
+          <a:noFill/>
+          <a:ln/>
+        </p:spPr>
+        <p:txBody>
+          <a:bodyPr wrap="square" lIns="0" tIns="0" rIns="0" bIns="0" rtlCol="0" anchor="t"/>
+          <a:lstStyle/>
+          <a:p>
+            <a:pPr indent="0" marL="0">
+              <a:lnSpc>
+                <a:spcPct val="125000"/>
+              </a:lnSpc>
+              <a:buNone/>
+            </a:pPr>
+            <a:r>
+              <a:rPr lang="en-US" sz="1100" dirty="0">
+                <a:solidFill>
+                  <a:srgbClr val="222222"/>
+                </a:solidFill>
+                <a:latin typeface="Calibri" pitchFamily="34" charset="0"/>
+                <a:ea typeface="Calibri" pitchFamily="34" charset="-122"/>
+                <a:cs typeface="Calibri" pitchFamily="34" charset="-120"/>
+              </a:rPr>
+              <a:t>自社の画面では分かりません。イベント全体の傾向は主催者が確認します。</a:t>
+            </a:r>
+            <a:endParaRPr lang="en-US" sz="1100" dirty="0"/>
+          </a:p>
+        </p:txBody>
+      </p:sp>
+      <p:sp>
+        <p:nvSpPr>
+          <p:cNvPr id="10" name="Text 8"/>
+          <p:cNvSpPr txBox="1"/>
+          <p:nvPr/>
+        </p:nvSpPr>
+        <p:spPr>
+          <a:xfrm>
+            <a:off x="566928" y="3997706"/>
+            <a:ext cx="6428232" cy="257810"/>
+          </a:xfrm>
+          <a:prstGeom prst="rect">
+            <a:avLst/>
+          </a:prstGeom>
+          <a:noFill/>
+          <a:ln/>
+        </p:spPr>
+        <p:txBody>
+          <a:bodyPr wrap="square" lIns="0" tIns="0" rIns="0" bIns="0" rtlCol="0" anchor="t"/>
+          <a:lstStyle/>
+          <a:p>
+            <a:pPr indent="0" marL="0">
+              <a:buNone/>
+            </a:pPr>
+            <a:r>
+              <a:rPr lang="en-US" sz="1400" b="1" dirty="0">
+                <a:solidFill>
+                  <a:srgbClr val="1C7293"/>
+                </a:solidFill>
+                <a:latin typeface="Calibri" pitchFamily="34" charset="0"/>
+                <a:ea typeface="Calibri" pitchFamily="34" charset="-122"/>
+                <a:cs typeface="Calibri" pitchFamily="34" charset="-120"/>
+              </a:rPr>
+              <a:t>回答が0件のままです</a:t>
+            </a:r>
+            <a:endParaRPr lang="en-US" sz="1400" dirty="0"/>
+          </a:p>
+        </p:txBody>
+      </p:sp>
+      <p:sp>
+        <p:nvSpPr>
+          <p:cNvPr id="11" name="Text 9"/>
+          <p:cNvSpPr txBox="1"/>
+          <p:nvPr/>
+        </p:nvSpPr>
+        <p:spPr>
+          <a:xfrm>
+            <a:off x="566928" y="4328668"/>
+            <a:ext cx="6428232" cy="459994"/>
+          </a:xfrm>
+          <a:prstGeom prst="rect">
+            <a:avLst/>
+          </a:prstGeom>
+          <a:noFill/>
+          <a:ln/>
+        </p:spPr>
+        <p:txBody>
+          <a:bodyPr wrap="square" lIns="0" tIns="0" rIns="0" bIns="0" rtlCol="0" anchor="t"/>
+          <a:lstStyle/>
+          <a:p>
+            <a:pPr indent="0" marL="0">
+              <a:lnSpc>
+                <a:spcPct val="125000"/>
+              </a:lnSpc>
+              <a:buNone/>
+            </a:pPr>
+            <a:r>
+              <a:rPr lang="en-US" sz="1100" dirty="0">
+                <a:solidFill>
+                  <a:srgbClr val="222222"/>
+                </a:solidFill>
+                <a:latin typeface="Calibri" pitchFamily="34" charset="0"/>
+                <a:ea typeface="Calibri" pitchFamily="34" charset="-122"/>
+                <a:cs typeface="Calibri" pitchFamily="34" charset="-120"/>
+              </a:rPr>
+              <a:t>アンケートが</a:t>
+            </a:r>
+            <a:pPr indent="0" marL="0">
+              <a:lnSpc>
+                <a:spcPct val="125000"/>
+              </a:lnSpc>
+              <a:buNone/>
+            </a:pPr>
+            <a:r>
+              <a:rPr lang="en-US" sz="1100" b="1" dirty="0">
+                <a:solidFill>
+                  <a:srgbClr val="222222"/>
+                </a:solidFill>
+                <a:latin typeface="Calibri" pitchFamily="34" charset="0"/>
+                <a:ea typeface="Calibri" pitchFamily="34" charset="-122"/>
+                <a:cs typeface="Calibri" pitchFamily="34" charset="-120"/>
+              </a:rPr>
+              <a:t>公開</a:t>
+            </a:r>
+            <a:pPr indent="0" marL="0">
+              <a:lnSpc>
+                <a:spcPct val="125000"/>
+              </a:lnSpc>
+              <a:buNone/>
+            </a:pPr>
+            <a:r>
+              <a:rPr lang="en-US" sz="1100" dirty="0">
+                <a:solidFill>
+                  <a:srgbClr val="222222"/>
+                </a:solidFill>
+                <a:latin typeface="Calibri" pitchFamily="34" charset="0"/>
+                <a:ea typeface="Calibri" pitchFamily="34" charset="-122"/>
+                <a:cs typeface="Calibri" pitchFamily="34" charset="-120"/>
+              </a:rPr>
+              <a:t>になっているか、イベントが</a:t>
+            </a:r>
+            <a:pPr indent="0" marL="0">
+              <a:lnSpc>
+                <a:spcPct val="125000"/>
+              </a:lnSpc>
+              <a:buNone/>
+            </a:pPr>
+            <a:r>
+              <a:rPr lang="en-US" sz="1100" b="1" dirty="0">
+                <a:solidFill>
+                  <a:srgbClr val="222222"/>
+                </a:solidFill>
+                <a:latin typeface="Calibri" pitchFamily="34" charset="0"/>
+                <a:ea typeface="Calibri" pitchFamily="34" charset="-122"/>
+                <a:cs typeface="Calibri" pitchFamily="34" charset="-120"/>
+              </a:rPr>
+              <a:t>開催中</a:t>
+            </a:r>
+            <a:pPr indent="0" marL="0">
+              <a:lnSpc>
+                <a:spcPct val="125000"/>
+              </a:lnSpc>
+              <a:buNone/>
+            </a:pPr>
+            <a:r>
+              <a:rPr lang="en-US" sz="1100" dirty="0">
+                <a:solidFill>
+                  <a:srgbClr val="222222"/>
+                </a:solidFill>
+                <a:latin typeface="Calibri" pitchFamily="34" charset="0"/>
+                <a:ea typeface="Calibri" pitchFamily="34" charset="-122"/>
+                <a:cs typeface="Calibri" pitchFamily="34" charset="-120"/>
+              </a:rPr>
+              <a:t>になっているかをご確認ください。どちらも問題なければ事務局にご相談ください。</a:t>
+            </a:r>
+            <a:endParaRPr lang="en-US" sz="1100" dirty="0"/>
+          </a:p>
+        </p:txBody>
+      </p:sp>
+      <p:sp>
+        <p:nvSpPr>
+          <p:cNvPr id="12" name="Text 10"/>
+          <p:cNvSpPr txBox="1"/>
+          <p:nvPr/>
+        </p:nvSpPr>
+        <p:spPr>
+          <a:xfrm>
+            <a:off x="566928" y="4934966"/>
+            <a:ext cx="6428232" cy="257810"/>
+          </a:xfrm>
+          <a:prstGeom prst="rect">
+            <a:avLst/>
+          </a:prstGeom>
+          <a:noFill/>
+          <a:ln/>
+        </p:spPr>
+        <p:txBody>
+          <a:bodyPr wrap="square" lIns="0" tIns="0" rIns="0" bIns="0" rtlCol="0" anchor="t"/>
+          <a:lstStyle/>
+          <a:p>
+            <a:pPr indent="0" marL="0">
+              <a:buNone/>
+            </a:pPr>
+            <a:r>
+              <a:rPr lang="en-US" sz="1400" b="1" dirty="0">
+                <a:solidFill>
+                  <a:srgbClr val="1C7293"/>
+                </a:solidFill>
+                <a:latin typeface="Calibri" pitchFamily="34" charset="0"/>
+                <a:ea typeface="Calibri" pitchFamily="34" charset="-122"/>
+                <a:cs typeface="Calibri" pitchFamily="34" charset="-120"/>
+              </a:rPr>
+              <a:t>アンケートの内容を印刷して確認したい</a:t>
+            </a:r>
+            <a:endParaRPr lang="en-US" sz="1400" dirty="0"/>
+          </a:p>
+        </p:txBody>
+      </p:sp>
+      <p:sp>
+        <p:nvSpPr>
+          <p:cNvPr id="13" name="Text 11"/>
+          <p:cNvSpPr txBox="1"/>
+          <p:nvPr/>
+        </p:nvSpPr>
+        <p:spPr>
+          <a:xfrm>
+            <a:off x="566928" y="5265928"/>
+            <a:ext cx="6428232" cy="257429"/>
+          </a:xfrm>
+          <a:prstGeom prst="rect">
+            <a:avLst/>
+          </a:prstGeom>
+          <a:noFill/>
+          <a:ln/>
+        </p:spPr>
+        <p:txBody>
+          <a:bodyPr wrap="square" lIns="0" tIns="0" rIns="0" bIns="0" rtlCol="0" anchor="t"/>
+          <a:lstStyle/>
+          <a:p>
+            <a:pPr indent="0" marL="0">
+              <a:lnSpc>
+                <a:spcPct val="125000"/>
+              </a:lnSpc>
+              <a:buNone/>
+            </a:pPr>
+            <a:r>
+              <a:rPr lang="en-US" sz="1100" dirty="0">
+                <a:solidFill>
+                  <a:srgbClr val="222222"/>
+                </a:solidFill>
+                <a:latin typeface="Calibri" pitchFamily="34" charset="0"/>
+                <a:ea typeface="Calibri" pitchFamily="34" charset="-122"/>
+                <a:cs typeface="Calibri" pitchFamily="34" charset="-120"/>
+              </a:rPr>
+              <a:t>ブラウザの印刷機能で、編集画面や集計画面をそのまま印刷できます。</a:t>
+            </a:r>
+            <a:endParaRPr lang="en-US" sz="1100" dirty="0"/>
+          </a:p>
+        </p:txBody>
+      </p:sp>
+      <p:sp>
+        <p:nvSpPr>
+          <p:cNvPr id="14" name="Shape 12"/>
+          <p:cNvSpPr/>
+          <p:nvPr/>
+        </p:nvSpPr>
+        <p:spPr>
+          <a:xfrm>
+            <a:off x="566928" y="5559933"/>
+            <a:ext cx="6428232" cy="431102"/>
+          </a:xfrm>
+          <a:prstGeom prst="roundRect">
+            <a:avLst>
+              <a:gd name="adj" fmla="val 12726"/>
+            </a:avLst>
+          </a:prstGeom>
+          <a:solidFill>
+            <a:srgbClr val="E3F0F4"/>
+          </a:solidFill>
+          <a:ln w="9525">
+            <a:solidFill>
+              <a:srgbClr val="1C7293"/>
+            </a:solidFill>
+            <a:prstDash val="solid"/>
+          </a:ln>
+        </p:spPr>
+      </p:sp>
+      <p:sp>
+        <p:nvSpPr>
+          <p:cNvPr id="15" name="Text 13"/>
+          <p:cNvSpPr txBox="1"/>
+          <p:nvPr/>
+        </p:nvSpPr>
+        <p:spPr>
+          <a:xfrm>
+            <a:off x="658368" y="5651373"/>
+            <a:ext cx="237744" cy="237744"/>
+          </a:xfrm>
+          <a:prstGeom prst="rect">
+            <a:avLst/>
+          </a:prstGeom>
+          <a:noFill/>
+          <a:ln/>
+        </p:spPr>
+        <p:txBody>
+          <a:bodyPr wrap="square" lIns="0" tIns="0" rIns="0" bIns="0" rtlCol="0" anchor="ctr"/>
+          <a:lstStyle/>
+          <a:p>
+            <a:pPr algn="ctr" indent="0" marL="0">
+              <a:buNone/>
+            </a:pPr>
+            <a:r>
+              <a:rPr lang="en-US" sz="1200" b="1" dirty="0">
+                <a:solidFill>
+                  <a:srgbClr val="1C7293"/>
+                </a:solidFill>
+                <a:latin typeface="Calibri" pitchFamily="34" charset="0"/>
+                <a:ea typeface="Calibri" pitchFamily="34" charset="-122"/>
+                <a:cs typeface="Calibri" pitchFamily="34" charset="-120"/>
+              </a:rPr>
+              <a:t>i</a:t>
+            </a:r>
+            <a:endParaRPr lang="en-US" sz="1200" dirty="0"/>
+          </a:p>
+        </p:txBody>
+      </p:sp>
+      <p:sp>
+        <p:nvSpPr>
+          <p:cNvPr id="16" name="Text 14"/>
+          <p:cNvSpPr txBox="1"/>
+          <p:nvPr/>
+        </p:nvSpPr>
+        <p:spPr>
+          <a:xfrm>
+            <a:off x="950976" y="5669661"/>
+            <a:ext cx="5925312" cy="248221"/>
+          </a:xfrm>
+          <a:prstGeom prst="rect">
+            <a:avLst/>
+          </a:prstGeom>
+          <a:noFill/>
+          <a:ln/>
+        </p:spPr>
+        <p:txBody>
+          <a:bodyPr wrap="square" lIns="0" tIns="0" rIns="0" bIns="0" rtlCol="0" anchor="t"/>
+          <a:lstStyle/>
+          <a:p>
+            <a:pPr indent="0" marL="0">
+              <a:lnSpc>
+                <a:spcPct val="120000"/>
+              </a:lnSpc>
+              <a:buNone/>
+            </a:pPr>
+            <a:r>
+              <a:rPr lang="en-US" sz="1050" dirty="0">
+                <a:solidFill>
+                  <a:srgbClr val="222222"/>
+                </a:solidFill>
+                <a:latin typeface="Calibri" pitchFamily="34" charset="0"/>
+                <a:ea typeface="Calibri" pitchFamily="34" charset="-122"/>
+                <a:cs typeface="Calibri" pitchFamily="34" charset="-120"/>
+              </a:rPr>
+              <a:t>分からないことがあれば、事務局までお問い合わせください。</a:t>
+            </a:r>
+            <a:endParaRPr lang="en-US" sz="1050" dirty="0"/>
+          </a:p>
+        </p:txBody>
+      </p:sp>
+      <p:sp>
+        <p:nvSpPr>
+          <p:cNvPr id="17" name="Text 15"/>
+          <p:cNvSpPr txBox="1"/>
+          <p:nvPr/>
+        </p:nvSpPr>
+        <p:spPr>
+          <a:xfrm>
+            <a:off x="566928" y="10186416"/>
+            <a:ext cx="6428232" cy="228600"/>
+          </a:xfrm>
+          <a:prstGeom prst="rect">
+            <a:avLst/>
+          </a:prstGeom>
+          <a:noFill/>
+          <a:ln/>
+        </p:spPr>
+        <p:txBody>
+          <a:bodyPr wrap="square" lIns="0" tIns="0" rIns="0" bIns="0" rtlCol="0" anchor="ctr"/>
+          <a:lstStyle/>
+          <a:p>
+            <a:pPr algn="r" indent="0" marL="0">
+              <a:buNone/>
+            </a:pPr>
+            <a:r>
+              <a:rPr lang="en-US" sz="900" dirty="0">
+                <a:solidFill>
+                  <a:srgbClr val="6B6B6B"/>
+                </a:solidFill>
+                <a:latin typeface="Calibri" pitchFamily="34" charset="0"/>
+                <a:ea typeface="Calibri" pitchFamily="34" charset="-122"/>
+                <a:cs typeface="Calibri" pitchFamily="34" charset="-120"/>
+              </a:rPr>
+              <a:t>企業担当者向け　10</a:t>
+            </a:r>
+            <a:endParaRPr lang="en-US" sz="900" dirty="0"/>
           </a:p>
         </p:txBody>
       </p:sp>
@@ -2448,43 +3267,40 @@
           </a:p>
         </p:txBody>
       </p:sp>
-      <p:sp>
-        <p:nvSpPr>
-          <p:cNvPr id="14" name="Shape 12"/>
-          <p:cNvSpPr/>
-          <p:nvPr/>
-        </p:nvSpPr>
+      <p:pic>
+        <p:nvPicPr>
+          <p:cNvPr id="14" name="Image 0" descr="C:\Users\sato\Desktop\enque\docs\images\c-dashboard.png">    </p:cNvPr>
+          <p:cNvPicPr>
+            <a:picLocks noChangeAspect="1"/>
+          </p:cNvPicPr>
+          <p:nvPr/>
+        </p:nvPicPr>
+        <p:blipFill>
+          <a:blip r:embed="rId1"/>
+          <a:stretch>
+            <a:fillRect/>
+          </a:stretch>
+        </p:blipFill>
         <p:spPr>
           <a:xfrm>
             <a:off x="566928" y="4080573"/>
-            <a:ext cx="6428232" cy="2606040"/>
-          </a:xfrm>
-          <a:prstGeom prst="roundRect">
-            <a:avLst>
-              <a:gd name="adj" fmla="val 1754"/>
-            </a:avLst>
-          </a:prstGeom>
-          <a:solidFill>
-            <a:srgbClr val="F7F7F7"/>
-          </a:solidFill>
-          <a:ln w="12700">
-            <a:solidFill>
-              <a:srgbClr val="D8D8D8"/>
-            </a:solidFill>
-            <a:prstDash val="dash"/>
-          </a:ln>
-        </p:spPr>
-      </p:sp>
-      <p:sp>
-        <p:nvSpPr>
-          <p:cNvPr id="15" name="Text 13"/>
-          <p:cNvSpPr txBox="1"/>
-          <p:nvPr/>
-        </p:nvSpPr>
-        <p:spPr>
-          <a:xfrm>
-            <a:off x="749808" y="4464622"/>
-            <a:ext cx="6062472" cy="274320"/>
+            <a:ext cx="6428232" cy="2066606"/>
+          </a:xfrm>
+          <a:prstGeom prst="rect">
+            <a:avLst/>
+          </a:prstGeom>
+        </p:spPr>
+      </p:pic>
+      <p:sp>
+        <p:nvSpPr>
+          <p:cNvPr id="15" name="Text 12"/>
+          <p:cNvSpPr txBox="1"/>
+          <p:nvPr/>
+        </p:nvSpPr>
+        <p:spPr>
+          <a:xfrm>
+            <a:off x="566928" y="6202043"/>
+            <a:ext cx="6428232" cy="274320"/>
           </a:xfrm>
           <a:prstGeom prst="rect">
             <a:avLst/>
@@ -2500,7 +3316,7 @@
               <a:buNone/>
             </a:pPr>
             <a:r>
-              <a:rPr lang="en-US" sz="1100" b="1" dirty="0">
+              <a:rPr lang="en-US" sz="950" dirty="0">
                 <a:solidFill>
                   <a:srgbClr val="6B6B6B"/>
                 </a:solidFill>
@@ -2508,57 +3324,15 @@
                 <a:ea typeface="Calibri" pitchFamily="34" charset="-122"/>
                 <a:cs typeface="Calibri" pitchFamily="34" charset="-120"/>
               </a:rPr>
-              <a:t>［ スクリーンショット ］ ここに貼り付けてください</a:t>
-            </a:r>
-            <a:endParaRPr lang="en-US" sz="1100" dirty="0"/>
-          </a:p>
-        </p:txBody>
-      </p:sp>
-      <p:sp>
-        <p:nvSpPr>
-          <p:cNvPr id="16" name="Text 14"/>
-          <p:cNvSpPr txBox="1"/>
-          <p:nvPr/>
-        </p:nvSpPr>
-        <p:spPr>
-          <a:xfrm>
-            <a:off x="841248" y="4830382"/>
-            <a:ext cx="5879592" cy="731520"/>
-          </a:xfrm>
-          <a:prstGeom prst="rect">
-            <a:avLst/>
-          </a:prstGeom>
-          <a:noFill/>
-          <a:ln/>
-        </p:spPr>
-        <p:txBody>
-          <a:bodyPr wrap="square" lIns="0" tIns="0" rIns="0" bIns="0" rtlCol="0" anchor="t"/>
-          <a:lstStyle/>
-          <a:p>
-            <a:pPr algn="ctr" indent="0" marL="0">
-              <a:lnSpc>
-                <a:spcPct val="120000"/>
-              </a:lnSpc>
-              <a:buNone/>
-            </a:pPr>
-            <a:r>
-              <a:rPr lang="en-US" sz="1050" dirty="0">
-                <a:solidFill>
-                  <a:srgbClr val="222222"/>
-                </a:solidFill>
-                <a:latin typeface="Calibri" pitchFamily="34" charset="0"/>
-                <a:ea typeface="Calibri" pitchFamily="34" charset="-122"/>
-                <a:cs typeface="Calibri" pitchFamily="34" charset="-120"/>
-              </a:rPr>
               <a:t>自社ダッシュボードの全体像（回答数・重複送信・設問数のタイルが見えるもの）。</a:t>
             </a:r>
-            <a:endParaRPr lang="en-US" sz="1050" dirty="0"/>
-          </a:p>
-        </p:txBody>
-      </p:sp>
-      <p:sp>
-        <p:nvSpPr>
-          <p:cNvPr id="17" name="Text 15"/>
+            <a:endParaRPr lang="en-US" sz="950" dirty="0"/>
+          </a:p>
+        </p:txBody>
+      </p:sp>
+      <p:sp>
+        <p:nvSpPr>
+          <p:cNvPr id="16" name="Text 13"/>
           <p:cNvSpPr txBox="1"/>
           <p:nvPr/>
         </p:nvSpPr>
@@ -3385,43 +4159,40 @@
           </a:p>
         </p:txBody>
       </p:sp>
-      <p:sp>
-        <p:nvSpPr>
-          <p:cNvPr id="20" name="Shape 18"/>
-          <p:cNvSpPr/>
-          <p:nvPr/>
-        </p:nvSpPr>
+      <p:pic>
+        <p:nvPicPr>
+          <p:cNvPr id="20" name="Image 0" descr="C:\Users\sato\Desktop\enque\docs\images\c-login.png">    </p:cNvPr>
+          <p:cNvPicPr>
+            <a:picLocks noChangeAspect="1"/>
+          </p:cNvPicPr>
+          <p:nvPr/>
+        </p:nvPicPr>
+        <p:blipFill>
+          <a:blip r:embed="rId1"/>
+          <a:stretch>
+            <a:fillRect/>
+          </a:stretch>
+        </p:blipFill>
         <p:spPr>
           <a:xfrm>
             <a:off x="566928" y="4542155"/>
-            <a:ext cx="6428232" cy="2606040"/>
-          </a:xfrm>
-          <a:prstGeom prst="roundRect">
-            <a:avLst>
-              <a:gd name="adj" fmla="val 1754"/>
-            </a:avLst>
-          </a:prstGeom>
-          <a:solidFill>
-            <a:srgbClr val="F7F7F7"/>
-          </a:solidFill>
-          <a:ln w="12700">
-            <a:solidFill>
-              <a:srgbClr val="D8D8D8"/>
-            </a:solidFill>
-            <a:prstDash val="dash"/>
-          </a:ln>
-        </p:spPr>
-      </p:sp>
-      <p:sp>
-        <p:nvSpPr>
-          <p:cNvPr id="21" name="Text 19"/>
-          <p:cNvSpPr txBox="1"/>
-          <p:nvPr/>
-        </p:nvSpPr>
-        <p:spPr>
-          <a:xfrm>
-            <a:off x="749808" y="4926203"/>
-            <a:ext cx="6062472" cy="274320"/>
+            <a:ext cx="6428232" cy="2376597"/>
+          </a:xfrm>
+          <a:prstGeom prst="rect">
+            <a:avLst/>
+          </a:prstGeom>
+        </p:spPr>
+      </p:pic>
+      <p:sp>
+        <p:nvSpPr>
+          <p:cNvPr id="21" name="Text 18"/>
+          <p:cNvSpPr txBox="1"/>
+          <p:nvPr/>
+        </p:nvSpPr>
+        <p:spPr>
+          <a:xfrm>
+            <a:off x="566928" y="6973616"/>
+            <a:ext cx="6428232" cy="274320"/>
           </a:xfrm>
           <a:prstGeom prst="rect">
             <a:avLst/>
@@ -3437,7 +4208,7 @@
               <a:buNone/>
             </a:pPr>
             <a:r>
-              <a:rPr lang="en-US" sz="1100" b="1" dirty="0">
+              <a:rPr lang="en-US" sz="950" dirty="0">
                 <a:solidFill>
                   <a:srgbClr val="6B6B6B"/>
                 </a:solidFill>
@@ -3445,57 +4216,15 @@
                 <a:ea typeface="Calibri" pitchFamily="34" charset="-122"/>
                 <a:cs typeface="Calibri" pitchFamily="34" charset="-120"/>
               </a:rPr>
-              <a:t>［ スクリーンショット ］ ここに貼り付けてください</a:t>
-            </a:r>
-            <a:endParaRPr lang="en-US" sz="1100" dirty="0"/>
-          </a:p>
-        </p:txBody>
-      </p:sp>
-      <p:sp>
-        <p:nvSpPr>
-          <p:cNvPr id="22" name="Text 20"/>
-          <p:cNvSpPr txBox="1"/>
-          <p:nvPr/>
-        </p:nvSpPr>
-        <p:spPr>
-          <a:xfrm>
-            <a:off x="841248" y="5291963"/>
-            <a:ext cx="5879592" cy="731520"/>
-          </a:xfrm>
-          <a:prstGeom prst="rect">
-            <a:avLst/>
-          </a:prstGeom>
-          <a:noFill/>
-          <a:ln/>
-        </p:spPr>
-        <p:txBody>
-          <a:bodyPr wrap="square" lIns="0" tIns="0" rIns="0" bIns="0" rtlCol="0" anchor="t"/>
-          <a:lstStyle/>
-          <a:p>
-            <a:pPr algn="ctr" indent="0" marL="0">
-              <a:lnSpc>
-                <a:spcPct val="120000"/>
-              </a:lnSpc>
-              <a:buNone/>
-            </a:pPr>
-            <a:r>
-              <a:rPr lang="en-US" sz="1050" dirty="0">
-                <a:solidFill>
-                  <a:srgbClr val="222222"/>
-                </a:solidFill>
-                <a:latin typeface="Calibri" pitchFamily="34" charset="0"/>
-                <a:ea typeface="Calibri" pitchFamily="34" charset="-122"/>
-                <a:cs typeface="Calibri" pitchFamily="34" charset="-120"/>
-              </a:rPr>
               <a:t>管理画面のログイン画面。</a:t>
             </a:r>
-            <a:endParaRPr lang="en-US" sz="1050" dirty="0"/>
-          </a:p>
-        </p:txBody>
-      </p:sp>
-      <p:sp>
-        <p:nvSpPr>
-          <p:cNvPr id="23" name="Text 21"/>
+            <a:endParaRPr lang="en-US" sz="950" dirty="0"/>
+          </a:p>
+        </p:txBody>
+      </p:sp>
+      <p:sp>
+        <p:nvSpPr>
+          <p:cNvPr id="22" name="Text 19"/>
           <p:cNvSpPr txBox="1"/>
           <p:nvPr/>
         </p:nvSpPr>
@@ -4970,115 +5699,7 @@
       </p:sp>
       <p:sp>
         <p:nvSpPr>
-          <p:cNvPr id="32" name="Shape 30"/>
-          <p:cNvSpPr/>
-          <p:nvPr/>
-        </p:nvSpPr>
-        <p:spPr>
-          <a:xfrm>
-            <a:off x="566928" y="6795008"/>
-            <a:ext cx="6428232" cy="2606040"/>
-          </a:xfrm>
-          <a:prstGeom prst="roundRect">
-            <a:avLst>
-              <a:gd name="adj" fmla="val 1754"/>
-            </a:avLst>
-          </a:prstGeom>
-          <a:solidFill>
-            <a:srgbClr val="F7F7F7"/>
-          </a:solidFill>
-          <a:ln w="12700">
-            <a:solidFill>
-              <a:srgbClr val="D8D8D8"/>
-            </a:solidFill>
-            <a:prstDash val="dash"/>
-          </a:ln>
-        </p:spPr>
-      </p:sp>
-      <p:sp>
-        <p:nvSpPr>
-          <p:cNvPr id="33" name="Text 31"/>
-          <p:cNvSpPr txBox="1"/>
-          <p:nvPr/>
-        </p:nvSpPr>
-        <p:spPr>
-          <a:xfrm>
-            <a:off x="749808" y="7179056"/>
-            <a:ext cx="6062472" cy="274320"/>
-          </a:xfrm>
-          <a:prstGeom prst="rect">
-            <a:avLst/>
-          </a:prstGeom>
-          <a:noFill/>
-          <a:ln/>
-        </p:spPr>
-        <p:txBody>
-          <a:bodyPr wrap="square" lIns="0" tIns="0" rIns="0" bIns="0" rtlCol="0" anchor="ctr"/>
-          <a:lstStyle/>
-          <a:p>
-            <a:pPr algn="ctr" indent="0" marL="0">
-              <a:buNone/>
-            </a:pPr>
-            <a:r>
-              <a:rPr lang="en-US" sz="1100" b="1" dirty="0">
-                <a:solidFill>
-                  <a:srgbClr val="6B6B6B"/>
-                </a:solidFill>
-                <a:latin typeface="Calibri" pitchFamily="34" charset="0"/>
-                <a:ea typeface="Calibri" pitchFamily="34" charset="-122"/>
-                <a:cs typeface="Calibri" pitchFamily="34" charset="-120"/>
-              </a:rPr>
-              <a:t>［ スクリーンショット ］ ここに貼り付けてください</a:t>
-            </a:r>
-            <a:endParaRPr lang="en-US" sz="1100" dirty="0"/>
-          </a:p>
-        </p:txBody>
-      </p:sp>
-      <p:sp>
-        <p:nvSpPr>
-          <p:cNvPr id="34" name="Text 32"/>
-          <p:cNvSpPr txBox="1"/>
-          <p:nvPr/>
-        </p:nvSpPr>
-        <p:spPr>
-          <a:xfrm>
-            <a:off x="841248" y="7544816"/>
-            <a:ext cx="5879592" cy="731520"/>
-          </a:xfrm>
-          <a:prstGeom prst="rect">
-            <a:avLst/>
-          </a:prstGeom>
-          <a:noFill/>
-          <a:ln/>
-        </p:spPr>
-        <p:txBody>
-          <a:bodyPr wrap="square" lIns="0" tIns="0" rIns="0" bIns="0" rtlCol="0" anchor="t"/>
-          <a:lstStyle/>
-          <a:p>
-            <a:pPr algn="ctr" indent="0" marL="0">
-              <a:lnSpc>
-                <a:spcPct val="120000"/>
-              </a:lnSpc>
-              <a:buNone/>
-            </a:pPr>
-            <a:r>
-              <a:rPr lang="en-US" sz="1050" dirty="0">
-                <a:solidFill>
-                  <a:srgbClr val="222222"/>
-                </a:solidFill>
-                <a:latin typeface="Calibri" pitchFamily="34" charset="0"/>
-                <a:ea typeface="Calibri" pitchFamily="34" charset="-122"/>
-                <a:cs typeface="Calibri" pitchFamily="34" charset="-120"/>
-              </a:rPr>
-              <a:t>アンケート編集画面。設問文・種類・選択肢の入力欄が見えるもの。</a:t>
-            </a:r>
-            <a:endParaRPr lang="en-US" sz="1050" dirty="0"/>
-          </a:p>
-        </p:txBody>
-      </p:sp>
-      <p:sp>
-        <p:nvSpPr>
-          <p:cNvPr id="35" name="Text 33"/>
+          <p:cNvPr id="32" name="Text 30"/>
           <p:cNvSpPr txBox="1"/>
           <p:nvPr/>
         </p:nvSpPr>
@@ -5219,49 +5840,46 @@
                 <a:ea typeface="Calibri" pitchFamily="34" charset="-122"/>
                 <a:cs typeface="Calibri" pitchFamily="34" charset="-120"/>
               </a:rPr>
-              <a:t>公開と注意点</a:t>
+              <a:t>アンケートの設問を作る（つづき）</a:t>
             </a:r>
             <a:endParaRPr lang="en-US" sz="2200" dirty="0"/>
           </a:p>
         </p:txBody>
       </p:sp>
-      <p:sp>
-        <p:nvSpPr>
-          <p:cNvPr id="4" name="Shape 2"/>
-          <p:cNvSpPr/>
-          <p:nvPr/>
-        </p:nvSpPr>
-        <p:spPr>
-          <a:xfrm>
-            <a:off x="566928" y="1481328"/>
-            <a:ext cx="6428232" cy="624459"/>
-          </a:xfrm>
-          <a:prstGeom prst="roundRect">
-            <a:avLst>
-              <a:gd name="adj" fmla="val 8786"/>
-            </a:avLst>
-          </a:prstGeom>
-          <a:solidFill>
-            <a:srgbClr val="FDF0E6"/>
-          </a:solidFill>
-          <a:ln w="9525">
-            <a:solidFill>
-              <a:srgbClr val="E08A3C"/>
-            </a:solidFill>
-            <a:prstDash val="solid"/>
-          </a:ln>
-        </p:spPr>
-      </p:sp>
-      <p:sp>
-        <p:nvSpPr>
-          <p:cNvPr id="5" name="Text 3"/>
-          <p:cNvSpPr txBox="1"/>
-          <p:nvPr/>
-        </p:nvSpPr>
-        <p:spPr>
-          <a:xfrm>
-            <a:off x="658368" y="1572768"/>
-            <a:ext cx="237744" cy="237744"/>
+      <p:pic>
+        <p:nvPicPr>
+          <p:cNvPr id="4" name="Image 0" descr="C:\Users\sato\Desktop\enque\docs\images\c-survey-edit.png">    </p:cNvPr>
+          <p:cNvPicPr>
+            <a:picLocks noChangeAspect="1"/>
+          </p:cNvPicPr>
+          <p:nvPr/>
+        </p:nvPicPr>
+        <p:blipFill>
+          <a:blip r:embed="rId1"/>
+          <a:stretch>
+            <a:fillRect/>
+          </a:stretch>
+        </p:blipFill>
+        <p:spPr>
+          <a:xfrm>
+            <a:off x="2140821" y="1481328"/>
+            <a:ext cx="3280447" cy="3474720"/>
+          </a:xfrm>
+          <a:prstGeom prst="rect">
+            <a:avLst/>
+          </a:prstGeom>
+        </p:spPr>
+      </p:pic>
+      <p:sp>
+        <p:nvSpPr>
+          <p:cNvPr id="5" name="Text 2"/>
+          <p:cNvSpPr txBox="1"/>
+          <p:nvPr/>
+        </p:nvSpPr>
+        <p:spPr>
+          <a:xfrm>
+            <a:off x="566928" y="5010912"/>
+            <a:ext cx="6428232" cy="274320"/>
           </a:xfrm>
           <a:prstGeom prst="rect">
             <a:avLst/>
@@ -5277,567 +5895,7 @@
               <a:buNone/>
             </a:pPr>
             <a:r>
-              <a:rPr lang="en-US" sz="1200" b="1" dirty="0">
-                <a:solidFill>
-                  <a:srgbClr val="C25A17"/>
-                </a:solidFill>
-                <a:latin typeface="Calibri" pitchFamily="34" charset="0"/>
-                <a:ea typeface="Calibri" pitchFamily="34" charset="-122"/>
-                <a:cs typeface="Calibri" pitchFamily="34" charset="-120"/>
-              </a:rPr>
-              <a:t>！</a:t>
-            </a:r>
-            <a:endParaRPr lang="en-US" sz="1200" dirty="0"/>
-          </a:p>
-        </p:txBody>
-      </p:sp>
-      <p:sp>
-        <p:nvSpPr>
-          <p:cNvPr id="6" name="Text 4"/>
-          <p:cNvSpPr txBox="1"/>
-          <p:nvPr/>
-        </p:nvSpPr>
-        <p:spPr>
-          <a:xfrm>
-            <a:off x="950976" y="1591056"/>
-            <a:ext cx="5925312" cy="441579"/>
-          </a:xfrm>
-          <a:prstGeom prst="rect">
-            <a:avLst/>
-          </a:prstGeom>
-          <a:noFill/>
-          <a:ln/>
-        </p:spPr>
-        <p:txBody>
-          <a:bodyPr wrap="square" lIns="0" tIns="0" rIns="0" bIns="0" rtlCol="0" anchor="t"/>
-          <a:lstStyle/>
-          <a:p>
-            <a:pPr indent="0" marL="0">
-              <a:lnSpc>
-                <a:spcPct val="120000"/>
-              </a:lnSpc>
-              <a:buNone/>
-            </a:pPr>
-            <a:r>
-              <a:rPr lang="en-US" sz="1050" b="1" dirty="0">
-                <a:solidFill>
-                  <a:srgbClr val="222222"/>
-                </a:solidFill>
-                <a:latin typeface="Calibri" pitchFamily="34" charset="0"/>
-                <a:ea typeface="Calibri" pitchFamily="34" charset="-122"/>
-                <a:cs typeface="Calibri" pitchFamily="34" charset="-120"/>
-              </a:rPr>
-              <a:t>「公開する」にチェックを入れて保存しないと、QRコードを読んでも回答できません。</a:t>
-            </a:r>
-            <a:pPr indent="0" marL="0">
-              <a:lnSpc>
-                <a:spcPct val="120000"/>
-              </a:lnSpc>
-              <a:buNone/>
-            </a:pPr>
-            <a:r>
-              <a:rPr lang="en-US" sz="1050" dirty="0">
-                <a:solidFill>
-                  <a:srgbClr val="222222"/>
-                </a:solidFill>
-                <a:latin typeface="Calibri" pitchFamily="34" charset="0"/>
-                <a:ea typeface="Calibri" pitchFamily="34" charset="-122"/>
-                <a:cs typeface="Calibri" pitchFamily="34" charset="-120"/>
-              </a:rPr>
-              <a:t> 当日までに必ず公開してください。</a:t>
-            </a:r>
-            <a:endParaRPr lang="en-US" sz="1050" dirty="0"/>
-          </a:p>
-        </p:txBody>
-      </p:sp>
-      <p:sp>
-        <p:nvSpPr>
-          <p:cNvPr id="7" name="Shape 5"/>
-          <p:cNvSpPr/>
-          <p:nvPr/>
-        </p:nvSpPr>
-        <p:spPr>
-          <a:xfrm>
-            <a:off x="566928" y="2178939"/>
-            <a:ext cx="6428232" cy="624459"/>
-          </a:xfrm>
-          <a:prstGeom prst="roundRect">
-            <a:avLst>
-              <a:gd name="adj" fmla="val 8786"/>
-            </a:avLst>
-          </a:prstGeom>
-          <a:solidFill>
-            <a:srgbClr val="E3F0F4"/>
-          </a:solidFill>
-          <a:ln w="9525">
-            <a:solidFill>
-              <a:srgbClr val="1C7293"/>
-            </a:solidFill>
-            <a:prstDash val="solid"/>
-          </a:ln>
-        </p:spPr>
-      </p:sp>
-      <p:sp>
-        <p:nvSpPr>
-          <p:cNvPr id="8" name="Text 6"/>
-          <p:cNvSpPr txBox="1"/>
-          <p:nvPr/>
-        </p:nvSpPr>
-        <p:spPr>
-          <a:xfrm>
-            <a:off x="658368" y="2270379"/>
-            <a:ext cx="237744" cy="237744"/>
-          </a:xfrm>
-          <a:prstGeom prst="rect">
-            <a:avLst/>
-          </a:prstGeom>
-          <a:noFill/>
-          <a:ln/>
-        </p:spPr>
-        <p:txBody>
-          <a:bodyPr wrap="square" lIns="0" tIns="0" rIns="0" bIns="0" rtlCol="0" anchor="ctr"/>
-          <a:lstStyle/>
-          <a:p>
-            <a:pPr algn="ctr" indent="0" marL="0">
-              <a:buNone/>
-            </a:pPr>
-            <a:r>
-              <a:rPr lang="en-US" sz="1200" b="1" dirty="0">
-                <a:solidFill>
-                  <a:srgbClr val="1C7293"/>
-                </a:solidFill>
-                <a:latin typeface="Calibri" pitchFamily="34" charset="0"/>
-                <a:ea typeface="Calibri" pitchFamily="34" charset="-122"/>
-                <a:cs typeface="Calibri" pitchFamily="34" charset="-120"/>
-              </a:rPr>
-              <a:t>i</a:t>
-            </a:r>
-            <a:endParaRPr lang="en-US" sz="1200" dirty="0"/>
-          </a:p>
-        </p:txBody>
-      </p:sp>
-      <p:sp>
-        <p:nvSpPr>
-          <p:cNvPr id="9" name="Text 7"/>
-          <p:cNvSpPr txBox="1"/>
-          <p:nvPr/>
-        </p:nvSpPr>
-        <p:spPr>
-          <a:xfrm>
-            <a:off x="950976" y="2288667"/>
-            <a:ext cx="5925312" cy="441579"/>
-          </a:xfrm>
-          <a:prstGeom prst="rect">
-            <a:avLst/>
-          </a:prstGeom>
-          <a:noFill/>
-          <a:ln/>
-        </p:spPr>
-        <p:txBody>
-          <a:bodyPr wrap="square" lIns="0" tIns="0" rIns="0" bIns="0" rtlCol="0" anchor="t"/>
-          <a:lstStyle/>
-          <a:p>
-            <a:pPr indent="0" marL="0">
-              <a:lnSpc>
-                <a:spcPct val="120000"/>
-              </a:lnSpc>
-              <a:buNone/>
-            </a:pPr>
-            <a:r>
-              <a:rPr lang="en-US" sz="1050" dirty="0">
-                <a:solidFill>
-                  <a:srgbClr val="222222"/>
-                </a:solidFill>
-                <a:latin typeface="Calibri" pitchFamily="34" charset="0"/>
-                <a:ea typeface="Calibri" pitchFamily="34" charset="-122"/>
-                <a:cs typeface="Calibri" pitchFamily="34" charset="-120"/>
-              </a:rPr>
-              <a:t>事務局が「共通設問テンプレート」を用意している場合は、編集画面の下にある</a:t>
-            </a:r>
-            <a:pPr indent="0" marL="0">
-              <a:lnSpc>
-                <a:spcPct val="120000"/>
-              </a:lnSpc>
-              <a:buNone/>
-            </a:pPr>
-            <a:r>
-              <a:rPr lang="en-US" sz="1050" b="1" dirty="0">
-                <a:solidFill>
-                  <a:srgbClr val="222222"/>
-                </a:solidFill>
-                <a:latin typeface="Calibri" pitchFamily="34" charset="0"/>
-                <a:ea typeface="Calibri" pitchFamily="34" charset="-122"/>
-                <a:cs typeface="Calibri" pitchFamily="34" charset="-120"/>
-              </a:rPr>
-              <a:t>「共通設問を取り込む」</a:t>
-            </a:r>
-            <a:pPr indent="0" marL="0">
-              <a:lnSpc>
-                <a:spcPct val="120000"/>
-              </a:lnSpc>
-              <a:buNone/>
-            </a:pPr>
-            <a:r>
-              <a:rPr lang="en-US" sz="1050" dirty="0">
-                <a:solidFill>
-                  <a:srgbClr val="222222"/>
-                </a:solidFill>
-                <a:latin typeface="Calibri" pitchFamily="34" charset="0"/>
-                <a:ea typeface="Calibri" pitchFamily="34" charset="-122"/>
-                <a:cs typeface="Calibri" pitchFamily="34" charset="-120"/>
-              </a:rPr>
-              <a:t>で、全社共通の設問を自社アンケートに追加できます。</a:t>
-            </a:r>
-            <a:endParaRPr lang="en-US" sz="1050" dirty="0"/>
-          </a:p>
-        </p:txBody>
-      </p:sp>
-      <p:sp>
-        <p:nvSpPr>
-          <p:cNvPr id="10" name="Text 8"/>
-          <p:cNvSpPr txBox="1"/>
-          <p:nvPr/>
-        </p:nvSpPr>
-        <p:spPr>
-          <a:xfrm>
-            <a:off x="566928" y="2986278"/>
-            <a:ext cx="6428232" cy="257810"/>
-          </a:xfrm>
-          <a:prstGeom prst="rect">
-            <a:avLst/>
-          </a:prstGeom>
-          <a:noFill/>
-          <a:ln/>
-        </p:spPr>
-        <p:txBody>
-          <a:bodyPr wrap="square" lIns="0" tIns="0" rIns="0" bIns="0" rtlCol="0" anchor="t"/>
-          <a:lstStyle/>
-          <a:p>
-            <a:pPr indent="0" marL="0">
-              <a:buNone/>
-            </a:pPr>
-            <a:r>
-              <a:rPr lang="en-US" sz="1400" b="1" dirty="0">
-                <a:solidFill>
-                  <a:srgbClr val="1C7293"/>
-                </a:solidFill>
-                <a:latin typeface="Calibri" pitchFamily="34" charset="0"/>
-                <a:ea typeface="Calibri" pitchFamily="34" charset="-122"/>
-                <a:cs typeface="Calibri" pitchFamily="34" charset="-120"/>
-              </a:rPr>
-              <a:t>設問を直すとき</a:t>
-            </a:r>
-            <a:endParaRPr lang="en-US" sz="1400" dirty="0"/>
-          </a:p>
-        </p:txBody>
-      </p:sp>
-      <p:sp>
-        <p:nvSpPr>
-          <p:cNvPr id="11" name="Text 9"/>
-          <p:cNvSpPr txBox="1"/>
-          <p:nvPr/>
-        </p:nvSpPr>
-        <p:spPr>
-          <a:xfrm>
-            <a:off x="713232" y="3317240"/>
-            <a:ext cx="6281928" cy="257429"/>
-          </a:xfrm>
-          <a:prstGeom prst="rect">
-            <a:avLst/>
-          </a:prstGeom>
-          <a:noFill/>
-          <a:ln/>
-        </p:spPr>
-        <p:txBody>
-          <a:bodyPr wrap="square" lIns="0" tIns="0" rIns="0" bIns="0" rtlCol="0" anchor="t"/>
-          <a:lstStyle/>
-          <a:p>
-            <a:pPr marL="342900" indent="-342900">
-              <a:lnSpc>
-                <a:spcPct val="125000"/>
-              </a:lnSpc>
-              <a:buSzPct val="100000"/>
-              <a:buChar char="●"/>
-            </a:pPr>
-            <a:r>
-              <a:rPr lang="en-US" sz="1100" dirty="0">
-                <a:solidFill>
-                  <a:srgbClr val="222222"/>
-                </a:solidFill>
-                <a:latin typeface="Calibri" pitchFamily="34" charset="0"/>
-                <a:ea typeface="Calibri" pitchFamily="34" charset="-122"/>
-                <a:cs typeface="Calibri" pitchFamily="34" charset="-120"/>
-              </a:rPr>
-              <a:t>設問文や選択肢は、回答が始まったあとでも直せます</a:t>
-            </a:r>
-            <a:endParaRPr lang="en-US" sz="1100" dirty="0"/>
-          </a:p>
-        </p:txBody>
-      </p:sp>
-      <p:sp>
-        <p:nvSpPr>
-          <p:cNvPr id="12" name="Text 10"/>
-          <p:cNvSpPr txBox="1"/>
-          <p:nvPr/>
-        </p:nvSpPr>
-        <p:spPr>
-          <a:xfrm>
-            <a:off x="713232" y="3592957"/>
-            <a:ext cx="6281928" cy="257429"/>
-          </a:xfrm>
-          <a:prstGeom prst="rect">
-            <a:avLst/>
-          </a:prstGeom>
-          <a:noFill/>
-          <a:ln/>
-        </p:spPr>
-        <p:txBody>
-          <a:bodyPr wrap="square" lIns="0" tIns="0" rIns="0" bIns="0" rtlCol="0" anchor="t"/>
-          <a:lstStyle/>
-          <a:p>
-            <a:pPr marL="342900" indent="-342900">
-              <a:lnSpc>
-                <a:spcPct val="125000"/>
-              </a:lnSpc>
-              <a:buSzPct val="100000"/>
-              <a:buChar char="●"/>
-            </a:pPr>
-            <a:r>
-              <a:rPr lang="en-US" sz="1100" dirty="0">
-                <a:solidFill>
-                  <a:srgbClr val="222222"/>
-                </a:solidFill>
-                <a:latin typeface="Calibri" pitchFamily="34" charset="0"/>
-                <a:ea typeface="Calibri" pitchFamily="34" charset="-122"/>
-                <a:cs typeface="Calibri" pitchFamily="34" charset="-120"/>
-              </a:rPr>
-              <a:t>ただし</a:t>
-            </a:r>
-            <a:pPr indent="0" marL="0">
-              <a:lnSpc>
-                <a:spcPct val="125000"/>
-              </a:lnSpc>
-              <a:buNone/>
-            </a:pPr>
-            <a:r>
-              <a:rPr lang="en-US" sz="1100" b="1" dirty="0">
-                <a:solidFill>
-                  <a:srgbClr val="222222"/>
-                </a:solidFill>
-                <a:latin typeface="Calibri" pitchFamily="34" charset="0"/>
-                <a:ea typeface="Calibri" pitchFamily="34" charset="-122"/>
-                <a:cs typeface="Calibri" pitchFamily="34" charset="-120"/>
-              </a:rPr>
-              <a:t>設問を削除すると、その設問への回答も一緒に消えます</a:t>
-            </a:r>
-            <a:endParaRPr lang="en-US" sz="1100" dirty="0"/>
-          </a:p>
-        </p:txBody>
-      </p:sp>
-      <p:sp>
-        <p:nvSpPr>
-          <p:cNvPr id="13" name="Text 11"/>
-          <p:cNvSpPr txBox="1"/>
-          <p:nvPr/>
-        </p:nvSpPr>
-        <p:spPr>
-          <a:xfrm>
-            <a:off x="713232" y="3868674"/>
-            <a:ext cx="6281928" cy="257429"/>
-          </a:xfrm>
-          <a:prstGeom prst="rect">
-            <a:avLst/>
-          </a:prstGeom>
-          <a:noFill/>
-          <a:ln/>
-        </p:spPr>
-        <p:txBody>
-          <a:bodyPr wrap="square" lIns="0" tIns="0" rIns="0" bIns="0" rtlCol="0" anchor="t"/>
-          <a:lstStyle/>
-          <a:p>
-            <a:pPr marL="342900" indent="-342900">
-              <a:lnSpc>
-                <a:spcPct val="125000"/>
-              </a:lnSpc>
-              <a:buSzPct val="100000"/>
-              <a:buChar char="●"/>
-            </a:pPr>
-            <a:r>
-              <a:rPr lang="en-US" sz="1100" dirty="0">
-                <a:solidFill>
-                  <a:srgbClr val="222222"/>
-                </a:solidFill>
-                <a:latin typeface="Calibri" pitchFamily="34" charset="0"/>
-                <a:ea typeface="Calibri" pitchFamily="34" charset="-122"/>
-                <a:cs typeface="Calibri" pitchFamily="34" charset="-120"/>
-              </a:rPr>
-              <a:t>選択肢を変えると、変更前の回答はそのまま残ります（集計時にご注意ください）</a:t>
-            </a:r>
-            <a:endParaRPr lang="en-US" sz="1100" dirty="0"/>
-          </a:p>
-        </p:txBody>
-      </p:sp>
-      <p:sp>
-        <p:nvSpPr>
-          <p:cNvPr id="14" name="Shape 12"/>
-          <p:cNvSpPr/>
-          <p:nvPr/>
-        </p:nvSpPr>
-        <p:spPr>
-          <a:xfrm>
-            <a:off x="566928" y="4144391"/>
-            <a:ext cx="6428232" cy="624459"/>
-          </a:xfrm>
-          <a:prstGeom prst="roundRect">
-            <a:avLst>
-              <a:gd name="adj" fmla="val 8786"/>
-            </a:avLst>
-          </a:prstGeom>
-          <a:solidFill>
-            <a:srgbClr val="FDF0E6"/>
-          </a:solidFill>
-          <a:ln w="9525">
-            <a:solidFill>
-              <a:srgbClr val="E08A3C"/>
-            </a:solidFill>
-            <a:prstDash val="solid"/>
-          </a:ln>
-        </p:spPr>
-      </p:sp>
-      <p:sp>
-        <p:nvSpPr>
-          <p:cNvPr id="15" name="Text 13"/>
-          <p:cNvSpPr txBox="1"/>
-          <p:nvPr/>
-        </p:nvSpPr>
-        <p:spPr>
-          <a:xfrm>
-            <a:off x="658368" y="4235831"/>
-            <a:ext cx="237744" cy="237744"/>
-          </a:xfrm>
-          <a:prstGeom prst="rect">
-            <a:avLst/>
-          </a:prstGeom>
-          <a:noFill/>
-          <a:ln/>
-        </p:spPr>
-        <p:txBody>
-          <a:bodyPr wrap="square" lIns="0" tIns="0" rIns="0" bIns="0" rtlCol="0" anchor="ctr"/>
-          <a:lstStyle/>
-          <a:p>
-            <a:pPr algn="ctr" indent="0" marL="0">
-              <a:buNone/>
-            </a:pPr>
-            <a:r>
-              <a:rPr lang="en-US" sz="1200" b="1" dirty="0">
-                <a:solidFill>
-                  <a:srgbClr val="C25A17"/>
-                </a:solidFill>
-                <a:latin typeface="Calibri" pitchFamily="34" charset="0"/>
-                <a:ea typeface="Calibri" pitchFamily="34" charset="-122"/>
-                <a:cs typeface="Calibri" pitchFamily="34" charset="-120"/>
-              </a:rPr>
-              <a:t>！</a:t>
-            </a:r>
-            <a:endParaRPr lang="en-US" sz="1200" dirty="0"/>
-          </a:p>
-        </p:txBody>
-      </p:sp>
-      <p:sp>
-        <p:nvSpPr>
-          <p:cNvPr id="16" name="Text 14"/>
-          <p:cNvSpPr txBox="1"/>
-          <p:nvPr/>
-        </p:nvSpPr>
-        <p:spPr>
-          <a:xfrm>
-            <a:off x="950976" y="4254119"/>
-            <a:ext cx="5925312" cy="441579"/>
-          </a:xfrm>
-          <a:prstGeom prst="rect">
-            <a:avLst/>
-          </a:prstGeom>
-          <a:noFill/>
-          <a:ln/>
-        </p:spPr>
-        <p:txBody>
-          <a:bodyPr wrap="square" lIns="0" tIns="0" rIns="0" bIns="0" rtlCol="0" anchor="t"/>
-          <a:lstStyle/>
-          <a:p>
-            <a:pPr indent="0" marL="0">
-              <a:lnSpc>
-                <a:spcPct val="120000"/>
-              </a:lnSpc>
-              <a:buNone/>
-            </a:pPr>
-            <a:r>
-              <a:rPr lang="en-US" sz="1050" dirty="0">
-                <a:solidFill>
-                  <a:srgbClr val="222222"/>
-                </a:solidFill>
-                <a:latin typeface="Calibri" pitchFamily="34" charset="0"/>
-                <a:ea typeface="Calibri" pitchFamily="34" charset="-122"/>
-                <a:cs typeface="Calibri" pitchFamily="34" charset="-120"/>
-              </a:rPr>
-              <a:t>回答受付が始まったあとに設問を削除する場合は、先にCSVをダウンロードして保存しておいてください。</a:t>
-            </a:r>
-            <a:endParaRPr lang="en-US" sz="1050" dirty="0"/>
-          </a:p>
-        </p:txBody>
-      </p:sp>
-      <p:sp>
-        <p:nvSpPr>
-          <p:cNvPr id="17" name="Shape 15"/>
-          <p:cNvSpPr/>
-          <p:nvPr/>
-        </p:nvSpPr>
-        <p:spPr>
-          <a:xfrm>
-            <a:off x="566928" y="4842002"/>
-            <a:ext cx="6428232" cy="2606040"/>
-          </a:xfrm>
-          <a:prstGeom prst="roundRect">
-            <a:avLst>
-              <a:gd name="adj" fmla="val 1754"/>
-            </a:avLst>
-          </a:prstGeom>
-          <a:solidFill>
-            <a:srgbClr val="F7F7F7"/>
-          </a:solidFill>
-          <a:ln w="12700">
-            <a:solidFill>
-              <a:srgbClr val="D8D8D8"/>
-            </a:solidFill>
-            <a:prstDash val="dash"/>
-          </a:ln>
-        </p:spPr>
-      </p:sp>
-      <p:sp>
-        <p:nvSpPr>
-          <p:cNvPr id="18" name="Text 16"/>
-          <p:cNvSpPr txBox="1"/>
-          <p:nvPr/>
-        </p:nvSpPr>
-        <p:spPr>
-          <a:xfrm>
-            <a:off x="749808" y="5226050"/>
-            <a:ext cx="6062472" cy="274320"/>
-          </a:xfrm>
-          <a:prstGeom prst="rect">
-            <a:avLst/>
-          </a:prstGeom>
-          <a:noFill/>
-          <a:ln/>
-        </p:spPr>
-        <p:txBody>
-          <a:bodyPr wrap="square" lIns="0" tIns="0" rIns="0" bIns="0" rtlCol="0" anchor="ctr"/>
-          <a:lstStyle/>
-          <a:p>
-            <a:pPr algn="ctr" indent="0" marL="0">
-              <a:buNone/>
-            </a:pPr>
-            <a:r>
-              <a:rPr lang="en-US" sz="1100" b="1" dirty="0">
+              <a:rPr lang="en-US" sz="950" dirty="0">
                 <a:solidFill>
                   <a:srgbClr val="6B6B6B"/>
                 </a:solidFill>
@@ -5845,57 +5903,15 @@
                 <a:ea typeface="Calibri" pitchFamily="34" charset="-122"/>
                 <a:cs typeface="Calibri" pitchFamily="34" charset="-120"/>
               </a:rPr>
-              <a:t>［ スクリーンショット ］ ここに貼り付けてください</a:t>
-            </a:r>
-            <a:endParaRPr lang="en-US" sz="1100" dirty="0"/>
-          </a:p>
-        </p:txBody>
-      </p:sp>
-      <p:sp>
-        <p:nvSpPr>
-          <p:cNvPr id="19" name="Text 17"/>
-          <p:cNvSpPr txBox="1"/>
-          <p:nvPr/>
-        </p:nvSpPr>
-        <p:spPr>
-          <a:xfrm>
-            <a:off x="841248" y="5591810"/>
-            <a:ext cx="5879592" cy="731520"/>
-          </a:xfrm>
-          <a:prstGeom prst="rect">
-            <a:avLst/>
-          </a:prstGeom>
-          <a:noFill/>
-          <a:ln/>
-        </p:spPr>
-        <p:txBody>
-          <a:bodyPr wrap="square" lIns="0" tIns="0" rIns="0" bIns="0" rtlCol="0" anchor="t"/>
-          <a:lstStyle/>
-          <a:p>
-            <a:pPr algn="ctr" indent="0" marL="0">
-              <a:lnSpc>
-                <a:spcPct val="120000"/>
-              </a:lnSpc>
-              <a:buNone/>
-            </a:pPr>
-            <a:r>
-              <a:rPr lang="en-US" sz="1050" dirty="0">
-                <a:solidFill>
-                  <a:srgbClr val="222222"/>
-                </a:solidFill>
-                <a:latin typeface="Calibri" pitchFamily="34" charset="0"/>
-                <a:ea typeface="Calibri" pitchFamily="34" charset="-122"/>
-                <a:cs typeface="Calibri" pitchFamily="34" charset="-120"/>
-              </a:rPr>
-              <a:t>アンケート編集画面の「公開する」チェックボックスと保存ボタンの周辺。</a:t>
-            </a:r>
-            <a:endParaRPr lang="en-US" sz="1050" dirty="0"/>
-          </a:p>
-        </p:txBody>
-      </p:sp>
-      <p:sp>
-        <p:nvSpPr>
-          <p:cNvPr id="20" name="Text 18"/>
+              <a:t>アンケート編集画面。設問文・種類・選択肢の入力欄が見えるもの。</a:t>
+            </a:r>
+            <a:endParaRPr lang="en-US" sz="950" dirty="0"/>
+          </a:p>
+        </p:txBody>
+      </p:sp>
+      <p:sp>
+        <p:nvSpPr>
+          <p:cNvPr id="6" name="Text 3"/>
           <p:cNvSpPr txBox="1"/>
           <p:nvPr/>
         </p:nvSpPr>
@@ -6036,7 +6052,7 @@
                 <a:ea typeface="Calibri" pitchFamily="34" charset="-122"/>
                 <a:cs typeface="Calibri" pitchFamily="34" charset="-120"/>
               </a:rPr>
-              <a:t>回答状況を見る</a:t>
+              <a:t>公開と注意点</a:t>
             </a:r>
             <a:endParaRPr lang="en-US" sz="2200" dirty="0"/>
           </a:p>
@@ -6044,343 +6060,143 @@
       </p:sp>
       <p:sp>
         <p:nvSpPr>
-          <p:cNvPr id="4" name="Text 2"/>
-          <p:cNvSpPr txBox="1"/>
+          <p:cNvPr id="4" name="Shape 2"/>
+          <p:cNvSpPr/>
           <p:nvPr/>
         </p:nvSpPr>
         <p:spPr>
           <a:xfrm>
             <a:off x="566928" y="1481328"/>
-            <a:ext cx="6428232" cy="257429"/>
-          </a:xfrm>
-          <a:prstGeom prst="rect">
-            <a:avLst/>
-          </a:prstGeom>
-          <a:noFill/>
-          <a:ln/>
-        </p:spPr>
-        <p:txBody>
-          <a:bodyPr wrap="square" lIns="0" tIns="0" rIns="0" bIns="0" rtlCol="0" anchor="t"/>
-          <a:lstStyle/>
-          <a:p>
-            <a:pPr indent="0" marL="0">
-              <a:lnSpc>
-                <a:spcPct val="125000"/>
-              </a:lnSpc>
-              <a:buNone/>
-            </a:pPr>
-            <a:r>
-              <a:rPr lang="en-US" sz="1100" dirty="0">
-                <a:solidFill>
-                  <a:srgbClr val="222222"/>
-                </a:solidFill>
-                <a:latin typeface="Calibri" pitchFamily="34" charset="0"/>
-                <a:ea typeface="Calibri" pitchFamily="34" charset="-122"/>
-                <a:cs typeface="Calibri" pitchFamily="34" charset="-120"/>
-              </a:rPr>
-              <a:t>ダッシュボードに次の情報が出ます。</a:t>
-            </a:r>
-            <a:endParaRPr lang="en-US" sz="1100" dirty="0"/>
-          </a:p>
-        </p:txBody>
-      </p:sp>
-      <p:sp>
-        <p:nvSpPr>
-          <p:cNvPr id="5" name="Text 3"/>
-          <p:cNvSpPr txBox="1"/>
-          <p:nvPr/>
-        </p:nvSpPr>
-        <p:spPr>
-          <a:xfrm>
-            <a:off x="713232" y="1775333"/>
-            <a:ext cx="6281928" cy="257429"/>
-          </a:xfrm>
-          <a:prstGeom prst="rect">
-            <a:avLst/>
-          </a:prstGeom>
-          <a:noFill/>
-          <a:ln/>
-        </p:spPr>
-        <p:txBody>
-          <a:bodyPr wrap="square" lIns="0" tIns="0" rIns="0" bIns="0" rtlCol="0" anchor="t"/>
-          <a:lstStyle/>
-          <a:p>
-            <a:pPr marL="342900" indent="-342900">
-              <a:lnSpc>
-                <a:spcPct val="125000"/>
-              </a:lnSpc>
-              <a:buSzPct val="100000"/>
-              <a:buChar char="●"/>
-            </a:pPr>
-            <a:r>
-              <a:rPr lang="en-US" sz="1100" b="1" dirty="0">
-                <a:solidFill>
-                  <a:srgbClr val="222222"/>
-                </a:solidFill>
-                <a:latin typeface="Calibri" pitchFamily="34" charset="0"/>
-                <a:ea typeface="Calibri" pitchFamily="34" charset="-122"/>
-                <a:cs typeface="Calibri" pitchFamily="34" charset="-120"/>
-              </a:rPr>
-              <a:t>回答数</a:t>
-            </a:r>
-            <a:pPr indent="0" marL="0">
-              <a:lnSpc>
-                <a:spcPct val="125000"/>
-              </a:lnSpc>
-              <a:buNone/>
-            </a:pPr>
-            <a:r>
-              <a:rPr lang="en-US" sz="1100" dirty="0">
-                <a:solidFill>
-                  <a:srgbClr val="222222"/>
-                </a:solidFill>
-                <a:latin typeface="Calibri" pitchFamily="34" charset="0"/>
-                <a:ea typeface="Calibri" pitchFamily="34" charset="-122"/>
-                <a:cs typeface="Calibri" pitchFamily="34" charset="-120"/>
-              </a:rPr>
-              <a:t>（重複を除いた件数）</a:t>
-            </a:r>
-            <a:endParaRPr lang="en-US" sz="1100" dirty="0"/>
-          </a:p>
-        </p:txBody>
-      </p:sp>
-      <p:sp>
-        <p:nvSpPr>
-          <p:cNvPr id="6" name="Text 4"/>
-          <p:cNvSpPr txBox="1"/>
-          <p:nvPr/>
-        </p:nvSpPr>
-        <p:spPr>
-          <a:xfrm>
-            <a:off x="713232" y="2051050"/>
-            <a:ext cx="6281928" cy="257429"/>
-          </a:xfrm>
-          <a:prstGeom prst="rect">
-            <a:avLst/>
-          </a:prstGeom>
-          <a:noFill/>
-          <a:ln/>
-        </p:spPr>
-        <p:txBody>
-          <a:bodyPr wrap="square" lIns="0" tIns="0" rIns="0" bIns="0" rtlCol="0" anchor="t"/>
-          <a:lstStyle/>
-          <a:p>
-            <a:pPr marL="342900" indent="-342900">
-              <a:lnSpc>
-                <a:spcPct val="125000"/>
-              </a:lnSpc>
-              <a:buSzPct val="100000"/>
-              <a:buChar char="●"/>
-            </a:pPr>
-            <a:r>
-              <a:rPr lang="en-US" sz="1100" b="1" dirty="0">
-                <a:solidFill>
-                  <a:srgbClr val="222222"/>
-                </a:solidFill>
-                <a:latin typeface="Calibri" pitchFamily="34" charset="0"/>
-                <a:ea typeface="Calibri" pitchFamily="34" charset="-122"/>
-                <a:cs typeface="Calibri" pitchFamily="34" charset="-120"/>
-              </a:rPr>
-              <a:t>重複送信</a:t>
-            </a:r>
-            <a:pPr indent="0" marL="0">
-              <a:lnSpc>
-                <a:spcPct val="125000"/>
-              </a:lnSpc>
-              <a:buNone/>
-            </a:pPr>
-            <a:r>
-              <a:rPr lang="en-US" sz="1100" dirty="0">
-                <a:solidFill>
-                  <a:srgbClr val="222222"/>
-                </a:solidFill>
-                <a:latin typeface="Calibri" pitchFamily="34" charset="0"/>
-                <a:ea typeface="Calibri" pitchFamily="34" charset="-122"/>
-                <a:cs typeface="Calibri" pitchFamily="34" charset="-120"/>
-              </a:rPr>
-              <a:t>：同じ端末から同じブースに送り直された件数</a:t>
-            </a:r>
-            <a:endParaRPr lang="en-US" sz="1100" dirty="0"/>
-          </a:p>
-        </p:txBody>
-      </p:sp>
-      <p:sp>
-        <p:nvSpPr>
-          <p:cNvPr id="7" name="Text 5"/>
-          <p:cNvSpPr txBox="1"/>
-          <p:nvPr/>
-        </p:nvSpPr>
-        <p:spPr>
-          <a:xfrm>
-            <a:off x="713232" y="2326767"/>
-            <a:ext cx="6281928" cy="257429"/>
-          </a:xfrm>
-          <a:prstGeom prst="rect">
-            <a:avLst/>
-          </a:prstGeom>
-          <a:noFill/>
-          <a:ln/>
-        </p:spPr>
-        <p:txBody>
-          <a:bodyPr wrap="square" lIns="0" tIns="0" rIns="0" bIns="0" rtlCol="0" anchor="t"/>
-          <a:lstStyle/>
-          <a:p>
-            <a:pPr marL="342900" indent="-342900">
-              <a:lnSpc>
-                <a:spcPct val="125000"/>
-              </a:lnSpc>
-              <a:buSzPct val="100000"/>
-              <a:buChar char="●"/>
-            </a:pPr>
-            <a:r>
-              <a:rPr lang="en-US" sz="1100" b="1" dirty="0">
-                <a:solidFill>
-                  <a:srgbClr val="222222"/>
-                </a:solidFill>
-                <a:latin typeface="Calibri" pitchFamily="34" charset="0"/>
-                <a:ea typeface="Calibri" pitchFamily="34" charset="-122"/>
-                <a:cs typeface="Calibri" pitchFamily="34" charset="-120"/>
-              </a:rPr>
-              <a:t>設問数</a:t>
-            </a:r>
-            <a:endParaRPr lang="en-US" sz="1100" dirty="0"/>
-          </a:p>
-        </p:txBody>
-      </p:sp>
-      <p:sp>
-        <p:nvSpPr>
-          <p:cNvPr id="8" name="Text 6"/>
-          <p:cNvSpPr txBox="1"/>
-          <p:nvPr/>
-        </p:nvSpPr>
-        <p:spPr>
-          <a:xfrm>
-            <a:off x="713232" y="2602484"/>
-            <a:ext cx="6281928" cy="257429"/>
-          </a:xfrm>
-          <a:prstGeom prst="rect">
-            <a:avLst/>
-          </a:prstGeom>
-          <a:noFill/>
-          <a:ln/>
-        </p:spPr>
-        <p:txBody>
-          <a:bodyPr wrap="square" lIns="0" tIns="0" rIns="0" bIns="0" rtlCol="0" anchor="t"/>
-          <a:lstStyle/>
-          <a:p>
-            <a:pPr marL="342900" indent="-342900">
-              <a:lnSpc>
-                <a:spcPct val="125000"/>
-              </a:lnSpc>
-              <a:buSzPct val="100000"/>
-              <a:buChar char="●"/>
-            </a:pPr>
-            <a:r>
-              <a:rPr lang="en-US" sz="1100" b="1" dirty="0">
-                <a:solidFill>
-                  <a:srgbClr val="222222"/>
-                </a:solidFill>
-                <a:latin typeface="Calibri" pitchFamily="34" charset="0"/>
-                <a:ea typeface="Calibri" pitchFamily="34" charset="-122"/>
-                <a:cs typeface="Calibri" pitchFamily="34" charset="-120"/>
-              </a:rPr>
-              <a:t>時間帯別の回答数</a:t>
-            </a:r>
-            <a:pPr indent="0" marL="0">
-              <a:lnSpc>
-                <a:spcPct val="125000"/>
-              </a:lnSpc>
-              <a:buNone/>
-            </a:pPr>
-            <a:r>
-              <a:rPr lang="en-US" sz="1100" dirty="0">
-                <a:solidFill>
-                  <a:srgbClr val="222222"/>
-                </a:solidFill>
-                <a:latin typeface="Calibri" pitchFamily="34" charset="0"/>
-                <a:ea typeface="Calibri" pitchFamily="34" charset="-122"/>
-                <a:cs typeface="Calibri" pitchFamily="34" charset="-120"/>
-              </a:rPr>
-              <a:t>のグラフ</a:t>
-            </a:r>
-            <a:endParaRPr lang="en-US" sz="1100" dirty="0"/>
-          </a:p>
-        </p:txBody>
-      </p:sp>
-      <p:sp>
-        <p:nvSpPr>
-          <p:cNvPr id="9" name="Text 7"/>
-          <p:cNvSpPr txBox="1"/>
-          <p:nvPr/>
-        </p:nvSpPr>
-        <p:spPr>
-          <a:xfrm>
-            <a:off x="713232" y="2878201"/>
-            <a:ext cx="6281928" cy="257429"/>
-          </a:xfrm>
-          <a:prstGeom prst="rect">
-            <a:avLst/>
-          </a:prstGeom>
-          <a:noFill/>
-          <a:ln/>
-        </p:spPr>
-        <p:txBody>
-          <a:bodyPr wrap="square" lIns="0" tIns="0" rIns="0" bIns="0" rtlCol="0" anchor="t"/>
-          <a:lstStyle/>
-          <a:p>
-            <a:pPr marL="342900" indent="-342900">
-              <a:lnSpc>
-                <a:spcPct val="125000"/>
-              </a:lnSpc>
-              <a:buSzPct val="100000"/>
-              <a:buChar char="●"/>
-            </a:pPr>
-            <a:r>
-              <a:rPr lang="en-US" sz="1100" b="1" dirty="0">
-                <a:solidFill>
-                  <a:srgbClr val="222222"/>
-                </a:solidFill>
-                <a:latin typeface="Calibri" pitchFamily="34" charset="0"/>
-                <a:ea typeface="Calibri" pitchFamily="34" charset="-122"/>
-                <a:cs typeface="Calibri" pitchFamily="34" charset="-120"/>
-              </a:rPr>
-              <a:t>設問ごとの集計</a:t>
-            </a:r>
-            <a:pPr indent="0" marL="0">
-              <a:lnSpc>
-                <a:spcPct val="125000"/>
-              </a:lnSpc>
-              <a:buNone/>
-            </a:pPr>
-            <a:r>
-              <a:rPr lang="en-US" sz="1100" dirty="0">
-                <a:solidFill>
-                  <a:srgbClr val="222222"/>
-                </a:solidFill>
-                <a:latin typeface="Calibri" pitchFamily="34" charset="0"/>
-                <a:ea typeface="Calibri" pitchFamily="34" charset="-122"/>
-                <a:cs typeface="Calibri" pitchFamily="34" charset="-120"/>
-              </a:rPr>
-              <a:t>（選択式は棒グラフ、星評価は平均、NPSはスコア、自由記述は一覧）</a:t>
-            </a:r>
-            <a:endParaRPr lang="en-US" sz="1100" dirty="0"/>
-          </a:p>
-        </p:txBody>
-      </p:sp>
-      <p:sp>
-        <p:nvSpPr>
-          <p:cNvPr id="10" name="Shape 8"/>
-          <p:cNvSpPr/>
-          <p:nvPr/>
-        </p:nvSpPr>
-        <p:spPr>
-          <a:xfrm>
-            <a:off x="566928" y="3153918"/>
-            <a:ext cx="6428232" cy="431102"/>
+            <a:ext cx="6428232" cy="624459"/>
           </a:xfrm>
           <a:prstGeom prst="roundRect">
             <a:avLst>
-              <a:gd name="adj" fmla="val 12726"/>
+              <a:gd name="adj" fmla="val 8786"/>
+            </a:avLst>
+          </a:prstGeom>
+          <a:solidFill>
+            <a:srgbClr val="FDF0E6"/>
+          </a:solidFill>
+          <a:ln w="9525">
+            <a:solidFill>
+              <a:srgbClr val="E08A3C"/>
+            </a:solidFill>
+            <a:prstDash val="solid"/>
+          </a:ln>
+        </p:spPr>
+      </p:sp>
+      <p:sp>
+        <p:nvSpPr>
+          <p:cNvPr id="5" name="Text 3"/>
+          <p:cNvSpPr txBox="1"/>
+          <p:nvPr/>
+        </p:nvSpPr>
+        <p:spPr>
+          <a:xfrm>
+            <a:off x="658368" y="1572768"/>
+            <a:ext cx="237744" cy="237744"/>
+          </a:xfrm>
+          <a:prstGeom prst="rect">
+            <a:avLst/>
+          </a:prstGeom>
+          <a:noFill/>
+          <a:ln/>
+        </p:spPr>
+        <p:txBody>
+          <a:bodyPr wrap="square" lIns="0" tIns="0" rIns="0" bIns="0" rtlCol="0" anchor="ctr"/>
+          <a:lstStyle/>
+          <a:p>
+            <a:pPr algn="ctr" indent="0" marL="0">
+              <a:buNone/>
+            </a:pPr>
+            <a:r>
+              <a:rPr lang="en-US" sz="1200" b="1" dirty="0">
+                <a:solidFill>
+                  <a:srgbClr val="C25A17"/>
+                </a:solidFill>
+                <a:latin typeface="Calibri" pitchFamily="34" charset="0"/>
+                <a:ea typeface="Calibri" pitchFamily="34" charset="-122"/>
+                <a:cs typeface="Calibri" pitchFamily="34" charset="-120"/>
+              </a:rPr>
+              <a:t>！</a:t>
+            </a:r>
+            <a:endParaRPr lang="en-US" sz="1200" dirty="0"/>
+          </a:p>
+        </p:txBody>
+      </p:sp>
+      <p:sp>
+        <p:nvSpPr>
+          <p:cNvPr id="6" name="Text 4"/>
+          <p:cNvSpPr txBox="1"/>
+          <p:nvPr/>
+        </p:nvSpPr>
+        <p:spPr>
+          <a:xfrm>
+            <a:off x="950976" y="1591056"/>
+            <a:ext cx="5925312" cy="441579"/>
+          </a:xfrm>
+          <a:prstGeom prst="rect">
+            <a:avLst/>
+          </a:prstGeom>
+          <a:noFill/>
+          <a:ln/>
+        </p:spPr>
+        <p:txBody>
+          <a:bodyPr wrap="square" lIns="0" tIns="0" rIns="0" bIns="0" rtlCol="0" anchor="t"/>
+          <a:lstStyle/>
+          <a:p>
+            <a:pPr indent="0" marL="0">
+              <a:lnSpc>
+                <a:spcPct val="120000"/>
+              </a:lnSpc>
+              <a:buNone/>
+            </a:pPr>
+            <a:r>
+              <a:rPr lang="en-US" sz="1050" b="1" dirty="0">
+                <a:solidFill>
+                  <a:srgbClr val="222222"/>
+                </a:solidFill>
+                <a:latin typeface="Calibri" pitchFamily="34" charset="0"/>
+                <a:ea typeface="Calibri" pitchFamily="34" charset="-122"/>
+                <a:cs typeface="Calibri" pitchFamily="34" charset="-120"/>
+              </a:rPr>
+              <a:t>「公開する」にチェックを入れて保存しないと、QRコードを読んでも回答できません。</a:t>
+            </a:r>
+            <a:pPr indent="0" marL="0">
+              <a:lnSpc>
+                <a:spcPct val="120000"/>
+              </a:lnSpc>
+              <a:buNone/>
+            </a:pPr>
+            <a:r>
+              <a:rPr lang="en-US" sz="1050" dirty="0">
+                <a:solidFill>
+                  <a:srgbClr val="222222"/>
+                </a:solidFill>
+                <a:latin typeface="Calibri" pitchFamily="34" charset="0"/>
+                <a:ea typeface="Calibri" pitchFamily="34" charset="-122"/>
+                <a:cs typeface="Calibri" pitchFamily="34" charset="-120"/>
+              </a:rPr>
+              <a:t> 当日までに必ず公開してください。</a:t>
+            </a:r>
+            <a:endParaRPr lang="en-US" sz="1050" dirty="0"/>
+          </a:p>
+        </p:txBody>
+      </p:sp>
+      <p:sp>
+        <p:nvSpPr>
+          <p:cNvPr id="7" name="Shape 5"/>
+          <p:cNvSpPr/>
+          <p:nvPr/>
+        </p:nvSpPr>
+        <p:spPr>
+          <a:xfrm>
+            <a:off x="566928" y="2178939"/>
+            <a:ext cx="6428232" cy="624459"/>
+          </a:xfrm>
+          <a:prstGeom prst="roundRect">
+            <a:avLst>
+              <a:gd name="adj" fmla="val 8786"/>
             </a:avLst>
           </a:prstGeom>
           <a:solidFill>
@@ -6396,40 +6212,198 @@
       </p:sp>
       <p:sp>
         <p:nvSpPr>
+          <p:cNvPr id="8" name="Text 6"/>
+          <p:cNvSpPr txBox="1"/>
+          <p:nvPr/>
+        </p:nvSpPr>
+        <p:spPr>
+          <a:xfrm>
+            <a:off x="658368" y="2270379"/>
+            <a:ext cx="237744" cy="237744"/>
+          </a:xfrm>
+          <a:prstGeom prst="rect">
+            <a:avLst/>
+          </a:prstGeom>
+          <a:noFill/>
+          <a:ln/>
+        </p:spPr>
+        <p:txBody>
+          <a:bodyPr wrap="square" lIns="0" tIns="0" rIns="0" bIns="0" rtlCol="0" anchor="ctr"/>
+          <a:lstStyle/>
+          <a:p>
+            <a:pPr algn="ctr" indent="0" marL="0">
+              <a:buNone/>
+            </a:pPr>
+            <a:r>
+              <a:rPr lang="en-US" sz="1200" b="1" dirty="0">
+                <a:solidFill>
+                  <a:srgbClr val="1C7293"/>
+                </a:solidFill>
+                <a:latin typeface="Calibri" pitchFamily="34" charset="0"/>
+                <a:ea typeface="Calibri" pitchFamily="34" charset="-122"/>
+                <a:cs typeface="Calibri" pitchFamily="34" charset="-120"/>
+              </a:rPr>
+              <a:t>i</a:t>
+            </a:r>
+            <a:endParaRPr lang="en-US" sz="1200" dirty="0"/>
+          </a:p>
+        </p:txBody>
+      </p:sp>
+      <p:sp>
+        <p:nvSpPr>
+          <p:cNvPr id="9" name="Text 7"/>
+          <p:cNvSpPr txBox="1"/>
+          <p:nvPr/>
+        </p:nvSpPr>
+        <p:spPr>
+          <a:xfrm>
+            <a:off x="950976" y="2288667"/>
+            <a:ext cx="5925312" cy="441579"/>
+          </a:xfrm>
+          <a:prstGeom prst="rect">
+            <a:avLst/>
+          </a:prstGeom>
+          <a:noFill/>
+          <a:ln/>
+        </p:spPr>
+        <p:txBody>
+          <a:bodyPr wrap="square" lIns="0" tIns="0" rIns="0" bIns="0" rtlCol="0" anchor="t"/>
+          <a:lstStyle/>
+          <a:p>
+            <a:pPr indent="0" marL="0">
+              <a:lnSpc>
+                <a:spcPct val="120000"/>
+              </a:lnSpc>
+              <a:buNone/>
+            </a:pPr>
+            <a:r>
+              <a:rPr lang="en-US" sz="1050" dirty="0">
+                <a:solidFill>
+                  <a:srgbClr val="222222"/>
+                </a:solidFill>
+                <a:latin typeface="Calibri" pitchFamily="34" charset="0"/>
+                <a:ea typeface="Calibri" pitchFamily="34" charset="-122"/>
+                <a:cs typeface="Calibri" pitchFamily="34" charset="-120"/>
+              </a:rPr>
+              <a:t>事務局が「共通設問テンプレート」を用意している場合は、編集画面の下にある</a:t>
+            </a:r>
+            <a:pPr indent="0" marL="0">
+              <a:lnSpc>
+                <a:spcPct val="120000"/>
+              </a:lnSpc>
+              <a:buNone/>
+            </a:pPr>
+            <a:r>
+              <a:rPr lang="en-US" sz="1050" b="1" dirty="0">
+                <a:solidFill>
+                  <a:srgbClr val="222222"/>
+                </a:solidFill>
+                <a:latin typeface="Calibri" pitchFamily="34" charset="0"/>
+                <a:ea typeface="Calibri" pitchFamily="34" charset="-122"/>
+                <a:cs typeface="Calibri" pitchFamily="34" charset="-120"/>
+              </a:rPr>
+              <a:t>「共通設問を取り込む」</a:t>
+            </a:r>
+            <a:pPr indent="0" marL="0">
+              <a:lnSpc>
+                <a:spcPct val="120000"/>
+              </a:lnSpc>
+              <a:buNone/>
+            </a:pPr>
+            <a:r>
+              <a:rPr lang="en-US" sz="1050" dirty="0">
+                <a:solidFill>
+                  <a:srgbClr val="222222"/>
+                </a:solidFill>
+                <a:latin typeface="Calibri" pitchFamily="34" charset="0"/>
+                <a:ea typeface="Calibri" pitchFamily="34" charset="-122"/>
+                <a:cs typeface="Calibri" pitchFamily="34" charset="-120"/>
+              </a:rPr>
+              <a:t>で、全社共通の設問を自社アンケートに追加できます。</a:t>
+            </a:r>
+            <a:endParaRPr lang="en-US" sz="1050" dirty="0"/>
+          </a:p>
+        </p:txBody>
+      </p:sp>
+      <p:sp>
+        <p:nvSpPr>
+          <p:cNvPr id="10" name="Text 8"/>
+          <p:cNvSpPr txBox="1"/>
+          <p:nvPr/>
+        </p:nvSpPr>
+        <p:spPr>
+          <a:xfrm>
+            <a:off x="566928" y="2986278"/>
+            <a:ext cx="6428232" cy="257810"/>
+          </a:xfrm>
+          <a:prstGeom prst="rect">
+            <a:avLst/>
+          </a:prstGeom>
+          <a:noFill/>
+          <a:ln/>
+        </p:spPr>
+        <p:txBody>
+          <a:bodyPr wrap="square" lIns="0" tIns="0" rIns="0" bIns="0" rtlCol="0" anchor="t"/>
+          <a:lstStyle/>
+          <a:p>
+            <a:pPr indent="0" marL="0">
+              <a:buNone/>
+            </a:pPr>
+            <a:r>
+              <a:rPr lang="en-US" sz="1400" b="1" dirty="0">
+                <a:solidFill>
+                  <a:srgbClr val="1C7293"/>
+                </a:solidFill>
+                <a:latin typeface="Calibri" pitchFamily="34" charset="0"/>
+                <a:ea typeface="Calibri" pitchFamily="34" charset="-122"/>
+                <a:cs typeface="Calibri" pitchFamily="34" charset="-120"/>
+              </a:rPr>
+              <a:t>設問を直すとき</a:t>
+            </a:r>
+            <a:endParaRPr lang="en-US" sz="1400" dirty="0"/>
+          </a:p>
+        </p:txBody>
+      </p:sp>
+      <p:sp>
+        <p:nvSpPr>
           <p:cNvPr id="11" name="Text 9"/>
           <p:cNvSpPr txBox="1"/>
           <p:nvPr/>
         </p:nvSpPr>
         <p:spPr>
           <a:xfrm>
-            <a:off x="658368" y="3245358"/>
-            <a:ext cx="237744" cy="237744"/>
-          </a:xfrm>
-          <a:prstGeom prst="rect">
-            <a:avLst/>
-          </a:prstGeom>
-          <a:noFill/>
-          <a:ln/>
-        </p:spPr>
-        <p:txBody>
-          <a:bodyPr wrap="square" lIns="0" tIns="0" rIns="0" bIns="0" rtlCol="0" anchor="ctr"/>
-          <a:lstStyle/>
-          <a:p>
-            <a:pPr algn="ctr" indent="0" marL="0">
-              <a:buNone/>
-            </a:pPr>
-            <a:r>
-              <a:rPr lang="en-US" sz="1200" b="1" dirty="0">
-                <a:solidFill>
-                  <a:srgbClr val="1C7293"/>
-                </a:solidFill>
-                <a:latin typeface="Calibri" pitchFamily="34" charset="0"/>
-                <a:ea typeface="Calibri" pitchFamily="34" charset="-122"/>
-                <a:cs typeface="Calibri" pitchFamily="34" charset="-120"/>
-              </a:rPr>
-              <a:t>i</a:t>
-            </a:r>
-            <a:endParaRPr lang="en-US" sz="1200" dirty="0"/>
+            <a:off x="713232" y="3317240"/>
+            <a:ext cx="6281928" cy="257429"/>
+          </a:xfrm>
+          <a:prstGeom prst="rect">
+            <a:avLst/>
+          </a:prstGeom>
+          <a:noFill/>
+          <a:ln/>
+        </p:spPr>
+        <p:txBody>
+          <a:bodyPr wrap="square" lIns="0" tIns="0" rIns="0" bIns="0" rtlCol="0" anchor="t"/>
+          <a:lstStyle/>
+          <a:p>
+            <a:pPr marL="342900" indent="-342900">
+              <a:lnSpc>
+                <a:spcPct val="125000"/>
+              </a:lnSpc>
+              <a:buSzPct val="100000"/>
+              <a:buChar char="●"/>
+            </a:pPr>
+            <a:r>
+              <a:rPr lang="en-US" sz="1100" dirty="0">
+                <a:solidFill>
+                  <a:srgbClr val="222222"/>
+                </a:solidFill>
+                <a:latin typeface="Calibri" pitchFamily="34" charset="0"/>
+                <a:ea typeface="Calibri" pitchFamily="34" charset="-122"/>
+                <a:cs typeface="Calibri" pitchFamily="34" charset="-120"/>
+              </a:rPr>
+              <a:t>設問文や選択肢は、回答が始まったあとでも直せます</a:t>
+            </a:r>
+            <a:endParaRPr lang="en-US" sz="1100" dirty="0"/>
           </a:p>
         </p:txBody>
       </p:sp>
@@ -6441,8 +6415,8 @@
         </p:nvSpPr>
         <p:spPr>
           <a:xfrm>
-            <a:off x="950976" y="3263646"/>
-            <a:ext cx="5925312" cy="248221"/>
+            <a:off x="713232" y="3592957"/>
+            <a:ext cx="6281928" cy="257429"/>
           </a:xfrm>
           <a:prstGeom prst="rect">
             <a:avLst/>
@@ -6454,24 +6428,42 @@
           <a:bodyPr wrap="square" lIns="0" tIns="0" rIns="0" bIns="0" rtlCol="0" anchor="t"/>
           <a:lstStyle/>
           <a:p>
-            <a:pPr indent="0" marL="0">
-              <a:lnSpc>
-                <a:spcPct val="120000"/>
-              </a:lnSpc>
-              <a:buNone/>
-            </a:pPr>
-            <a:r>
-              <a:rPr lang="en-US" sz="1050" dirty="0">
-                <a:solidFill>
-                  <a:srgbClr val="222222"/>
-                </a:solidFill>
-                <a:latin typeface="Calibri" pitchFamily="34" charset="0"/>
-                <a:ea typeface="Calibri" pitchFamily="34" charset="-122"/>
-                <a:cs typeface="Calibri" pitchFamily="34" charset="-120"/>
-              </a:rPr>
-              <a:t>数字は回答されるたびに更新されます。画面を再読み込みすると最新になります。</a:t>
-            </a:r>
-            <a:endParaRPr lang="en-US" sz="1050" dirty="0"/>
+            <a:pPr marL="342900" indent="-342900">
+              <a:lnSpc>
+                <a:spcPct val="125000"/>
+              </a:lnSpc>
+              <a:buSzPct val="100000"/>
+              <a:buChar char="●"/>
+            </a:pPr>
+            <a:r>
+              <a:rPr lang="en-US" sz="1100" dirty="0">
+                <a:solidFill>
+                  <a:srgbClr val="222222"/>
+                </a:solidFill>
+                <a:latin typeface="Calibri" pitchFamily="34" charset="0"/>
+                <a:ea typeface="Calibri" pitchFamily="34" charset="-122"/>
+                <a:cs typeface="Calibri" pitchFamily="34" charset="-120"/>
+              </a:rPr>
+              <a:t>ただし</a:t>
+            </a:r>
+            <a:pPr indent="0" marL="0">
+              <a:lnSpc>
+                <a:spcPct val="125000"/>
+              </a:lnSpc>
+              <a:buNone/>
+            </a:pPr>
+            <a:r>
+              <a:rPr lang="en-US" sz="1100" b="1" dirty="0">
+                <a:solidFill>
+                  <a:srgbClr val="222222"/>
+                </a:solidFill>
+                <a:latin typeface="Calibri" pitchFamily="34" charset="0"/>
+                <a:ea typeface="Calibri" pitchFamily="34" charset="-122"/>
+                <a:cs typeface="Calibri" pitchFamily="34" charset="-120"/>
+              </a:rPr>
+              <a:t>設問を削除すると、その設問への回答も一緒に消えます</a:t>
+            </a:r>
+            <a:endParaRPr lang="en-US" sz="1100" dirty="0"/>
           </a:p>
         </p:txBody>
       </p:sp>
@@ -6483,8 +6475,8 @@
         </p:nvSpPr>
         <p:spPr>
           <a:xfrm>
-            <a:off x="566928" y="3767900"/>
-            <a:ext cx="6428232" cy="257810"/>
+            <a:off x="713232" y="3868674"/>
+            <a:ext cx="6281928" cy="257429"/>
           </a:xfrm>
           <a:prstGeom prst="rect">
             <a:avLst/>
@@ -6496,50 +6488,12 @@
           <a:bodyPr wrap="square" lIns="0" tIns="0" rIns="0" bIns="0" rtlCol="0" anchor="t"/>
           <a:lstStyle/>
           <a:p>
-            <a:pPr indent="0" marL="0">
-              <a:buNone/>
-            </a:pPr>
-            <a:r>
-              <a:rPr lang="en-US" sz="1400" b="1" dirty="0">
-                <a:solidFill>
-                  <a:srgbClr val="1C7293"/>
-                </a:solidFill>
-                <a:latin typeface="Calibri" pitchFamily="34" charset="0"/>
-                <a:ea typeface="Calibri" pitchFamily="34" charset="-122"/>
-                <a:cs typeface="Calibri" pitchFamily="34" charset="-120"/>
-              </a:rPr>
-              <a:t>重複送信について</a:t>
-            </a:r>
-            <a:endParaRPr lang="en-US" sz="1400" dirty="0"/>
-          </a:p>
-        </p:txBody>
-      </p:sp>
-      <p:sp>
-        <p:nvSpPr>
-          <p:cNvPr id="14" name="Text 12"/>
-          <p:cNvSpPr txBox="1"/>
-          <p:nvPr/>
-        </p:nvSpPr>
-        <p:spPr>
-          <a:xfrm>
-            <a:off x="566928" y="4098862"/>
-            <a:ext cx="6428232" cy="459994"/>
-          </a:xfrm>
-          <a:prstGeom prst="rect">
-            <a:avLst/>
-          </a:prstGeom>
-          <a:noFill/>
-          <a:ln/>
-        </p:spPr>
-        <p:txBody>
-          <a:bodyPr wrap="square" lIns="0" tIns="0" rIns="0" bIns="0" rtlCol="0" anchor="t"/>
-          <a:lstStyle/>
-          <a:p>
-            <a:pPr indent="0" marL="0">
-              <a:lnSpc>
-                <a:spcPct val="125000"/>
-              </a:lnSpc>
-              <a:buNone/>
+            <a:pPr marL="342900" indent="-342900">
+              <a:lnSpc>
+                <a:spcPct val="125000"/>
+              </a:lnSpc>
+              <a:buSzPct val="100000"/>
+              <a:buChar char="●"/>
             </a:pPr>
             <a:r>
               <a:rPr lang="en-US" sz="1100" dirty="0">
@@ -6550,41 +6504,7 @@
                 <a:ea typeface="Calibri" pitchFamily="34" charset="-122"/>
                 <a:cs typeface="Calibri" pitchFamily="34" charset="-120"/>
               </a:rPr>
-              <a:t>同じ来場者が同じブースで2回送信した場合、2回目以降は「重複」として記録され、</a:t>
-            </a:r>
-            <a:pPr indent="0" marL="0">
-              <a:lnSpc>
-                <a:spcPct val="125000"/>
-              </a:lnSpc>
-              <a:buNone/>
-            </a:pPr>
-            <a:r>
-              <a:rPr lang="en-US" sz="1100" b="1" dirty="0">
-                <a:solidFill>
-                  <a:srgbClr val="222222"/>
-                </a:solidFill>
-                <a:latin typeface="Calibri" pitchFamily="34" charset="0"/>
-                <a:ea typeface="Calibri" pitchFamily="34" charset="-122"/>
-                <a:cs typeface="Calibri" pitchFamily="34" charset="-120"/>
-              </a:rPr>
-              <a:t>集計からは除かれます</a:t>
-            </a:r>
-            <a:pPr indent="0" marL="0">
-              <a:lnSpc>
-                <a:spcPct val="125000"/>
-              </a:lnSpc>
-              <a:buNone/>
-            </a:pPr>
-            <a:r>
-              <a:rPr lang="en-US" sz="1100" dirty="0">
-                <a:solidFill>
-                  <a:srgbClr val="222222"/>
-                </a:solidFill>
-                <a:latin typeface="Calibri" pitchFamily="34" charset="0"/>
-                <a:ea typeface="Calibri" pitchFamily="34" charset="-122"/>
-                <a:cs typeface="Calibri" pitchFamily="34" charset="-120"/>
-              </a:rPr>
-              <a:t>。実際の回答数はそのぶん少なく表示されます。</a:t>
+              <a:t>選択肢を変えると、変更前の回答はそのまま残ります（集計時にご注意ください）</a:t>
             </a:r>
             <a:endParaRPr lang="en-US" sz="1100" dirty="0"/>
           </a:p>
@@ -6592,41 +6512,146 @@
       </p:sp>
       <p:sp>
         <p:nvSpPr>
-          <p:cNvPr id="15" name="Shape 13"/>
+          <p:cNvPr id="14" name="Shape 12"/>
           <p:cNvSpPr/>
           <p:nvPr/>
         </p:nvSpPr>
         <p:spPr>
           <a:xfrm>
-            <a:off x="566928" y="4595432"/>
-            <a:ext cx="6428232" cy="2606040"/>
+            <a:off x="566928" y="4144391"/>
+            <a:ext cx="6428232" cy="624459"/>
           </a:xfrm>
           <a:prstGeom prst="roundRect">
             <a:avLst>
-              <a:gd name="adj" fmla="val 1754"/>
+              <a:gd name="adj" fmla="val 8786"/>
             </a:avLst>
           </a:prstGeom>
           <a:solidFill>
-            <a:srgbClr val="F7F7F7"/>
+            <a:srgbClr val="FDF0E6"/>
           </a:solidFill>
-          <a:ln w="12700">
+          <a:ln w="9525">
             <a:solidFill>
-              <a:srgbClr val="D8D8D8"/>
+              <a:srgbClr val="E08A3C"/>
             </a:solidFill>
-            <a:prstDash val="dash"/>
+            <a:prstDash val="solid"/>
           </a:ln>
         </p:spPr>
       </p:sp>
       <p:sp>
         <p:nvSpPr>
+          <p:cNvPr id="15" name="Text 13"/>
+          <p:cNvSpPr txBox="1"/>
+          <p:nvPr/>
+        </p:nvSpPr>
+        <p:spPr>
+          <a:xfrm>
+            <a:off x="658368" y="4235831"/>
+            <a:ext cx="237744" cy="237744"/>
+          </a:xfrm>
+          <a:prstGeom prst="rect">
+            <a:avLst/>
+          </a:prstGeom>
+          <a:noFill/>
+          <a:ln/>
+        </p:spPr>
+        <p:txBody>
+          <a:bodyPr wrap="square" lIns="0" tIns="0" rIns="0" bIns="0" rtlCol="0" anchor="ctr"/>
+          <a:lstStyle/>
+          <a:p>
+            <a:pPr algn="ctr" indent="0" marL="0">
+              <a:buNone/>
+            </a:pPr>
+            <a:r>
+              <a:rPr lang="en-US" sz="1200" b="1" dirty="0">
+                <a:solidFill>
+                  <a:srgbClr val="C25A17"/>
+                </a:solidFill>
+                <a:latin typeface="Calibri" pitchFamily="34" charset="0"/>
+                <a:ea typeface="Calibri" pitchFamily="34" charset="-122"/>
+                <a:cs typeface="Calibri" pitchFamily="34" charset="-120"/>
+              </a:rPr>
+              <a:t>！</a:t>
+            </a:r>
+            <a:endParaRPr lang="en-US" sz="1200" dirty="0"/>
+          </a:p>
+        </p:txBody>
+      </p:sp>
+      <p:sp>
+        <p:nvSpPr>
           <p:cNvPr id="16" name="Text 14"/>
           <p:cNvSpPr txBox="1"/>
           <p:nvPr/>
         </p:nvSpPr>
         <p:spPr>
           <a:xfrm>
-            <a:off x="749808" y="4979480"/>
-            <a:ext cx="6062472" cy="274320"/>
+            <a:off x="950976" y="4254119"/>
+            <a:ext cx="5925312" cy="441579"/>
+          </a:xfrm>
+          <a:prstGeom prst="rect">
+            <a:avLst/>
+          </a:prstGeom>
+          <a:noFill/>
+          <a:ln/>
+        </p:spPr>
+        <p:txBody>
+          <a:bodyPr wrap="square" lIns="0" tIns="0" rIns="0" bIns="0" rtlCol="0" anchor="t"/>
+          <a:lstStyle/>
+          <a:p>
+            <a:pPr indent="0" marL="0">
+              <a:lnSpc>
+                <a:spcPct val="120000"/>
+              </a:lnSpc>
+              <a:buNone/>
+            </a:pPr>
+            <a:r>
+              <a:rPr lang="en-US" sz="1050" dirty="0">
+                <a:solidFill>
+                  <a:srgbClr val="222222"/>
+                </a:solidFill>
+                <a:latin typeface="Calibri" pitchFamily="34" charset="0"/>
+                <a:ea typeface="Calibri" pitchFamily="34" charset="-122"/>
+                <a:cs typeface="Calibri" pitchFamily="34" charset="-120"/>
+              </a:rPr>
+              <a:t>回答受付が始まったあとに設問を削除する場合は、先にCSVをダウンロードして保存しておいてください。</a:t>
+            </a:r>
+            <a:endParaRPr lang="en-US" sz="1050" dirty="0"/>
+          </a:p>
+        </p:txBody>
+      </p:sp>
+      <p:pic>
+        <p:nvPicPr>
+          <p:cNvPr id="17" name="Image 0" descr="C:\Users\sato\Desktop\enque\docs\images\c-publish.png">    </p:cNvPr>
+          <p:cNvPicPr>
+            <a:picLocks noChangeAspect="1"/>
+          </p:cNvPicPr>
+          <p:nvPr/>
+        </p:nvPicPr>
+        <p:blipFill>
+          <a:blip r:embed="rId1"/>
+          <a:stretch>
+            <a:fillRect/>
+          </a:stretch>
+        </p:blipFill>
+        <p:spPr>
+          <a:xfrm>
+            <a:off x="1504370" y="4842002"/>
+            <a:ext cx="4553347" cy="3474720"/>
+          </a:xfrm>
+          <a:prstGeom prst="rect">
+            <a:avLst/>
+          </a:prstGeom>
+        </p:spPr>
+      </p:pic>
+      <p:sp>
+        <p:nvSpPr>
+          <p:cNvPr id="18" name="Text 15"/>
+          <p:cNvSpPr txBox="1"/>
+          <p:nvPr/>
+        </p:nvSpPr>
+        <p:spPr>
+          <a:xfrm>
+            <a:off x="566928" y="8371586"/>
+            <a:ext cx="6428232" cy="274320"/>
           </a:xfrm>
           <a:prstGeom prst="rect">
             <a:avLst/>
@@ -6642,7 +6667,7 @@
               <a:buNone/>
             </a:pPr>
             <a:r>
-              <a:rPr lang="en-US" sz="1100" b="1" dirty="0">
+              <a:rPr lang="en-US" sz="950" dirty="0">
                 <a:solidFill>
                   <a:srgbClr val="6B6B6B"/>
                 </a:solidFill>
@@ -6650,57 +6675,15 @@
                 <a:ea typeface="Calibri" pitchFamily="34" charset="-122"/>
                 <a:cs typeface="Calibri" pitchFamily="34" charset="-120"/>
               </a:rPr>
-              <a:t>［ スクリーンショット ］ ここに貼り付けてください</a:t>
-            </a:r>
-            <a:endParaRPr lang="en-US" sz="1100" dirty="0"/>
-          </a:p>
-        </p:txBody>
-      </p:sp>
-      <p:sp>
-        <p:nvSpPr>
-          <p:cNvPr id="17" name="Text 15"/>
-          <p:cNvSpPr txBox="1"/>
-          <p:nvPr/>
-        </p:nvSpPr>
-        <p:spPr>
-          <a:xfrm>
-            <a:off x="841248" y="5345240"/>
-            <a:ext cx="5879592" cy="731520"/>
-          </a:xfrm>
-          <a:prstGeom prst="rect">
-            <a:avLst/>
-          </a:prstGeom>
-          <a:noFill/>
-          <a:ln/>
-        </p:spPr>
-        <p:txBody>
-          <a:bodyPr wrap="square" lIns="0" tIns="0" rIns="0" bIns="0" rtlCol="0" anchor="t"/>
-          <a:lstStyle/>
-          <a:p>
-            <a:pPr algn="ctr" indent="0" marL="0">
-              <a:lnSpc>
-                <a:spcPct val="120000"/>
-              </a:lnSpc>
-              <a:buNone/>
-            </a:pPr>
-            <a:r>
-              <a:rPr lang="en-US" sz="1050" dirty="0">
-                <a:solidFill>
-                  <a:srgbClr val="222222"/>
-                </a:solidFill>
-                <a:latin typeface="Calibri" pitchFamily="34" charset="0"/>
-                <a:ea typeface="Calibri" pitchFamily="34" charset="-122"/>
-                <a:cs typeface="Calibri" pitchFamily="34" charset="-120"/>
-              </a:rPr>
-              <a:t>設問ごとの集計グラフ（棒グラフとNPS・星評価の数字が見えるもの）。</a:t>
-            </a:r>
-            <a:endParaRPr lang="en-US" sz="1050" dirty="0"/>
-          </a:p>
-        </p:txBody>
-      </p:sp>
-      <p:sp>
-        <p:nvSpPr>
-          <p:cNvPr id="18" name="Text 16"/>
+              <a:t>アンケート編集画面の「公開する」チェックボックスと保存ボタンの周辺。</a:t>
+            </a:r>
+            <a:endParaRPr lang="en-US" sz="950" dirty="0"/>
+          </a:p>
+        </p:txBody>
+      </p:sp>
+      <p:sp>
+        <p:nvSpPr>
+          <p:cNvPr id="19" name="Text 16"/>
           <p:cNvSpPr txBox="1"/>
           <p:nvPr/>
         </p:nvSpPr>
@@ -6841,7 +6824,7 @@
                 <a:ea typeface="Calibri" pitchFamily="34" charset="-122"/>
                 <a:cs typeface="Calibri" pitchFamily="34" charset="-120"/>
               </a:rPr>
-              <a:t>回答の一覧とCSV</a:t>
+              <a:t>回答状況を見る</a:t>
             </a:r>
             <a:endParaRPr lang="en-US" sz="2200" dirty="0"/>
           </a:p>
@@ -6855,8 +6838,8 @@
         </p:nvSpPr>
         <p:spPr>
           <a:xfrm>
-            <a:off x="566928" y="1591056"/>
-            <a:ext cx="6428232" cy="257810"/>
+            <a:off x="566928" y="1481328"/>
+            <a:ext cx="6428232" cy="257429"/>
           </a:xfrm>
           <a:prstGeom prst="rect">
             <a:avLst/>
@@ -6869,20 +6852,23 @@
           <a:lstStyle/>
           <a:p>
             <a:pPr indent="0" marL="0">
-              <a:buNone/>
-            </a:pPr>
-            <a:r>
-              <a:rPr lang="en-US" sz="1400" b="1" dirty="0">
-                <a:solidFill>
-                  <a:srgbClr val="1C7293"/>
-                </a:solidFill>
-                <a:latin typeface="Calibri" pitchFamily="34" charset="0"/>
-                <a:ea typeface="Calibri" pitchFamily="34" charset="-122"/>
-                <a:cs typeface="Calibri" pitchFamily="34" charset="-120"/>
-              </a:rPr>
-              <a:t>一覧で見る</a:t>
-            </a:r>
-            <a:endParaRPr lang="en-US" sz="1400" dirty="0"/>
+              <a:lnSpc>
+                <a:spcPct val="125000"/>
+              </a:lnSpc>
+              <a:buNone/>
+            </a:pPr>
+            <a:r>
+              <a:rPr lang="en-US" sz="1100" dirty="0">
+                <a:solidFill>
+                  <a:srgbClr val="222222"/>
+                </a:solidFill>
+                <a:latin typeface="Calibri" pitchFamily="34" charset="0"/>
+                <a:ea typeface="Calibri" pitchFamily="34" charset="-122"/>
+                <a:cs typeface="Calibri" pitchFamily="34" charset="-120"/>
+              </a:rPr>
+              <a:t>ダッシュボードに次の情報が出ます。</a:t>
+            </a:r>
+            <a:endParaRPr lang="en-US" sz="1100" dirty="0"/>
           </a:p>
         </p:txBody>
       </p:sp>
@@ -6894,181 +6880,7 @@
         </p:nvSpPr>
         <p:spPr>
           <a:xfrm>
-            <a:off x="566928" y="1922018"/>
-            <a:ext cx="6428232" cy="459994"/>
-          </a:xfrm>
-          <a:prstGeom prst="rect">
-            <a:avLst/>
-          </a:prstGeom>
-          <a:noFill/>
-          <a:ln/>
-        </p:spPr>
-        <p:txBody>
-          <a:bodyPr wrap="square" lIns="0" tIns="0" rIns="0" bIns="0" rtlCol="0" anchor="t"/>
-          <a:lstStyle/>
-          <a:p>
-            <a:pPr indent="0" marL="0">
-              <a:lnSpc>
-                <a:spcPct val="125000"/>
-              </a:lnSpc>
-              <a:buNone/>
-            </a:pPr>
-            <a:r>
-              <a:rPr lang="en-US" sz="1100" dirty="0">
-                <a:solidFill>
-                  <a:srgbClr val="222222"/>
-                </a:solidFill>
-                <a:latin typeface="Calibri" pitchFamily="34" charset="0"/>
-                <a:ea typeface="Calibri" pitchFamily="34" charset="-122"/>
-                <a:cs typeface="Calibri" pitchFamily="34" charset="-120"/>
-              </a:rPr>
-              <a:t>ダッシュボードの</a:t>
-            </a:r>
-            <a:pPr indent="0" marL="0">
-              <a:lnSpc>
-                <a:spcPct val="125000"/>
-              </a:lnSpc>
-              <a:buNone/>
-            </a:pPr>
-            <a:r>
-              <a:rPr lang="en-US" sz="1100" b="1" dirty="0">
-                <a:solidFill>
-                  <a:srgbClr val="222222"/>
-                </a:solidFill>
-                <a:latin typeface="Calibri" pitchFamily="34" charset="0"/>
-                <a:ea typeface="Calibri" pitchFamily="34" charset="-122"/>
-                <a:cs typeface="Calibri" pitchFamily="34" charset="-120"/>
-              </a:rPr>
-              <a:t>「回答一覧」</a:t>
-            </a:r>
-            <a:pPr indent="0" marL="0">
-              <a:lnSpc>
-                <a:spcPct val="125000"/>
-              </a:lnSpc>
-              <a:buNone/>
-            </a:pPr>
-            <a:r>
-              <a:rPr lang="en-US" sz="1100" dirty="0">
-                <a:solidFill>
-                  <a:srgbClr val="222222"/>
-                </a:solidFill>
-                <a:latin typeface="Calibri" pitchFamily="34" charset="0"/>
-                <a:ea typeface="Calibri" pitchFamily="34" charset="-122"/>
-                <a:cs typeface="Calibri" pitchFamily="34" charset="-120"/>
-              </a:rPr>
-              <a:t>を押すと、1件ずつの回答内容を新しい順に確認できます（1ページ50件）。</a:t>
-            </a:r>
-            <a:endParaRPr lang="en-US" sz="1100" dirty="0"/>
-          </a:p>
-        </p:txBody>
-      </p:sp>
-      <p:sp>
-        <p:nvSpPr>
-          <p:cNvPr id="6" name="Text 4"/>
-          <p:cNvSpPr txBox="1"/>
-          <p:nvPr/>
-        </p:nvSpPr>
-        <p:spPr>
-          <a:xfrm>
-            <a:off x="566928" y="2528316"/>
-            <a:ext cx="6428232" cy="257810"/>
-          </a:xfrm>
-          <a:prstGeom prst="rect">
-            <a:avLst/>
-          </a:prstGeom>
-          <a:noFill/>
-          <a:ln/>
-        </p:spPr>
-        <p:txBody>
-          <a:bodyPr wrap="square" lIns="0" tIns="0" rIns="0" bIns="0" rtlCol="0" anchor="t"/>
-          <a:lstStyle/>
-          <a:p>
-            <a:pPr indent="0" marL="0">
-              <a:buNone/>
-            </a:pPr>
-            <a:r>
-              <a:rPr lang="en-US" sz="1400" b="1" dirty="0">
-                <a:solidFill>
-                  <a:srgbClr val="1C7293"/>
-                </a:solidFill>
-                <a:latin typeface="Calibri" pitchFamily="34" charset="0"/>
-                <a:ea typeface="Calibri" pitchFamily="34" charset="-122"/>
-                <a:cs typeface="Calibri" pitchFamily="34" charset="-120"/>
-              </a:rPr>
-              <a:t>CSVでダウンロードする</a:t>
-            </a:r>
-            <a:endParaRPr lang="en-US" sz="1400" dirty="0"/>
-          </a:p>
-        </p:txBody>
-      </p:sp>
-      <p:sp>
-        <p:nvSpPr>
-          <p:cNvPr id="7" name="Text 5"/>
-          <p:cNvSpPr txBox="1"/>
-          <p:nvPr/>
-        </p:nvSpPr>
-        <p:spPr>
-          <a:xfrm>
-            <a:off x="566928" y="2859278"/>
-            <a:ext cx="6428232" cy="257429"/>
-          </a:xfrm>
-          <a:prstGeom prst="rect">
-            <a:avLst/>
-          </a:prstGeom>
-          <a:noFill/>
-          <a:ln/>
-        </p:spPr>
-        <p:txBody>
-          <a:bodyPr wrap="square" lIns="0" tIns="0" rIns="0" bIns="0" rtlCol="0" anchor="t"/>
-          <a:lstStyle/>
-          <a:p>
-            <a:pPr indent="0" marL="0">
-              <a:lnSpc>
-                <a:spcPct val="125000"/>
-              </a:lnSpc>
-              <a:buNone/>
-            </a:pPr>
-            <a:r>
-              <a:rPr lang="en-US" sz="1100" b="1" dirty="0">
-                <a:solidFill>
-                  <a:srgbClr val="222222"/>
-                </a:solidFill>
-                <a:latin typeface="Calibri" pitchFamily="34" charset="0"/>
-                <a:ea typeface="Calibri" pitchFamily="34" charset="-122"/>
-                <a:cs typeface="Calibri" pitchFamily="34" charset="-120"/>
-              </a:rPr>
-              <a:t>「CSVダウンロード」</a:t>
-            </a:r>
-            <a:pPr indent="0" marL="0">
-              <a:lnSpc>
-                <a:spcPct val="125000"/>
-              </a:lnSpc>
-              <a:buNone/>
-            </a:pPr>
-            <a:r>
-              <a:rPr lang="en-US" sz="1100" dirty="0">
-                <a:solidFill>
-                  <a:srgbClr val="222222"/>
-                </a:solidFill>
-                <a:latin typeface="Calibri" pitchFamily="34" charset="0"/>
-                <a:ea typeface="Calibri" pitchFamily="34" charset="-122"/>
-                <a:cs typeface="Calibri" pitchFamily="34" charset="-120"/>
-              </a:rPr>
-              <a:t>を押すと、自社ぶんの回答がCSVファイルで保存されます。</a:t>
-            </a:r>
-            <a:endParaRPr lang="en-US" sz="1100" dirty="0"/>
-          </a:p>
-        </p:txBody>
-      </p:sp>
-      <p:sp>
-        <p:nvSpPr>
-          <p:cNvPr id="8" name="Text 6"/>
-          <p:cNvSpPr txBox="1"/>
-          <p:nvPr/>
-        </p:nvSpPr>
-        <p:spPr>
-          <a:xfrm>
-            <a:off x="713232" y="3153283"/>
+            <a:off x="713232" y="1775333"/>
             <a:ext cx="6281928" cy="257429"/>
           </a:xfrm>
           <a:prstGeom prst="rect">
@@ -7097,7 +6909,7 @@
                 <a:ea typeface="Calibri" pitchFamily="34" charset="-122"/>
                 <a:cs typeface="Calibri" pitchFamily="34" charset="-120"/>
               </a:rPr>
-              <a:t>UTF-8（BOM付き）</a:t>
+              <a:t>回答数</a:t>
             </a:r>
             <a:pPr indent="0" marL="0">
               <a:lnSpc>
@@ -7114,7 +6926,7 @@
                 <a:ea typeface="Calibri" pitchFamily="34" charset="-122"/>
                 <a:cs typeface="Calibri" pitchFamily="34" charset="-120"/>
               </a:rPr>
-              <a:t>なので、Excelでそのまま開けます</a:t>
+              <a:t>（重複を除いた件数）</a:t>
             </a:r>
             <a:endParaRPr lang="en-US" sz="1100" dirty="0"/>
           </a:p>
@@ -7122,13 +6934,13 @@
       </p:sp>
       <p:sp>
         <p:nvSpPr>
-          <p:cNvPr id="9" name="Text 7"/>
-          <p:cNvSpPr txBox="1"/>
-          <p:nvPr/>
-        </p:nvSpPr>
-        <p:spPr>
-          <a:xfrm>
-            <a:off x="713232" y="3429000"/>
+          <p:cNvPr id="6" name="Text 4"/>
+          <p:cNvSpPr txBox="1"/>
+          <p:nvPr/>
+        </p:nvSpPr>
+        <p:spPr>
+          <a:xfrm>
+            <a:off x="713232" y="2051050"/>
             <a:ext cx="6281928" cy="257429"/>
           </a:xfrm>
           <a:prstGeom prst="rect">
@@ -7149,6 +6961,23 @@
               <a:buChar char="●"/>
             </a:pPr>
             <a:r>
+              <a:rPr lang="en-US" sz="1100" b="1" dirty="0">
+                <a:solidFill>
+                  <a:srgbClr val="222222"/>
+                </a:solidFill>
+                <a:latin typeface="Calibri" pitchFamily="34" charset="0"/>
+                <a:ea typeface="Calibri" pitchFamily="34" charset="-122"/>
+                <a:cs typeface="Calibri" pitchFamily="34" charset="-120"/>
+              </a:rPr>
+              <a:t>重複送信</a:t>
+            </a:r>
+            <a:pPr indent="0" marL="0">
+              <a:lnSpc>
+                <a:spcPct val="125000"/>
+              </a:lnSpc>
+              <a:buNone/>
+            </a:pPr>
+            <a:r>
               <a:rPr lang="en-US" sz="1100" dirty="0">
                 <a:solidFill>
                   <a:srgbClr val="222222"/>
@@ -7157,7 +6986,7 @@
                 <a:ea typeface="Calibri" pitchFamily="34" charset="-122"/>
                 <a:cs typeface="Calibri" pitchFamily="34" charset="-120"/>
               </a:rPr>
-              <a:t>1行が1件の回答、設問が列になります</a:t>
+              <a:t>：同じ端末から同じブースに送り直された件数</a:t>
             </a:r>
             <a:endParaRPr lang="en-US" sz="1100" dirty="0"/>
           </a:p>
@@ -7165,13 +6994,13 @@
       </p:sp>
       <p:sp>
         <p:nvSpPr>
-          <p:cNvPr id="10" name="Text 8"/>
-          <p:cNvSpPr txBox="1"/>
-          <p:nvPr/>
-        </p:nvSpPr>
-        <p:spPr>
-          <a:xfrm>
-            <a:off x="713232" y="3704717"/>
+          <p:cNvPr id="7" name="Text 5"/>
+          <p:cNvSpPr txBox="1"/>
+          <p:nvPr/>
+        </p:nvSpPr>
+        <p:spPr>
+          <a:xfrm>
+            <a:off x="713232" y="2326767"/>
             <a:ext cx="6281928" cy="257429"/>
           </a:xfrm>
           <a:prstGeom prst="rect">
@@ -7200,7 +7029,50 @@
                 <a:ea typeface="Calibri" pitchFamily="34" charset="-122"/>
                 <a:cs typeface="Calibri" pitchFamily="34" charset="-120"/>
               </a:rPr>
-              <a:t>来場者のメールアドレスは含まれません</a:t>
+              <a:t>設問数</a:t>
+            </a:r>
+            <a:endParaRPr lang="en-US" sz="1100" dirty="0"/>
+          </a:p>
+        </p:txBody>
+      </p:sp>
+      <p:sp>
+        <p:nvSpPr>
+          <p:cNvPr id="8" name="Text 6"/>
+          <p:cNvSpPr txBox="1"/>
+          <p:nvPr/>
+        </p:nvSpPr>
+        <p:spPr>
+          <a:xfrm>
+            <a:off x="713232" y="2602484"/>
+            <a:ext cx="6281928" cy="257429"/>
+          </a:xfrm>
+          <a:prstGeom prst="rect">
+            <a:avLst/>
+          </a:prstGeom>
+          <a:noFill/>
+          <a:ln/>
+        </p:spPr>
+        <p:txBody>
+          <a:bodyPr wrap="square" lIns="0" tIns="0" rIns="0" bIns="0" rtlCol="0" anchor="t"/>
+          <a:lstStyle/>
+          <a:p>
+            <a:pPr marL="342900" indent="-342900">
+              <a:lnSpc>
+                <a:spcPct val="125000"/>
+              </a:lnSpc>
+              <a:buSzPct val="100000"/>
+              <a:buChar char="●"/>
+            </a:pPr>
+            <a:r>
+              <a:rPr lang="en-US" sz="1100" b="1" dirty="0">
+                <a:solidFill>
+                  <a:srgbClr val="222222"/>
+                </a:solidFill>
+                <a:latin typeface="Calibri" pitchFamily="34" charset="0"/>
+                <a:ea typeface="Calibri" pitchFamily="34" charset="-122"/>
+                <a:cs typeface="Calibri" pitchFamily="34" charset="-120"/>
+              </a:rPr>
+              <a:t>時間帯別の回答数</a:t>
             </a:r>
             <a:pPr indent="0" marL="0">
               <a:lnSpc>
@@ -7217,7 +7089,7 @@
                 <a:ea typeface="Calibri" pitchFamily="34" charset="-122"/>
                 <a:cs typeface="Calibri" pitchFamily="34" charset="-120"/>
               </a:rPr>
-              <a:t>（匿名のIDのみ）</a:t>
+              <a:t>のグラフ</a:t>
             </a:r>
             <a:endParaRPr lang="en-US" sz="1100" dirty="0"/>
           </a:p>
@@ -7225,13 +7097,73 @@
       </p:sp>
       <p:sp>
         <p:nvSpPr>
-          <p:cNvPr id="11" name="Shape 9"/>
+          <p:cNvPr id="9" name="Text 7"/>
+          <p:cNvSpPr txBox="1"/>
+          <p:nvPr/>
+        </p:nvSpPr>
+        <p:spPr>
+          <a:xfrm>
+            <a:off x="713232" y="2878201"/>
+            <a:ext cx="6281928" cy="257429"/>
+          </a:xfrm>
+          <a:prstGeom prst="rect">
+            <a:avLst/>
+          </a:prstGeom>
+          <a:noFill/>
+          <a:ln/>
+        </p:spPr>
+        <p:txBody>
+          <a:bodyPr wrap="square" lIns="0" tIns="0" rIns="0" bIns="0" rtlCol="0" anchor="t"/>
+          <a:lstStyle/>
+          <a:p>
+            <a:pPr marL="342900" indent="-342900">
+              <a:lnSpc>
+                <a:spcPct val="125000"/>
+              </a:lnSpc>
+              <a:buSzPct val="100000"/>
+              <a:buChar char="●"/>
+            </a:pPr>
+            <a:r>
+              <a:rPr lang="en-US" sz="1100" b="1" dirty="0">
+                <a:solidFill>
+                  <a:srgbClr val="222222"/>
+                </a:solidFill>
+                <a:latin typeface="Calibri" pitchFamily="34" charset="0"/>
+                <a:ea typeface="Calibri" pitchFamily="34" charset="-122"/>
+                <a:cs typeface="Calibri" pitchFamily="34" charset="-120"/>
+              </a:rPr>
+              <a:t>設問ごとの集計</a:t>
+            </a:r>
+            <a:pPr indent="0" marL="0">
+              <a:lnSpc>
+                <a:spcPct val="125000"/>
+              </a:lnSpc>
+              <a:buNone/>
+            </a:pPr>
+            <a:r>
+              <a:rPr lang="en-US" sz="1100" dirty="0">
+                <a:solidFill>
+                  <a:srgbClr val="222222"/>
+                </a:solidFill>
+                <a:latin typeface="Calibri" pitchFamily="34" charset="0"/>
+                <a:ea typeface="Calibri" pitchFamily="34" charset="-122"/>
+                <a:cs typeface="Calibri" pitchFamily="34" charset="-120"/>
+              </a:rPr>
+              <a:t>（選択式は棒グラフ、星評価は平均、NPSはスコア、自由記述は一覧）</a:t>
+            </a:r>
+            <a:endParaRPr lang="en-US" sz="1100" dirty="0"/>
+          </a:p>
+        </p:txBody>
+      </p:sp>
+      <p:sp>
+        <p:nvSpPr>
+          <p:cNvPr id="10" name="Shape 8"/>
           <p:cNvSpPr/>
           <p:nvPr/>
         </p:nvSpPr>
         <p:spPr>
           <a:xfrm>
-            <a:off x="566928" y="3980434"/>
+            <a:off x="566928" y="3153918"/>
             <a:ext cx="6428232" cy="431102"/>
           </a:xfrm>
           <a:prstGeom prst="roundRect">
@@ -7252,14 +7184,234 @@
       </p:sp>
       <p:sp>
         <p:nvSpPr>
+          <p:cNvPr id="11" name="Text 9"/>
+          <p:cNvSpPr txBox="1"/>
+          <p:nvPr/>
+        </p:nvSpPr>
+        <p:spPr>
+          <a:xfrm>
+            <a:off x="658368" y="3245358"/>
+            <a:ext cx="237744" cy="237744"/>
+          </a:xfrm>
+          <a:prstGeom prst="rect">
+            <a:avLst/>
+          </a:prstGeom>
+          <a:noFill/>
+          <a:ln/>
+        </p:spPr>
+        <p:txBody>
+          <a:bodyPr wrap="square" lIns="0" tIns="0" rIns="0" bIns="0" rtlCol="0" anchor="ctr"/>
+          <a:lstStyle/>
+          <a:p>
+            <a:pPr algn="ctr" indent="0" marL="0">
+              <a:buNone/>
+            </a:pPr>
+            <a:r>
+              <a:rPr lang="en-US" sz="1200" b="1" dirty="0">
+                <a:solidFill>
+                  <a:srgbClr val="1C7293"/>
+                </a:solidFill>
+                <a:latin typeface="Calibri" pitchFamily="34" charset="0"/>
+                <a:ea typeface="Calibri" pitchFamily="34" charset="-122"/>
+                <a:cs typeface="Calibri" pitchFamily="34" charset="-120"/>
+              </a:rPr>
+              <a:t>i</a:t>
+            </a:r>
+            <a:endParaRPr lang="en-US" sz="1200" dirty="0"/>
+          </a:p>
+        </p:txBody>
+      </p:sp>
+      <p:sp>
+        <p:nvSpPr>
           <p:cNvPr id="12" name="Text 10"/>
           <p:cNvSpPr txBox="1"/>
           <p:nvPr/>
         </p:nvSpPr>
         <p:spPr>
           <a:xfrm>
-            <a:off x="658368" y="4071874"/>
-            <a:ext cx="237744" cy="237744"/>
+            <a:off x="950976" y="3263646"/>
+            <a:ext cx="5925312" cy="248221"/>
+          </a:xfrm>
+          <a:prstGeom prst="rect">
+            <a:avLst/>
+          </a:prstGeom>
+          <a:noFill/>
+          <a:ln/>
+        </p:spPr>
+        <p:txBody>
+          <a:bodyPr wrap="square" lIns="0" tIns="0" rIns="0" bIns="0" rtlCol="0" anchor="t"/>
+          <a:lstStyle/>
+          <a:p>
+            <a:pPr indent="0" marL="0">
+              <a:lnSpc>
+                <a:spcPct val="120000"/>
+              </a:lnSpc>
+              <a:buNone/>
+            </a:pPr>
+            <a:r>
+              <a:rPr lang="en-US" sz="1050" dirty="0">
+                <a:solidFill>
+                  <a:srgbClr val="222222"/>
+                </a:solidFill>
+                <a:latin typeface="Calibri" pitchFamily="34" charset="0"/>
+                <a:ea typeface="Calibri" pitchFamily="34" charset="-122"/>
+                <a:cs typeface="Calibri" pitchFamily="34" charset="-120"/>
+              </a:rPr>
+              <a:t>数字は回答されるたびに更新されます。画面を再読み込みすると最新になります。</a:t>
+            </a:r>
+            <a:endParaRPr lang="en-US" sz="1050" dirty="0"/>
+          </a:p>
+        </p:txBody>
+      </p:sp>
+      <p:sp>
+        <p:nvSpPr>
+          <p:cNvPr id="13" name="Text 11"/>
+          <p:cNvSpPr txBox="1"/>
+          <p:nvPr/>
+        </p:nvSpPr>
+        <p:spPr>
+          <a:xfrm>
+            <a:off x="566928" y="3767900"/>
+            <a:ext cx="6428232" cy="257810"/>
+          </a:xfrm>
+          <a:prstGeom prst="rect">
+            <a:avLst/>
+          </a:prstGeom>
+          <a:noFill/>
+          <a:ln/>
+        </p:spPr>
+        <p:txBody>
+          <a:bodyPr wrap="square" lIns="0" tIns="0" rIns="0" bIns="0" rtlCol="0" anchor="t"/>
+          <a:lstStyle/>
+          <a:p>
+            <a:pPr indent="0" marL="0">
+              <a:buNone/>
+            </a:pPr>
+            <a:r>
+              <a:rPr lang="en-US" sz="1400" b="1" dirty="0">
+                <a:solidFill>
+                  <a:srgbClr val="1C7293"/>
+                </a:solidFill>
+                <a:latin typeface="Calibri" pitchFamily="34" charset="0"/>
+                <a:ea typeface="Calibri" pitchFamily="34" charset="-122"/>
+                <a:cs typeface="Calibri" pitchFamily="34" charset="-120"/>
+              </a:rPr>
+              <a:t>重複送信について</a:t>
+            </a:r>
+            <a:endParaRPr lang="en-US" sz="1400" dirty="0"/>
+          </a:p>
+        </p:txBody>
+      </p:sp>
+      <p:sp>
+        <p:nvSpPr>
+          <p:cNvPr id="14" name="Text 12"/>
+          <p:cNvSpPr txBox="1"/>
+          <p:nvPr/>
+        </p:nvSpPr>
+        <p:spPr>
+          <a:xfrm>
+            <a:off x="566928" y="4098862"/>
+            <a:ext cx="6428232" cy="459994"/>
+          </a:xfrm>
+          <a:prstGeom prst="rect">
+            <a:avLst/>
+          </a:prstGeom>
+          <a:noFill/>
+          <a:ln/>
+        </p:spPr>
+        <p:txBody>
+          <a:bodyPr wrap="square" lIns="0" tIns="0" rIns="0" bIns="0" rtlCol="0" anchor="t"/>
+          <a:lstStyle/>
+          <a:p>
+            <a:pPr indent="0" marL="0">
+              <a:lnSpc>
+                <a:spcPct val="125000"/>
+              </a:lnSpc>
+              <a:buNone/>
+            </a:pPr>
+            <a:r>
+              <a:rPr lang="en-US" sz="1100" dirty="0">
+                <a:solidFill>
+                  <a:srgbClr val="222222"/>
+                </a:solidFill>
+                <a:latin typeface="Calibri" pitchFamily="34" charset="0"/>
+                <a:ea typeface="Calibri" pitchFamily="34" charset="-122"/>
+                <a:cs typeface="Calibri" pitchFamily="34" charset="-120"/>
+              </a:rPr>
+              <a:t>同じ来場者が同じブースで2回送信した場合、2回目以降は「重複」として記録され、</a:t>
+            </a:r>
+            <a:pPr indent="0" marL="0">
+              <a:lnSpc>
+                <a:spcPct val="125000"/>
+              </a:lnSpc>
+              <a:buNone/>
+            </a:pPr>
+            <a:r>
+              <a:rPr lang="en-US" sz="1100" b="1" dirty="0">
+                <a:solidFill>
+                  <a:srgbClr val="222222"/>
+                </a:solidFill>
+                <a:latin typeface="Calibri" pitchFamily="34" charset="0"/>
+                <a:ea typeface="Calibri" pitchFamily="34" charset="-122"/>
+                <a:cs typeface="Calibri" pitchFamily="34" charset="-120"/>
+              </a:rPr>
+              <a:t>集計からは除かれます</a:t>
+            </a:r>
+            <a:pPr indent="0" marL="0">
+              <a:lnSpc>
+                <a:spcPct val="125000"/>
+              </a:lnSpc>
+              <a:buNone/>
+            </a:pPr>
+            <a:r>
+              <a:rPr lang="en-US" sz="1100" dirty="0">
+                <a:solidFill>
+                  <a:srgbClr val="222222"/>
+                </a:solidFill>
+                <a:latin typeface="Calibri" pitchFamily="34" charset="0"/>
+                <a:ea typeface="Calibri" pitchFamily="34" charset="-122"/>
+                <a:cs typeface="Calibri" pitchFamily="34" charset="-120"/>
+              </a:rPr>
+              <a:t>。実際の回答数はそのぶん少なく表示されます。</a:t>
+            </a:r>
+            <a:endParaRPr lang="en-US" sz="1100" dirty="0"/>
+          </a:p>
+        </p:txBody>
+      </p:sp>
+      <p:pic>
+        <p:nvPicPr>
+          <p:cNvPr id="15" name="Image 0" descr="C:\Users\sato\Desktop\enque\docs\images\c-stats.png">    </p:cNvPr>
+          <p:cNvPicPr>
+            <a:picLocks noChangeAspect="1"/>
+          </p:cNvPicPr>
+          <p:nvPr/>
+        </p:nvPicPr>
+        <p:blipFill>
+          <a:blip r:embed="rId1"/>
+          <a:stretch>
+            <a:fillRect/>
+          </a:stretch>
+        </p:blipFill>
+        <p:spPr>
+          <a:xfrm>
+            <a:off x="2140821" y="4595432"/>
+            <a:ext cx="3280447" cy="3474720"/>
+          </a:xfrm>
+          <a:prstGeom prst="rect">
+            <a:avLst/>
+          </a:prstGeom>
+        </p:spPr>
+      </p:pic>
+      <p:sp>
+        <p:nvSpPr>
+          <p:cNvPr id="16" name="Text 13"/>
+          <p:cNvSpPr txBox="1"/>
+          <p:nvPr/>
+        </p:nvSpPr>
+        <p:spPr>
+          <a:xfrm>
+            <a:off x="566928" y="8125015"/>
+            <a:ext cx="6428232" cy="274320"/>
           </a:xfrm>
           <a:prstGeom prst="rect">
             <a:avLst/>
@@ -7275,115 +7427,7 @@
               <a:buNone/>
             </a:pPr>
             <a:r>
-              <a:rPr lang="en-US" sz="1200" b="1" dirty="0">
-                <a:solidFill>
-                  <a:srgbClr val="1C7293"/>
-                </a:solidFill>
-                <a:latin typeface="Calibri" pitchFamily="34" charset="0"/>
-                <a:ea typeface="Calibri" pitchFamily="34" charset="-122"/>
-                <a:cs typeface="Calibri" pitchFamily="34" charset="-120"/>
-              </a:rPr>
-              <a:t>i</a:t>
-            </a:r>
-            <a:endParaRPr lang="en-US" sz="1200" dirty="0"/>
-          </a:p>
-        </p:txBody>
-      </p:sp>
-      <p:sp>
-        <p:nvSpPr>
-          <p:cNvPr id="13" name="Text 11"/>
-          <p:cNvSpPr txBox="1"/>
-          <p:nvPr/>
-        </p:nvSpPr>
-        <p:spPr>
-          <a:xfrm>
-            <a:off x="950976" y="4090162"/>
-            <a:ext cx="5925312" cy="248221"/>
-          </a:xfrm>
-          <a:prstGeom prst="rect">
-            <a:avLst/>
-          </a:prstGeom>
-          <a:noFill/>
-          <a:ln/>
-        </p:spPr>
-        <p:txBody>
-          <a:bodyPr wrap="square" lIns="0" tIns="0" rIns="0" bIns="0" rtlCol="0" anchor="t"/>
-          <a:lstStyle/>
-          <a:p>
-            <a:pPr indent="0" marL="0">
-              <a:lnSpc>
-                <a:spcPct val="120000"/>
-              </a:lnSpc>
-              <a:buNone/>
-            </a:pPr>
-            <a:r>
-              <a:rPr lang="en-US" sz="1050" dirty="0">
-                <a:solidFill>
-                  <a:srgbClr val="222222"/>
-                </a:solidFill>
-                <a:latin typeface="Calibri" pitchFamily="34" charset="0"/>
-                <a:ea typeface="Calibri" pitchFamily="34" charset="-122"/>
-                <a:cs typeface="Calibri" pitchFamily="34" charset="-120"/>
-              </a:rPr>
-              <a:t>「重複を含めて表示」を選ぶと、送り直された回答も含めて確認・出力できます。</a:t>
-            </a:r>
-            <a:endParaRPr lang="en-US" sz="1050" dirty="0"/>
-          </a:p>
-        </p:txBody>
-      </p:sp>
-      <p:sp>
-        <p:nvSpPr>
-          <p:cNvPr id="14" name="Shape 12"/>
-          <p:cNvSpPr/>
-          <p:nvPr/>
-        </p:nvSpPr>
-        <p:spPr>
-          <a:xfrm>
-            <a:off x="566928" y="4484688"/>
-            <a:ext cx="6428232" cy="2606040"/>
-          </a:xfrm>
-          <a:prstGeom prst="roundRect">
-            <a:avLst>
-              <a:gd name="adj" fmla="val 1754"/>
-            </a:avLst>
-          </a:prstGeom>
-          <a:solidFill>
-            <a:srgbClr val="F7F7F7"/>
-          </a:solidFill>
-          <a:ln w="12700">
-            <a:solidFill>
-              <a:srgbClr val="D8D8D8"/>
-            </a:solidFill>
-            <a:prstDash val="dash"/>
-          </a:ln>
-        </p:spPr>
-      </p:sp>
-      <p:sp>
-        <p:nvSpPr>
-          <p:cNvPr id="15" name="Text 13"/>
-          <p:cNvSpPr txBox="1"/>
-          <p:nvPr/>
-        </p:nvSpPr>
-        <p:spPr>
-          <a:xfrm>
-            <a:off x="749808" y="4868735"/>
-            <a:ext cx="6062472" cy="274320"/>
-          </a:xfrm>
-          <a:prstGeom prst="rect">
-            <a:avLst/>
-          </a:prstGeom>
-          <a:noFill/>
-          <a:ln/>
-        </p:spPr>
-        <p:txBody>
-          <a:bodyPr wrap="square" lIns="0" tIns="0" rIns="0" bIns="0" rtlCol="0" anchor="ctr"/>
-          <a:lstStyle/>
-          <a:p>
-            <a:pPr algn="ctr" indent="0" marL="0">
-              <a:buNone/>
-            </a:pPr>
-            <a:r>
-              <a:rPr lang="en-US" sz="1100" b="1" dirty="0">
+              <a:rPr lang="en-US" sz="950" dirty="0">
                 <a:solidFill>
                   <a:srgbClr val="6B6B6B"/>
                 </a:solidFill>
@@ -7391,57 +7435,15 @@
                 <a:ea typeface="Calibri" pitchFamily="34" charset="-122"/>
                 <a:cs typeface="Calibri" pitchFamily="34" charset="-120"/>
               </a:rPr>
-              <a:t>［ スクリーンショット ］ ここに貼り付けてください</a:t>
-            </a:r>
-            <a:endParaRPr lang="en-US" sz="1100" dirty="0"/>
-          </a:p>
-        </p:txBody>
-      </p:sp>
-      <p:sp>
-        <p:nvSpPr>
-          <p:cNvPr id="16" name="Text 14"/>
-          <p:cNvSpPr txBox="1"/>
-          <p:nvPr/>
-        </p:nvSpPr>
-        <p:spPr>
-          <a:xfrm>
-            <a:off x="841248" y="5234496"/>
-            <a:ext cx="5879592" cy="731520"/>
-          </a:xfrm>
-          <a:prstGeom prst="rect">
-            <a:avLst/>
-          </a:prstGeom>
-          <a:noFill/>
-          <a:ln/>
-        </p:spPr>
-        <p:txBody>
-          <a:bodyPr wrap="square" lIns="0" tIns="0" rIns="0" bIns="0" rtlCol="0" anchor="t"/>
-          <a:lstStyle/>
-          <a:p>
-            <a:pPr algn="ctr" indent="0" marL="0">
-              <a:lnSpc>
-                <a:spcPct val="120000"/>
-              </a:lnSpc>
-              <a:buNone/>
-            </a:pPr>
-            <a:r>
-              <a:rPr lang="en-US" sz="1050" dirty="0">
-                <a:solidFill>
-                  <a:srgbClr val="222222"/>
-                </a:solidFill>
-                <a:latin typeface="Calibri" pitchFamily="34" charset="0"/>
-                <a:ea typeface="Calibri" pitchFamily="34" charset="-122"/>
-                <a:cs typeface="Calibri" pitchFamily="34" charset="-120"/>
-              </a:rPr>
-              <a:t>回答一覧の画面（送信日時と回答内容が並んでいるもの）。</a:t>
-            </a:r>
-            <a:endParaRPr lang="en-US" sz="1050" dirty="0"/>
-          </a:p>
-        </p:txBody>
-      </p:sp>
-      <p:sp>
-        <p:nvSpPr>
-          <p:cNvPr id="17" name="Text 15"/>
+              <a:t>設問ごとの集計グラフ（棒グラフとNPS・星評価の数字が見えるもの）。</a:t>
+            </a:r>
+            <a:endParaRPr lang="en-US" sz="950" dirty="0"/>
+          </a:p>
+        </p:txBody>
+      </p:sp>
+      <p:sp>
+        <p:nvSpPr>
+          <p:cNvPr id="17" name="Text 14"/>
           <p:cNvSpPr txBox="1"/>
           <p:nvPr/>
         </p:nvSpPr>
@@ -7582,7 +7584,7 @@
                 <a:ea typeface="Calibri" pitchFamily="34" charset="-122"/>
                 <a:cs typeface="Calibri" pitchFamily="34" charset="-120"/>
               </a:rPr>
-              <a:t>自社のQRコード</a:t>
+              <a:t>回答の一覧とCSV</a:t>
             </a:r>
             <a:endParaRPr lang="en-US" sz="2200" dirty="0"/>
           </a:p>
@@ -7596,7 +7598,161 @@
         </p:nvSpPr>
         <p:spPr>
           <a:xfrm>
-            <a:off x="566928" y="1481328"/>
+            <a:off x="566928" y="1591056"/>
+            <a:ext cx="6428232" cy="257810"/>
+          </a:xfrm>
+          <a:prstGeom prst="rect">
+            <a:avLst/>
+          </a:prstGeom>
+          <a:noFill/>
+          <a:ln/>
+        </p:spPr>
+        <p:txBody>
+          <a:bodyPr wrap="square" lIns="0" tIns="0" rIns="0" bIns="0" rtlCol="0" anchor="t"/>
+          <a:lstStyle/>
+          <a:p>
+            <a:pPr indent="0" marL="0">
+              <a:buNone/>
+            </a:pPr>
+            <a:r>
+              <a:rPr lang="en-US" sz="1400" b="1" dirty="0">
+                <a:solidFill>
+                  <a:srgbClr val="1C7293"/>
+                </a:solidFill>
+                <a:latin typeface="Calibri" pitchFamily="34" charset="0"/>
+                <a:ea typeface="Calibri" pitchFamily="34" charset="-122"/>
+                <a:cs typeface="Calibri" pitchFamily="34" charset="-120"/>
+              </a:rPr>
+              <a:t>一覧で見る</a:t>
+            </a:r>
+            <a:endParaRPr lang="en-US" sz="1400" dirty="0"/>
+          </a:p>
+        </p:txBody>
+      </p:sp>
+      <p:sp>
+        <p:nvSpPr>
+          <p:cNvPr id="5" name="Text 3"/>
+          <p:cNvSpPr txBox="1"/>
+          <p:nvPr/>
+        </p:nvSpPr>
+        <p:spPr>
+          <a:xfrm>
+            <a:off x="566928" y="1922018"/>
+            <a:ext cx="6428232" cy="459994"/>
+          </a:xfrm>
+          <a:prstGeom prst="rect">
+            <a:avLst/>
+          </a:prstGeom>
+          <a:noFill/>
+          <a:ln/>
+        </p:spPr>
+        <p:txBody>
+          <a:bodyPr wrap="square" lIns="0" tIns="0" rIns="0" bIns="0" rtlCol="0" anchor="t"/>
+          <a:lstStyle/>
+          <a:p>
+            <a:pPr indent="0" marL="0">
+              <a:lnSpc>
+                <a:spcPct val="125000"/>
+              </a:lnSpc>
+              <a:buNone/>
+            </a:pPr>
+            <a:r>
+              <a:rPr lang="en-US" sz="1100" dirty="0">
+                <a:solidFill>
+                  <a:srgbClr val="222222"/>
+                </a:solidFill>
+                <a:latin typeface="Calibri" pitchFamily="34" charset="0"/>
+                <a:ea typeface="Calibri" pitchFamily="34" charset="-122"/>
+                <a:cs typeface="Calibri" pitchFamily="34" charset="-120"/>
+              </a:rPr>
+              <a:t>ダッシュボードの</a:t>
+            </a:r>
+            <a:pPr indent="0" marL="0">
+              <a:lnSpc>
+                <a:spcPct val="125000"/>
+              </a:lnSpc>
+              <a:buNone/>
+            </a:pPr>
+            <a:r>
+              <a:rPr lang="en-US" sz="1100" b="1" dirty="0">
+                <a:solidFill>
+                  <a:srgbClr val="222222"/>
+                </a:solidFill>
+                <a:latin typeface="Calibri" pitchFamily="34" charset="0"/>
+                <a:ea typeface="Calibri" pitchFamily="34" charset="-122"/>
+                <a:cs typeface="Calibri" pitchFamily="34" charset="-120"/>
+              </a:rPr>
+              <a:t>「回答一覧」</a:t>
+            </a:r>
+            <a:pPr indent="0" marL="0">
+              <a:lnSpc>
+                <a:spcPct val="125000"/>
+              </a:lnSpc>
+              <a:buNone/>
+            </a:pPr>
+            <a:r>
+              <a:rPr lang="en-US" sz="1100" dirty="0">
+                <a:solidFill>
+                  <a:srgbClr val="222222"/>
+                </a:solidFill>
+                <a:latin typeface="Calibri" pitchFamily="34" charset="0"/>
+                <a:ea typeface="Calibri" pitchFamily="34" charset="-122"/>
+                <a:cs typeface="Calibri" pitchFamily="34" charset="-120"/>
+              </a:rPr>
+              <a:t>を押すと、1件ずつの回答内容を新しい順に確認できます（1ページ50件）。</a:t>
+            </a:r>
+            <a:endParaRPr lang="en-US" sz="1100" dirty="0"/>
+          </a:p>
+        </p:txBody>
+      </p:sp>
+      <p:sp>
+        <p:nvSpPr>
+          <p:cNvPr id="6" name="Text 4"/>
+          <p:cNvSpPr txBox="1"/>
+          <p:nvPr/>
+        </p:nvSpPr>
+        <p:spPr>
+          <a:xfrm>
+            <a:off x="566928" y="2528316"/>
+            <a:ext cx="6428232" cy="257810"/>
+          </a:xfrm>
+          <a:prstGeom prst="rect">
+            <a:avLst/>
+          </a:prstGeom>
+          <a:noFill/>
+          <a:ln/>
+        </p:spPr>
+        <p:txBody>
+          <a:bodyPr wrap="square" lIns="0" tIns="0" rIns="0" bIns="0" rtlCol="0" anchor="t"/>
+          <a:lstStyle/>
+          <a:p>
+            <a:pPr indent="0" marL="0">
+              <a:buNone/>
+            </a:pPr>
+            <a:r>
+              <a:rPr lang="en-US" sz="1400" b="1" dirty="0">
+                <a:solidFill>
+                  <a:srgbClr val="1C7293"/>
+                </a:solidFill>
+                <a:latin typeface="Calibri" pitchFamily="34" charset="0"/>
+                <a:ea typeface="Calibri" pitchFamily="34" charset="-122"/>
+                <a:cs typeface="Calibri" pitchFamily="34" charset="-120"/>
+              </a:rPr>
+              <a:t>CSVでダウンロードする</a:t>
+            </a:r>
+            <a:endParaRPr lang="en-US" sz="1400" dirty="0"/>
+          </a:p>
+        </p:txBody>
+      </p:sp>
+      <p:sp>
+        <p:nvSpPr>
+          <p:cNvPr id="7" name="Text 5"/>
+          <p:cNvSpPr txBox="1"/>
+          <p:nvPr/>
+        </p:nvSpPr>
+        <p:spPr>
+          <a:xfrm>
+            <a:off x="566928" y="2859278"/>
             <a:ext cx="6428232" cy="257429"/>
           </a:xfrm>
           <a:prstGeom prst="rect">
@@ -7616,6 +7772,23 @@
               <a:buNone/>
             </a:pPr>
             <a:r>
+              <a:rPr lang="en-US" sz="1100" b="1" dirty="0">
+                <a:solidFill>
+                  <a:srgbClr val="222222"/>
+                </a:solidFill>
+                <a:latin typeface="Calibri" pitchFamily="34" charset="0"/>
+                <a:ea typeface="Calibri" pitchFamily="34" charset="-122"/>
+                <a:cs typeface="Calibri" pitchFamily="34" charset="-120"/>
+              </a:rPr>
+              <a:t>「CSVダウンロード」</a:t>
+            </a:r>
+            <a:pPr indent="0" marL="0">
+              <a:lnSpc>
+                <a:spcPct val="125000"/>
+              </a:lnSpc>
+              <a:buNone/>
+            </a:pPr>
+            <a:r>
               <a:rPr lang="en-US" sz="1100" dirty="0">
                 <a:solidFill>
                   <a:srgbClr val="222222"/>
@@ -7624,41 +7797,7 @@
                 <a:ea typeface="Calibri" pitchFamily="34" charset="-122"/>
                 <a:cs typeface="Calibri" pitchFamily="34" charset="-120"/>
               </a:rPr>
-              <a:t>ダッシュボードの</a:t>
-            </a:r>
-            <a:pPr indent="0" marL="0">
-              <a:lnSpc>
-                <a:spcPct val="125000"/>
-              </a:lnSpc>
-              <a:buNone/>
-            </a:pPr>
-            <a:r>
-              <a:rPr lang="en-US" sz="1100" b="1" dirty="0">
-                <a:solidFill>
-                  <a:srgbClr val="222222"/>
-                </a:solidFill>
-                <a:latin typeface="Calibri" pitchFamily="34" charset="0"/>
-                <a:ea typeface="Calibri" pitchFamily="34" charset="-122"/>
-                <a:cs typeface="Calibri" pitchFamily="34" charset="-120"/>
-              </a:rPr>
-              <a:t>「QRコード」</a:t>
-            </a:r>
-            <a:pPr indent="0" marL="0">
-              <a:lnSpc>
-                <a:spcPct val="125000"/>
-              </a:lnSpc>
-              <a:buNone/>
-            </a:pPr>
-            <a:r>
-              <a:rPr lang="en-US" sz="1100" dirty="0">
-                <a:solidFill>
-                  <a:srgbClr val="222222"/>
-                </a:solidFill>
-                <a:latin typeface="Calibri" pitchFamily="34" charset="0"/>
-                <a:ea typeface="Calibri" pitchFamily="34" charset="-122"/>
-                <a:cs typeface="Calibri" pitchFamily="34" charset="-120"/>
-              </a:rPr>
-              <a:t>から、自社ブース用のQRコードを表示・印刷できます。</a:t>
+              <a:t>を押すと、自社ぶんの回答がCSVファイルで保存されます。</a:t>
             </a:r>
             <a:endParaRPr lang="en-US" sz="1100" dirty="0"/>
           </a:p>
@@ -7666,13 +7805,13 @@
       </p:sp>
       <p:sp>
         <p:nvSpPr>
-          <p:cNvPr id="5" name="Text 3"/>
-          <p:cNvSpPr txBox="1"/>
-          <p:nvPr/>
-        </p:nvSpPr>
-        <p:spPr>
-          <a:xfrm>
-            <a:off x="713232" y="1775333"/>
+          <p:cNvPr id="8" name="Text 6"/>
+          <p:cNvSpPr txBox="1"/>
+          <p:nvPr/>
+        </p:nvSpPr>
+        <p:spPr>
+          <a:xfrm>
+            <a:off x="713232" y="3153283"/>
             <a:ext cx="6281928" cy="257429"/>
           </a:xfrm>
           <a:prstGeom prst="rect">
@@ -7693,6 +7832,23 @@
               <a:buChar char="●"/>
             </a:pPr>
             <a:r>
+              <a:rPr lang="en-US" sz="1100" b="1" dirty="0">
+                <a:solidFill>
+                  <a:srgbClr val="222222"/>
+                </a:solidFill>
+                <a:latin typeface="Calibri" pitchFamily="34" charset="0"/>
+                <a:ea typeface="Calibri" pitchFamily="34" charset="-122"/>
+                <a:cs typeface="Calibri" pitchFamily="34" charset="-120"/>
+              </a:rPr>
+              <a:t>UTF-8（BOM付き）</a:t>
+            </a:r>
+            <a:pPr indent="0" marL="0">
+              <a:lnSpc>
+                <a:spcPct val="125000"/>
+              </a:lnSpc>
+              <a:buNone/>
+            </a:pPr>
+            <a:r>
               <a:rPr lang="en-US" sz="1100" dirty="0">
                 <a:solidFill>
                   <a:srgbClr val="222222"/>
@@ -7701,41 +7857,7 @@
                 <a:ea typeface="Calibri" pitchFamily="34" charset="-122"/>
                 <a:cs typeface="Calibri" pitchFamily="34" charset="-120"/>
               </a:rPr>
-              <a:t>ブースに掲示するQRコードは</a:t>
-            </a:r>
-            <a:pPr indent="0" marL="0">
-              <a:lnSpc>
-                <a:spcPct val="125000"/>
-              </a:lnSpc>
-              <a:buNone/>
-            </a:pPr>
-            <a:r>
-              <a:rPr lang="en-US" sz="1100" b="1" dirty="0">
-                <a:solidFill>
-                  <a:srgbClr val="222222"/>
-                </a:solidFill>
-                <a:latin typeface="Calibri" pitchFamily="34" charset="0"/>
-                <a:ea typeface="Calibri" pitchFamily="34" charset="-122"/>
-                <a:cs typeface="Calibri" pitchFamily="34" charset="-120"/>
-              </a:rPr>
-              <a:t>事務局がまとめて印刷</a:t>
-            </a:r>
-            <a:pPr indent="0" marL="0">
-              <a:lnSpc>
-                <a:spcPct val="125000"/>
-              </a:lnSpc>
-              <a:buNone/>
-            </a:pPr>
-            <a:r>
-              <a:rPr lang="en-US" sz="1100" dirty="0">
-                <a:solidFill>
-                  <a:srgbClr val="222222"/>
-                </a:solidFill>
-                <a:latin typeface="Calibri" pitchFamily="34" charset="0"/>
-                <a:ea typeface="Calibri" pitchFamily="34" charset="-122"/>
-                <a:cs typeface="Calibri" pitchFamily="34" charset="-120"/>
-              </a:rPr>
-              <a:t>します</a:t>
+              <a:t>なので、Excelでそのまま開けます</a:t>
             </a:r>
             <a:endParaRPr lang="en-US" sz="1100" dirty="0"/>
           </a:p>
@@ -7743,13 +7865,13 @@
       </p:sp>
       <p:sp>
         <p:nvSpPr>
-          <p:cNvPr id="6" name="Text 4"/>
-          <p:cNvSpPr txBox="1"/>
-          <p:nvPr/>
-        </p:nvSpPr>
-        <p:spPr>
-          <a:xfrm>
-            <a:off x="713232" y="2051050"/>
+          <p:cNvPr id="9" name="Text 7"/>
+          <p:cNvSpPr txBox="1"/>
+          <p:nvPr/>
+        </p:nvSpPr>
+        <p:spPr>
+          <a:xfrm>
+            <a:off x="713232" y="3429000"/>
             <a:ext cx="6281928" cy="257429"/>
           </a:xfrm>
           <a:prstGeom prst="rect">
@@ -7778,7 +7900,7 @@
                 <a:ea typeface="Calibri" pitchFamily="34" charset="-122"/>
                 <a:cs typeface="Calibri" pitchFamily="34" charset="-120"/>
               </a:rPr>
-              <a:t>追加で必要になった場合や、予備が欲しい場合にお使いください</a:t>
+              <a:t>1行が1件の回答、設問が列になります</a:t>
             </a:r>
             <a:endParaRPr lang="en-US" sz="1100" dirty="0"/>
           </a:p>
@@ -7786,13 +7908,13 @@
       </p:sp>
       <p:sp>
         <p:nvSpPr>
-          <p:cNvPr id="7" name="Text 5"/>
-          <p:cNvSpPr txBox="1"/>
-          <p:nvPr/>
-        </p:nvSpPr>
-        <p:spPr>
-          <a:xfrm>
-            <a:off x="713232" y="2326767"/>
+          <p:cNvPr id="10" name="Text 8"/>
+          <p:cNvSpPr txBox="1"/>
+          <p:nvPr/>
+        </p:nvSpPr>
+        <p:spPr>
+          <a:xfrm>
+            <a:off x="713232" y="3704717"/>
             <a:ext cx="6281928" cy="257429"/>
           </a:xfrm>
           <a:prstGeom prst="rect">
@@ -7813,6 +7935,23 @@
               <a:buChar char="●"/>
             </a:pPr>
             <a:r>
+              <a:rPr lang="en-US" sz="1100" b="1" dirty="0">
+                <a:solidFill>
+                  <a:srgbClr val="222222"/>
+                </a:solidFill>
+                <a:latin typeface="Calibri" pitchFamily="34" charset="0"/>
+                <a:ea typeface="Calibri" pitchFamily="34" charset="-122"/>
+                <a:cs typeface="Calibri" pitchFamily="34" charset="-120"/>
+              </a:rPr>
+              <a:t>来場者のメールアドレスは含まれません</a:t>
+            </a:r>
+            <a:pPr indent="0" marL="0">
+              <a:lnSpc>
+                <a:spcPct val="125000"/>
+              </a:lnSpc>
+              <a:buNone/>
+            </a:pPr>
+            <a:r>
               <a:rPr lang="en-US" sz="1100" dirty="0">
                 <a:solidFill>
                   <a:srgbClr val="222222"/>
@@ -7821,7 +7960,7 @@
                 <a:ea typeface="Calibri" pitchFamily="34" charset="-122"/>
                 <a:cs typeface="Calibri" pitchFamily="34" charset="-120"/>
               </a:rPr>
-              <a:t>印刷ダイアログで「PDFとして保存」を選べばPDFになります</a:t>
+              <a:t>（匿名のIDのみ）</a:t>
             </a:r>
             <a:endParaRPr lang="en-US" sz="1100" dirty="0"/>
           </a:p>
@@ -7829,13 +7968,13 @@
       </p:sp>
       <p:sp>
         <p:nvSpPr>
-          <p:cNvPr id="8" name="Shape 6"/>
+          <p:cNvPr id="11" name="Shape 9"/>
           <p:cNvSpPr/>
           <p:nvPr/>
         </p:nvSpPr>
         <p:spPr>
           <a:xfrm>
-            <a:off x="566928" y="2602484"/>
+            <a:off x="566928" y="3980434"/>
             <a:ext cx="6428232" cy="431102"/>
           </a:xfrm>
           <a:prstGeom prst="roundRect">
@@ -7844,11 +7983,11 @@
             </a:avLst>
           </a:prstGeom>
           <a:solidFill>
-            <a:srgbClr val="FDF0E6"/>
+            <a:srgbClr val="E3F0F4"/>
           </a:solidFill>
           <a:ln w="9525">
             <a:solidFill>
-              <a:srgbClr val="E08A3C"/>
+              <a:srgbClr val="1C7293"/>
             </a:solidFill>
             <a:prstDash val="solid"/>
           </a:ln>
@@ -7856,13 +7995,13 @@
       </p:sp>
       <p:sp>
         <p:nvSpPr>
-          <p:cNvPr id="9" name="Text 7"/>
-          <p:cNvSpPr txBox="1"/>
-          <p:nvPr/>
-        </p:nvSpPr>
-        <p:spPr>
-          <a:xfrm>
-            <a:off x="658368" y="2693924"/>
+          <p:cNvPr id="12" name="Text 10"/>
+          <p:cNvSpPr txBox="1"/>
+          <p:nvPr/>
+        </p:nvSpPr>
+        <p:spPr>
+          <a:xfrm>
+            <a:off x="658368" y="4071874"/>
             <a:ext cx="237744" cy="237744"/>
           </a:xfrm>
           <a:prstGeom prst="rect">
@@ -7881,13 +8020,13 @@
             <a:r>
               <a:rPr lang="en-US" sz="1200" b="1" dirty="0">
                 <a:solidFill>
-                  <a:srgbClr val="C25A17"/>
-                </a:solidFill>
-                <a:latin typeface="Calibri" pitchFamily="34" charset="0"/>
-                <a:ea typeface="Calibri" pitchFamily="34" charset="-122"/>
-                <a:cs typeface="Calibri" pitchFamily="34" charset="-120"/>
-              </a:rPr>
-              <a:t>！</a:t>
+                  <a:srgbClr val="1C7293"/>
+                </a:solidFill>
+                <a:latin typeface="Calibri" pitchFamily="34" charset="0"/>
+                <a:ea typeface="Calibri" pitchFamily="34" charset="-122"/>
+                <a:cs typeface="Calibri" pitchFamily="34" charset="-120"/>
+              </a:rPr>
+              <a:t>i</a:t>
             </a:r>
             <a:endParaRPr lang="en-US" sz="1200" dirty="0"/>
           </a:p>
@@ -7895,13 +8034,13 @@
       </p:sp>
       <p:sp>
         <p:nvSpPr>
-          <p:cNvPr id="10" name="Text 8"/>
-          <p:cNvSpPr txBox="1"/>
-          <p:nvPr/>
-        </p:nvSpPr>
-        <p:spPr>
-          <a:xfrm>
-            <a:off x="950976" y="2712212"/>
+          <p:cNvPr id="13" name="Text 11"/>
+          <p:cNvSpPr txBox="1"/>
+          <p:nvPr/>
+        </p:nvSpPr>
+        <p:spPr>
+          <a:xfrm>
+            <a:off x="950976" y="4090162"/>
             <a:ext cx="5925312" cy="248221"/>
           </a:xfrm>
           <a:prstGeom prst="rect">
@@ -7929,83 +8068,46 @@
                 <a:ea typeface="Calibri" pitchFamily="34" charset="-122"/>
                 <a:cs typeface="Calibri" pitchFamily="34" charset="-120"/>
               </a:rPr>
-              <a:t>QRコードのURLは企業ごとに違います。</a:t>
-            </a:r>
-            <a:pPr indent="0" marL="0">
-              <a:lnSpc>
-                <a:spcPct val="120000"/>
-              </a:lnSpc>
-              <a:buNone/>
-            </a:pPr>
-            <a:r>
-              <a:rPr lang="en-US" sz="1050" b="1" dirty="0">
-                <a:solidFill>
-                  <a:srgbClr val="222222"/>
-                </a:solidFill>
-                <a:latin typeface="Calibri" pitchFamily="34" charset="0"/>
-                <a:ea typeface="Calibri" pitchFamily="34" charset="-122"/>
-                <a:cs typeface="Calibri" pitchFamily="34" charset="-120"/>
-              </a:rPr>
-              <a:t>他社のQRコードを掲示しないよう</a:t>
-            </a:r>
-            <a:pPr indent="0" marL="0">
-              <a:lnSpc>
-                <a:spcPct val="120000"/>
-              </a:lnSpc>
-              <a:buNone/>
-            </a:pPr>
-            <a:r>
-              <a:rPr lang="en-US" sz="1050" dirty="0">
-                <a:solidFill>
-                  <a:srgbClr val="222222"/>
-                </a:solidFill>
-                <a:latin typeface="Calibri" pitchFamily="34" charset="0"/>
-                <a:ea typeface="Calibri" pitchFamily="34" charset="-122"/>
-                <a:cs typeface="Calibri" pitchFamily="34" charset="-120"/>
-              </a:rPr>
-              <a:t>ご注意ください。</a:t>
+              <a:t>「重複を含めて表示」を選ぶと、送り直された回答も含めて確認・出力できます。</a:t>
             </a:r>
             <a:endParaRPr lang="en-US" sz="1050" dirty="0"/>
           </a:p>
         </p:txBody>
       </p:sp>
-      <p:sp>
-        <p:nvSpPr>
-          <p:cNvPr id="11" name="Shape 9"/>
-          <p:cNvSpPr/>
-          <p:nvPr/>
-        </p:nvSpPr>
-        <p:spPr>
-          <a:xfrm>
-            <a:off x="566928" y="3106738"/>
-            <a:ext cx="6428232" cy="2606040"/>
-          </a:xfrm>
-          <a:prstGeom prst="roundRect">
-            <a:avLst>
-              <a:gd name="adj" fmla="val 1754"/>
-            </a:avLst>
-          </a:prstGeom>
-          <a:solidFill>
-            <a:srgbClr val="F7F7F7"/>
-          </a:solidFill>
-          <a:ln w="12700">
-            <a:solidFill>
-              <a:srgbClr val="D8D8D8"/>
-            </a:solidFill>
-            <a:prstDash val="dash"/>
-          </a:ln>
-        </p:spPr>
-      </p:sp>
-      <p:sp>
-        <p:nvSpPr>
-          <p:cNvPr id="12" name="Text 10"/>
-          <p:cNvSpPr txBox="1"/>
-          <p:nvPr/>
-        </p:nvSpPr>
-        <p:spPr>
-          <a:xfrm>
-            <a:off x="749808" y="3490786"/>
-            <a:ext cx="6062472" cy="274320"/>
+      <p:pic>
+        <p:nvPicPr>
+          <p:cNvPr id="14" name="Image 0" descr="C:\Users\sato\Desktop\enque\docs\images\c-responses.png">    </p:cNvPr>
+          <p:cNvPicPr>
+            <a:picLocks noChangeAspect="1"/>
+          </p:cNvPicPr>
+          <p:nvPr/>
+        </p:nvPicPr>
+        <p:blipFill>
+          <a:blip r:embed="rId1"/>
+          <a:stretch>
+            <a:fillRect/>
+          </a:stretch>
+        </p:blipFill>
+        <p:spPr>
+          <a:xfrm>
+            <a:off x="1828991" y="4484688"/>
+            <a:ext cx="3904106" cy="3474720"/>
+          </a:xfrm>
+          <a:prstGeom prst="rect">
+            <a:avLst/>
+          </a:prstGeom>
+        </p:spPr>
+      </p:pic>
+      <p:sp>
+        <p:nvSpPr>
+          <p:cNvPr id="15" name="Text 12"/>
+          <p:cNvSpPr txBox="1"/>
+          <p:nvPr/>
+        </p:nvSpPr>
+        <p:spPr>
+          <a:xfrm>
+            <a:off x="566928" y="8014272"/>
+            <a:ext cx="6428232" cy="274320"/>
           </a:xfrm>
           <a:prstGeom prst="rect">
             <a:avLst/>
@@ -8021,7 +8123,7 @@
               <a:buNone/>
             </a:pPr>
             <a:r>
-              <a:rPr lang="en-US" sz="1100" b="1" dirty="0">
+              <a:rPr lang="en-US" sz="950" dirty="0">
                 <a:solidFill>
                   <a:srgbClr val="6B6B6B"/>
                 </a:solidFill>
@@ -8029,57 +8131,15 @@
                 <a:ea typeface="Calibri" pitchFamily="34" charset="-122"/>
                 <a:cs typeface="Calibri" pitchFamily="34" charset="-120"/>
               </a:rPr>
-              <a:t>［ スクリーンショット ］ ここに貼り付けてください</a:t>
-            </a:r>
-            <a:endParaRPr lang="en-US" sz="1100" dirty="0"/>
-          </a:p>
-        </p:txBody>
-      </p:sp>
-      <p:sp>
-        <p:nvSpPr>
-          <p:cNvPr id="13" name="Text 11"/>
-          <p:cNvSpPr txBox="1"/>
-          <p:nvPr/>
-        </p:nvSpPr>
-        <p:spPr>
-          <a:xfrm>
-            <a:off x="841248" y="3856546"/>
-            <a:ext cx="5879592" cy="731520"/>
-          </a:xfrm>
-          <a:prstGeom prst="rect">
-            <a:avLst/>
-          </a:prstGeom>
-          <a:noFill/>
-          <a:ln/>
-        </p:spPr>
-        <p:txBody>
-          <a:bodyPr wrap="square" lIns="0" tIns="0" rIns="0" bIns="0" rtlCol="0" anchor="t"/>
-          <a:lstStyle/>
-          <a:p>
-            <a:pPr algn="ctr" indent="0" marL="0">
-              <a:lnSpc>
-                <a:spcPct val="120000"/>
-              </a:lnSpc>
-              <a:buNone/>
-            </a:pPr>
-            <a:r>
-              <a:rPr lang="en-US" sz="1050" dirty="0">
-                <a:solidFill>
-                  <a:srgbClr val="222222"/>
-                </a:solidFill>
-                <a:latin typeface="Calibri" pitchFamily="34" charset="0"/>
-                <a:ea typeface="Calibri" pitchFamily="34" charset="-122"/>
-                <a:cs typeface="Calibri" pitchFamily="34" charset="-120"/>
-              </a:rPr>
-              <a:t>QRコードの印刷ページ（自社1社分）。</a:t>
-            </a:r>
-            <a:endParaRPr lang="en-US" sz="1050" dirty="0"/>
-          </a:p>
-        </p:txBody>
-      </p:sp>
-      <p:sp>
-        <p:nvSpPr>
-          <p:cNvPr id="14" name="Text 12"/>
+              <a:t>回答一覧の画面（送信日時と回答内容が並んでいるもの）。</a:t>
+            </a:r>
+            <a:endParaRPr lang="en-US" sz="950" dirty="0"/>
+          </a:p>
+        </p:txBody>
+      </p:sp>
+      <p:sp>
+        <p:nvSpPr>
+          <p:cNvPr id="16" name="Text 13"/>
           <p:cNvSpPr txBox="1"/>
           <p:nvPr/>
         </p:nvSpPr>
@@ -8220,7 +8280,7 @@
                 <a:ea typeface="Calibri" pitchFamily="34" charset="-122"/>
                 <a:cs typeface="Calibri" pitchFamily="34" charset="-120"/>
               </a:rPr>
-              <a:t>よくある質問</a:t>
+              <a:t>自社のQRコード</a:t>
             </a:r>
             <a:endParaRPr lang="en-US" sz="2200" dirty="0"/>
           </a:p>
@@ -8234,8 +8294,8 @@
         </p:nvSpPr>
         <p:spPr>
           <a:xfrm>
-            <a:off x="566928" y="1591056"/>
-            <a:ext cx="6428232" cy="257810"/>
+            <a:off x="566928" y="1481328"/>
+            <a:ext cx="6428232" cy="257429"/>
           </a:xfrm>
           <a:prstGeom prst="rect">
             <a:avLst/>
@@ -8248,20 +8308,57 @@
           <a:lstStyle/>
           <a:p>
             <a:pPr indent="0" marL="0">
-              <a:buNone/>
-            </a:pPr>
-            <a:r>
-              <a:rPr lang="en-US" sz="1400" b="1" dirty="0">
-                <a:solidFill>
-                  <a:srgbClr val="1C7293"/>
-                </a:solidFill>
-                <a:latin typeface="Calibri" pitchFamily="34" charset="0"/>
-                <a:ea typeface="Calibri" pitchFamily="34" charset="-122"/>
-                <a:cs typeface="Calibri" pitchFamily="34" charset="-120"/>
-              </a:rPr>
-              <a:t>他社の回答は見られますか</a:t>
-            </a:r>
-            <a:endParaRPr lang="en-US" sz="1400" dirty="0"/>
+              <a:lnSpc>
+                <a:spcPct val="125000"/>
+              </a:lnSpc>
+              <a:buNone/>
+            </a:pPr>
+            <a:r>
+              <a:rPr lang="en-US" sz="1100" dirty="0">
+                <a:solidFill>
+                  <a:srgbClr val="222222"/>
+                </a:solidFill>
+                <a:latin typeface="Calibri" pitchFamily="34" charset="0"/>
+                <a:ea typeface="Calibri" pitchFamily="34" charset="-122"/>
+                <a:cs typeface="Calibri" pitchFamily="34" charset="-120"/>
+              </a:rPr>
+              <a:t>ダッシュボードの</a:t>
+            </a:r>
+            <a:pPr indent="0" marL="0">
+              <a:lnSpc>
+                <a:spcPct val="125000"/>
+              </a:lnSpc>
+              <a:buNone/>
+            </a:pPr>
+            <a:r>
+              <a:rPr lang="en-US" sz="1100" b="1" dirty="0">
+                <a:solidFill>
+                  <a:srgbClr val="222222"/>
+                </a:solidFill>
+                <a:latin typeface="Calibri" pitchFamily="34" charset="0"/>
+                <a:ea typeface="Calibri" pitchFamily="34" charset="-122"/>
+                <a:cs typeface="Calibri" pitchFamily="34" charset="-120"/>
+              </a:rPr>
+              <a:t>「QRコード」</a:t>
+            </a:r>
+            <a:pPr indent="0" marL="0">
+              <a:lnSpc>
+                <a:spcPct val="125000"/>
+              </a:lnSpc>
+              <a:buNone/>
+            </a:pPr>
+            <a:r>
+              <a:rPr lang="en-US" sz="1100" dirty="0">
+                <a:solidFill>
+                  <a:srgbClr val="222222"/>
+                </a:solidFill>
+                <a:latin typeface="Calibri" pitchFamily="34" charset="0"/>
+                <a:ea typeface="Calibri" pitchFamily="34" charset="-122"/>
+                <a:cs typeface="Calibri" pitchFamily="34" charset="-120"/>
+              </a:rPr>
+              <a:t>から、自社ブース用のQRコードを表示・印刷できます。</a:t>
+            </a:r>
+            <a:endParaRPr lang="en-US" sz="1100" dirty="0"/>
           </a:p>
         </p:txBody>
       </p:sp>
@@ -8273,8 +8370,8 @@
         </p:nvSpPr>
         <p:spPr>
           <a:xfrm>
-            <a:off x="566928" y="1922018"/>
-            <a:ext cx="6428232" cy="257429"/>
+            <a:off x="713232" y="1775333"/>
+            <a:ext cx="6281928" cy="257429"/>
           </a:xfrm>
           <a:prstGeom prst="rect">
             <a:avLst/>
@@ -8286,11 +8383,12 @@
           <a:bodyPr wrap="square" lIns="0" tIns="0" rIns="0" bIns="0" rtlCol="0" anchor="t"/>
           <a:lstStyle/>
           <a:p>
-            <a:pPr indent="0" marL="0">
-              <a:lnSpc>
-                <a:spcPct val="125000"/>
-              </a:lnSpc>
-              <a:buNone/>
+            <a:pPr marL="342900" indent="-342900">
+              <a:lnSpc>
+                <a:spcPct val="125000"/>
+              </a:lnSpc>
+              <a:buSzPct val="100000"/>
+              <a:buChar char="●"/>
             </a:pPr>
             <a:r>
               <a:rPr lang="en-US" sz="1100" dirty="0">
@@ -8301,7 +8399,41 @@
                 <a:ea typeface="Calibri" pitchFamily="34" charset="-122"/>
                 <a:cs typeface="Calibri" pitchFamily="34" charset="-120"/>
               </a:rPr>
-              <a:t>見られません。他社のIDでURLを直接開いても「ページが見つかりません」と表示されます。</a:t>
+              <a:t>ブースに掲示するQRコードは</a:t>
+            </a:r>
+            <a:pPr indent="0" marL="0">
+              <a:lnSpc>
+                <a:spcPct val="125000"/>
+              </a:lnSpc>
+              <a:buNone/>
+            </a:pPr>
+            <a:r>
+              <a:rPr lang="en-US" sz="1100" b="1" dirty="0">
+                <a:solidFill>
+                  <a:srgbClr val="222222"/>
+                </a:solidFill>
+                <a:latin typeface="Calibri" pitchFamily="34" charset="0"/>
+                <a:ea typeface="Calibri" pitchFamily="34" charset="-122"/>
+                <a:cs typeface="Calibri" pitchFamily="34" charset="-120"/>
+              </a:rPr>
+              <a:t>事務局がまとめて印刷</a:t>
+            </a:r>
+            <a:pPr indent="0" marL="0">
+              <a:lnSpc>
+                <a:spcPct val="125000"/>
+              </a:lnSpc>
+              <a:buNone/>
+            </a:pPr>
+            <a:r>
+              <a:rPr lang="en-US" sz="1100" dirty="0">
+                <a:solidFill>
+                  <a:srgbClr val="222222"/>
+                </a:solidFill>
+                <a:latin typeface="Calibri" pitchFamily="34" charset="0"/>
+                <a:ea typeface="Calibri" pitchFamily="34" charset="-122"/>
+                <a:cs typeface="Calibri" pitchFamily="34" charset="-120"/>
+              </a:rPr>
+              <a:t>します</a:t>
             </a:r>
             <a:endParaRPr lang="en-US" sz="1100" dirty="0"/>
           </a:p>
@@ -8315,8 +8447,8 @@
         </p:nvSpPr>
         <p:spPr>
           <a:xfrm>
-            <a:off x="566928" y="2325751"/>
-            <a:ext cx="6428232" cy="257810"/>
+            <a:off x="713232" y="2051050"/>
+            <a:ext cx="6281928" cy="257429"/>
           </a:xfrm>
           <a:prstGeom prst="rect">
             <a:avLst/>
@@ -8328,21 +8460,25 @@
           <a:bodyPr wrap="square" lIns="0" tIns="0" rIns="0" bIns="0" rtlCol="0" anchor="t"/>
           <a:lstStyle/>
           <a:p>
-            <a:pPr indent="0" marL="0">
-              <a:buNone/>
-            </a:pPr>
-            <a:r>
-              <a:rPr lang="en-US" sz="1400" b="1" dirty="0">
-                <a:solidFill>
-                  <a:srgbClr val="1C7293"/>
-                </a:solidFill>
-                <a:latin typeface="Calibri" pitchFamily="34" charset="0"/>
-                <a:ea typeface="Calibri" pitchFamily="34" charset="-122"/>
-                <a:cs typeface="Calibri" pitchFamily="34" charset="-120"/>
-              </a:rPr>
-              <a:t>来場者の名前やメールアドレスは分かりますか</a:t>
-            </a:r>
-            <a:endParaRPr lang="en-US" sz="1400" dirty="0"/>
+            <a:pPr marL="342900" indent="-342900">
+              <a:lnSpc>
+                <a:spcPct val="125000"/>
+              </a:lnSpc>
+              <a:buSzPct val="100000"/>
+              <a:buChar char="●"/>
+            </a:pPr>
+            <a:r>
+              <a:rPr lang="en-US" sz="1100" dirty="0">
+                <a:solidFill>
+                  <a:srgbClr val="222222"/>
+                </a:solidFill>
+                <a:latin typeface="Calibri" pitchFamily="34" charset="0"/>
+                <a:ea typeface="Calibri" pitchFamily="34" charset="-122"/>
+                <a:cs typeface="Calibri" pitchFamily="34" charset="-120"/>
+              </a:rPr>
+              <a:t>追加で必要になった場合や、予備が欲しい場合にお使いください</a:t>
+            </a:r>
+            <a:endParaRPr lang="en-US" sz="1100" dirty="0"/>
           </a:p>
         </p:txBody>
       </p:sp>
@@ -8354,8 +8490,8 @@
         </p:nvSpPr>
         <p:spPr>
           <a:xfrm>
-            <a:off x="566928" y="2656713"/>
-            <a:ext cx="6428232" cy="459994"/>
+            <a:off x="713232" y="2326767"/>
+            <a:ext cx="6281928" cy="257429"/>
           </a:xfrm>
           <a:prstGeom prst="rect">
             <a:avLst/>
@@ -8367,11 +8503,12 @@
           <a:bodyPr wrap="square" lIns="0" tIns="0" rIns="0" bIns="0" rtlCol="0" anchor="t"/>
           <a:lstStyle/>
           <a:p>
-            <a:pPr indent="0" marL="0">
-              <a:lnSpc>
-                <a:spcPct val="125000"/>
-              </a:lnSpc>
-              <a:buNone/>
+            <a:pPr marL="342900" indent="-342900">
+              <a:lnSpc>
+                <a:spcPct val="125000"/>
+              </a:lnSpc>
+              <a:buSzPct val="100000"/>
+              <a:buChar char="●"/>
             </a:pPr>
             <a:r>
               <a:rPr lang="en-US" sz="1100" dirty="0">
@@ -8382,7 +8519,7 @@
                 <a:ea typeface="Calibri" pitchFamily="34" charset="-122"/>
                 <a:cs typeface="Calibri" pitchFamily="34" charset="-120"/>
               </a:rPr>
-              <a:t>分かりません。このシステムでは氏名・住所を一切集めていません。メールアドレスは、イベント終了後の全体アンケートの案内にのみ使われ、事務局側で管理されます（企業には共有されません）。</a:t>
+              <a:t>印刷ダイアログで「PDFとして保存」を選べばPDFになります</a:t>
             </a:r>
             <a:endParaRPr lang="en-US" sz="1100" dirty="0"/>
           </a:p>
@@ -8390,324 +8527,13 @@
       </p:sp>
       <p:sp>
         <p:nvSpPr>
-          <p:cNvPr id="8" name="Text 6"/>
-          <p:cNvSpPr txBox="1"/>
-          <p:nvPr/>
-        </p:nvSpPr>
-        <p:spPr>
-          <a:xfrm>
-            <a:off x="566928" y="3263011"/>
-            <a:ext cx="6428232" cy="257810"/>
-          </a:xfrm>
-          <a:prstGeom prst="rect">
-            <a:avLst/>
-          </a:prstGeom>
-          <a:noFill/>
-          <a:ln/>
-        </p:spPr>
-        <p:txBody>
-          <a:bodyPr wrap="square" lIns="0" tIns="0" rIns="0" bIns="0" rtlCol="0" anchor="t"/>
-          <a:lstStyle/>
-          <a:p>
-            <a:pPr indent="0" marL="0">
-              <a:buNone/>
-            </a:pPr>
-            <a:r>
-              <a:rPr lang="en-US" sz="1400" b="1" dirty="0">
-                <a:solidFill>
-                  <a:srgbClr val="1C7293"/>
-                </a:solidFill>
-                <a:latin typeface="Calibri" pitchFamily="34" charset="0"/>
-                <a:ea typeface="Calibri" pitchFamily="34" charset="-122"/>
-                <a:cs typeface="Calibri" pitchFamily="34" charset="-120"/>
-              </a:rPr>
-              <a:t>同じ人が何社まわったか分かりますか</a:t>
-            </a:r>
-            <a:endParaRPr lang="en-US" sz="1400" dirty="0"/>
-          </a:p>
-        </p:txBody>
-      </p:sp>
-      <p:sp>
-        <p:nvSpPr>
-          <p:cNvPr id="9" name="Text 7"/>
-          <p:cNvSpPr txBox="1"/>
-          <p:nvPr/>
-        </p:nvSpPr>
-        <p:spPr>
-          <a:xfrm>
-            <a:off x="566928" y="3593973"/>
-            <a:ext cx="6428232" cy="257429"/>
-          </a:xfrm>
-          <a:prstGeom prst="rect">
-            <a:avLst/>
-          </a:prstGeom>
-          <a:noFill/>
-          <a:ln/>
-        </p:spPr>
-        <p:txBody>
-          <a:bodyPr wrap="square" lIns="0" tIns="0" rIns="0" bIns="0" rtlCol="0" anchor="t"/>
-          <a:lstStyle/>
-          <a:p>
-            <a:pPr indent="0" marL="0">
-              <a:lnSpc>
-                <a:spcPct val="125000"/>
-              </a:lnSpc>
-              <a:buNone/>
-            </a:pPr>
-            <a:r>
-              <a:rPr lang="en-US" sz="1100" dirty="0">
-                <a:solidFill>
-                  <a:srgbClr val="222222"/>
-                </a:solidFill>
-                <a:latin typeface="Calibri" pitchFamily="34" charset="0"/>
-                <a:ea typeface="Calibri" pitchFamily="34" charset="-122"/>
-                <a:cs typeface="Calibri" pitchFamily="34" charset="-120"/>
-              </a:rPr>
-              <a:t>自社の画面では分かりません。イベント全体の傾向は主催者が確認します。</a:t>
-            </a:r>
-            <a:endParaRPr lang="en-US" sz="1100" dirty="0"/>
-          </a:p>
-        </p:txBody>
-      </p:sp>
-      <p:sp>
-        <p:nvSpPr>
-          <p:cNvPr id="10" name="Text 8"/>
-          <p:cNvSpPr txBox="1"/>
-          <p:nvPr/>
-        </p:nvSpPr>
-        <p:spPr>
-          <a:xfrm>
-            <a:off x="566928" y="3997706"/>
-            <a:ext cx="6428232" cy="257810"/>
-          </a:xfrm>
-          <a:prstGeom prst="rect">
-            <a:avLst/>
-          </a:prstGeom>
-          <a:noFill/>
-          <a:ln/>
-        </p:spPr>
-        <p:txBody>
-          <a:bodyPr wrap="square" lIns="0" tIns="0" rIns="0" bIns="0" rtlCol="0" anchor="t"/>
-          <a:lstStyle/>
-          <a:p>
-            <a:pPr indent="0" marL="0">
-              <a:buNone/>
-            </a:pPr>
-            <a:r>
-              <a:rPr lang="en-US" sz="1400" b="1" dirty="0">
-                <a:solidFill>
-                  <a:srgbClr val="1C7293"/>
-                </a:solidFill>
-                <a:latin typeface="Calibri" pitchFamily="34" charset="0"/>
-                <a:ea typeface="Calibri" pitchFamily="34" charset="-122"/>
-                <a:cs typeface="Calibri" pitchFamily="34" charset="-120"/>
-              </a:rPr>
-              <a:t>回答が0件のままです</a:t>
-            </a:r>
-            <a:endParaRPr lang="en-US" sz="1400" dirty="0"/>
-          </a:p>
-        </p:txBody>
-      </p:sp>
-      <p:sp>
-        <p:nvSpPr>
-          <p:cNvPr id="11" name="Text 9"/>
-          <p:cNvSpPr txBox="1"/>
-          <p:nvPr/>
-        </p:nvSpPr>
-        <p:spPr>
-          <a:xfrm>
-            <a:off x="566928" y="4328668"/>
-            <a:ext cx="6428232" cy="459994"/>
-          </a:xfrm>
-          <a:prstGeom prst="rect">
-            <a:avLst/>
-          </a:prstGeom>
-          <a:noFill/>
-          <a:ln/>
-        </p:spPr>
-        <p:txBody>
-          <a:bodyPr wrap="square" lIns="0" tIns="0" rIns="0" bIns="0" rtlCol="0" anchor="t"/>
-          <a:lstStyle/>
-          <a:p>
-            <a:pPr indent="0" marL="0">
-              <a:lnSpc>
-                <a:spcPct val="125000"/>
-              </a:lnSpc>
-              <a:buNone/>
-            </a:pPr>
-            <a:r>
-              <a:rPr lang="en-US" sz="1100" dirty="0">
-                <a:solidFill>
-                  <a:srgbClr val="222222"/>
-                </a:solidFill>
-                <a:latin typeface="Calibri" pitchFamily="34" charset="0"/>
-                <a:ea typeface="Calibri" pitchFamily="34" charset="-122"/>
-                <a:cs typeface="Calibri" pitchFamily="34" charset="-120"/>
-              </a:rPr>
-              <a:t>アンケートが</a:t>
-            </a:r>
-            <a:pPr indent="0" marL="0">
-              <a:lnSpc>
-                <a:spcPct val="125000"/>
-              </a:lnSpc>
-              <a:buNone/>
-            </a:pPr>
-            <a:r>
-              <a:rPr lang="en-US" sz="1100" b="1" dirty="0">
-                <a:solidFill>
-                  <a:srgbClr val="222222"/>
-                </a:solidFill>
-                <a:latin typeface="Calibri" pitchFamily="34" charset="0"/>
-                <a:ea typeface="Calibri" pitchFamily="34" charset="-122"/>
-                <a:cs typeface="Calibri" pitchFamily="34" charset="-120"/>
-              </a:rPr>
-              <a:t>公開</a:t>
-            </a:r>
-            <a:pPr indent="0" marL="0">
-              <a:lnSpc>
-                <a:spcPct val="125000"/>
-              </a:lnSpc>
-              <a:buNone/>
-            </a:pPr>
-            <a:r>
-              <a:rPr lang="en-US" sz="1100" dirty="0">
-                <a:solidFill>
-                  <a:srgbClr val="222222"/>
-                </a:solidFill>
-                <a:latin typeface="Calibri" pitchFamily="34" charset="0"/>
-                <a:ea typeface="Calibri" pitchFamily="34" charset="-122"/>
-                <a:cs typeface="Calibri" pitchFamily="34" charset="-120"/>
-              </a:rPr>
-              <a:t>になっているか、イベントが</a:t>
-            </a:r>
-            <a:pPr indent="0" marL="0">
-              <a:lnSpc>
-                <a:spcPct val="125000"/>
-              </a:lnSpc>
-              <a:buNone/>
-            </a:pPr>
-            <a:r>
-              <a:rPr lang="en-US" sz="1100" b="1" dirty="0">
-                <a:solidFill>
-                  <a:srgbClr val="222222"/>
-                </a:solidFill>
-                <a:latin typeface="Calibri" pitchFamily="34" charset="0"/>
-                <a:ea typeface="Calibri" pitchFamily="34" charset="-122"/>
-                <a:cs typeface="Calibri" pitchFamily="34" charset="-120"/>
-              </a:rPr>
-              <a:t>開催中</a:t>
-            </a:r>
-            <a:pPr indent="0" marL="0">
-              <a:lnSpc>
-                <a:spcPct val="125000"/>
-              </a:lnSpc>
-              <a:buNone/>
-            </a:pPr>
-            <a:r>
-              <a:rPr lang="en-US" sz="1100" dirty="0">
-                <a:solidFill>
-                  <a:srgbClr val="222222"/>
-                </a:solidFill>
-                <a:latin typeface="Calibri" pitchFamily="34" charset="0"/>
-                <a:ea typeface="Calibri" pitchFamily="34" charset="-122"/>
-                <a:cs typeface="Calibri" pitchFamily="34" charset="-120"/>
-              </a:rPr>
-              <a:t>になっているかをご確認ください。どちらも問題なければ事務局にご相談ください。</a:t>
-            </a:r>
-            <a:endParaRPr lang="en-US" sz="1100" dirty="0"/>
-          </a:p>
-        </p:txBody>
-      </p:sp>
-      <p:sp>
-        <p:nvSpPr>
-          <p:cNvPr id="12" name="Text 10"/>
-          <p:cNvSpPr txBox="1"/>
-          <p:nvPr/>
-        </p:nvSpPr>
-        <p:spPr>
-          <a:xfrm>
-            <a:off x="566928" y="4934966"/>
-            <a:ext cx="6428232" cy="257810"/>
-          </a:xfrm>
-          <a:prstGeom prst="rect">
-            <a:avLst/>
-          </a:prstGeom>
-          <a:noFill/>
-          <a:ln/>
-        </p:spPr>
-        <p:txBody>
-          <a:bodyPr wrap="square" lIns="0" tIns="0" rIns="0" bIns="0" rtlCol="0" anchor="t"/>
-          <a:lstStyle/>
-          <a:p>
-            <a:pPr indent="0" marL="0">
-              <a:buNone/>
-            </a:pPr>
-            <a:r>
-              <a:rPr lang="en-US" sz="1400" b="1" dirty="0">
-                <a:solidFill>
-                  <a:srgbClr val="1C7293"/>
-                </a:solidFill>
-                <a:latin typeface="Calibri" pitchFamily="34" charset="0"/>
-                <a:ea typeface="Calibri" pitchFamily="34" charset="-122"/>
-                <a:cs typeface="Calibri" pitchFamily="34" charset="-120"/>
-              </a:rPr>
-              <a:t>アンケートの内容を印刷して確認したい</a:t>
-            </a:r>
-            <a:endParaRPr lang="en-US" sz="1400" dirty="0"/>
-          </a:p>
-        </p:txBody>
-      </p:sp>
-      <p:sp>
-        <p:nvSpPr>
-          <p:cNvPr id="13" name="Text 11"/>
-          <p:cNvSpPr txBox="1"/>
-          <p:nvPr/>
-        </p:nvSpPr>
-        <p:spPr>
-          <a:xfrm>
-            <a:off x="566928" y="5265928"/>
-            <a:ext cx="6428232" cy="257429"/>
-          </a:xfrm>
-          <a:prstGeom prst="rect">
-            <a:avLst/>
-          </a:prstGeom>
-          <a:noFill/>
-          <a:ln/>
-        </p:spPr>
-        <p:txBody>
-          <a:bodyPr wrap="square" lIns="0" tIns="0" rIns="0" bIns="0" rtlCol="0" anchor="t"/>
-          <a:lstStyle/>
-          <a:p>
-            <a:pPr indent="0" marL="0">
-              <a:lnSpc>
-                <a:spcPct val="125000"/>
-              </a:lnSpc>
-              <a:buNone/>
-            </a:pPr>
-            <a:r>
-              <a:rPr lang="en-US" sz="1100" dirty="0">
-                <a:solidFill>
-                  <a:srgbClr val="222222"/>
-                </a:solidFill>
-                <a:latin typeface="Calibri" pitchFamily="34" charset="0"/>
-                <a:ea typeface="Calibri" pitchFamily="34" charset="-122"/>
-                <a:cs typeface="Calibri" pitchFamily="34" charset="-120"/>
-              </a:rPr>
-              <a:t>ブラウザの印刷機能で、編集画面や集計画面をそのまま印刷できます。</a:t>
-            </a:r>
-            <a:endParaRPr lang="en-US" sz="1100" dirty="0"/>
-          </a:p>
-        </p:txBody>
-      </p:sp>
-      <p:sp>
-        <p:nvSpPr>
-          <p:cNvPr id="14" name="Shape 12"/>
+          <p:cNvPr id="8" name="Shape 6"/>
           <p:cNvSpPr/>
           <p:nvPr/>
         </p:nvSpPr>
         <p:spPr>
           <a:xfrm>
-            <a:off x="566928" y="5559933"/>
+            <a:off x="566928" y="2602484"/>
             <a:ext cx="6428232" cy="431102"/>
           </a:xfrm>
           <a:prstGeom prst="roundRect">
@@ -8716,11 +8542,11 @@
             </a:avLst>
           </a:prstGeom>
           <a:solidFill>
-            <a:srgbClr val="E3F0F4"/>
+            <a:srgbClr val="FDF0E6"/>
           </a:solidFill>
           <a:ln w="9525">
             <a:solidFill>
-              <a:srgbClr val="1C7293"/>
+              <a:srgbClr val="E08A3C"/>
             </a:solidFill>
             <a:prstDash val="solid"/>
           </a:ln>
@@ -8728,13 +8554,13 @@
       </p:sp>
       <p:sp>
         <p:nvSpPr>
-          <p:cNvPr id="15" name="Text 13"/>
-          <p:cNvSpPr txBox="1"/>
-          <p:nvPr/>
-        </p:nvSpPr>
-        <p:spPr>
-          <a:xfrm>
-            <a:off x="658368" y="5651373"/>
+          <p:cNvPr id="9" name="Text 7"/>
+          <p:cNvSpPr txBox="1"/>
+          <p:nvPr/>
+        </p:nvSpPr>
+        <p:spPr>
+          <a:xfrm>
+            <a:off x="658368" y="2693924"/>
             <a:ext cx="237744" cy="237744"/>
           </a:xfrm>
           <a:prstGeom prst="rect">
@@ -8753,13 +8579,13 @@
             <a:r>
               <a:rPr lang="en-US" sz="1200" b="1" dirty="0">
                 <a:solidFill>
-                  <a:srgbClr val="1C7293"/>
-                </a:solidFill>
-                <a:latin typeface="Calibri" pitchFamily="34" charset="0"/>
-                <a:ea typeface="Calibri" pitchFamily="34" charset="-122"/>
-                <a:cs typeface="Calibri" pitchFamily="34" charset="-120"/>
-              </a:rPr>
-              <a:t>i</a:t>
+                  <a:srgbClr val="C25A17"/>
+                </a:solidFill>
+                <a:latin typeface="Calibri" pitchFamily="34" charset="0"/>
+                <a:ea typeface="Calibri" pitchFamily="34" charset="-122"/>
+                <a:cs typeface="Calibri" pitchFamily="34" charset="-120"/>
+              </a:rPr>
+              <a:t>！</a:t>
             </a:r>
             <a:endParaRPr lang="en-US" sz="1200" dirty="0"/>
           </a:p>
@@ -8767,13 +8593,13 @@
       </p:sp>
       <p:sp>
         <p:nvSpPr>
-          <p:cNvPr id="16" name="Text 14"/>
-          <p:cNvSpPr txBox="1"/>
-          <p:nvPr/>
-        </p:nvSpPr>
-        <p:spPr>
-          <a:xfrm>
-            <a:off x="950976" y="5669661"/>
+          <p:cNvPr id="10" name="Text 8"/>
+          <p:cNvSpPr txBox="1"/>
+          <p:nvPr/>
+        </p:nvSpPr>
+        <p:spPr>
+          <a:xfrm>
+            <a:off x="950976" y="2712212"/>
             <a:ext cx="5925312" cy="248221"/>
           </a:xfrm>
           <a:prstGeom prst="rect">
@@ -8801,15 +8627,112 @@
                 <a:ea typeface="Calibri" pitchFamily="34" charset="-122"/>
                 <a:cs typeface="Calibri" pitchFamily="34" charset="-120"/>
               </a:rPr>
-              <a:t>分からないことがあれば、事務局までお問い合わせください。</a:t>
+              <a:t>QRコードのURLは企業ごとに違います。</a:t>
+            </a:r>
+            <a:pPr indent="0" marL="0">
+              <a:lnSpc>
+                <a:spcPct val="120000"/>
+              </a:lnSpc>
+              <a:buNone/>
+            </a:pPr>
+            <a:r>
+              <a:rPr lang="en-US" sz="1050" b="1" dirty="0">
+                <a:solidFill>
+                  <a:srgbClr val="222222"/>
+                </a:solidFill>
+                <a:latin typeface="Calibri" pitchFamily="34" charset="0"/>
+                <a:ea typeface="Calibri" pitchFamily="34" charset="-122"/>
+                <a:cs typeface="Calibri" pitchFamily="34" charset="-120"/>
+              </a:rPr>
+              <a:t>他社のQRコードを掲示しないよう</a:t>
+            </a:r>
+            <a:pPr indent="0" marL="0">
+              <a:lnSpc>
+                <a:spcPct val="120000"/>
+              </a:lnSpc>
+              <a:buNone/>
+            </a:pPr>
+            <a:r>
+              <a:rPr lang="en-US" sz="1050" dirty="0">
+                <a:solidFill>
+                  <a:srgbClr val="222222"/>
+                </a:solidFill>
+                <a:latin typeface="Calibri" pitchFamily="34" charset="0"/>
+                <a:ea typeface="Calibri" pitchFamily="34" charset="-122"/>
+                <a:cs typeface="Calibri" pitchFamily="34" charset="-120"/>
+              </a:rPr>
+              <a:t>ご注意ください。</a:t>
             </a:r>
             <a:endParaRPr lang="en-US" sz="1050" dirty="0"/>
           </a:p>
         </p:txBody>
       </p:sp>
-      <p:sp>
-        <p:nvSpPr>
-          <p:cNvPr id="17" name="Text 15"/>
+      <p:pic>
+        <p:nvPicPr>
+          <p:cNvPr id="11" name="Image 0" descr="C:\Users\sato\Desktop\enque\docs\images\c-qr.png">    </p:cNvPr>
+          <p:cNvPicPr>
+            <a:picLocks noChangeAspect="1"/>
+          </p:cNvPicPr>
+          <p:nvPr/>
+        </p:nvPicPr>
+        <p:blipFill>
+          <a:blip r:embed="rId1"/>
+          <a:stretch>
+            <a:fillRect/>
+          </a:stretch>
+        </p:blipFill>
+        <p:spPr>
+          <a:xfrm>
+            <a:off x="566928" y="3106738"/>
+            <a:ext cx="6428232" cy="3181485"/>
+          </a:xfrm>
+          <a:prstGeom prst="rect">
+            <a:avLst/>
+          </a:prstGeom>
+        </p:spPr>
+      </p:pic>
+      <p:sp>
+        <p:nvSpPr>
+          <p:cNvPr id="12" name="Text 9"/>
+          <p:cNvSpPr txBox="1"/>
+          <p:nvPr/>
+        </p:nvSpPr>
+        <p:spPr>
+          <a:xfrm>
+            <a:off x="566928" y="6343087"/>
+            <a:ext cx="6428232" cy="274320"/>
+          </a:xfrm>
+          <a:prstGeom prst="rect">
+            <a:avLst/>
+          </a:prstGeom>
+          <a:noFill/>
+          <a:ln/>
+        </p:spPr>
+        <p:txBody>
+          <a:bodyPr wrap="square" lIns="0" tIns="0" rIns="0" bIns="0" rtlCol="0" anchor="ctr"/>
+          <a:lstStyle/>
+          <a:p>
+            <a:pPr algn="ctr" indent="0" marL="0">
+              <a:buNone/>
+            </a:pPr>
+            <a:r>
+              <a:rPr lang="en-US" sz="950" dirty="0">
+                <a:solidFill>
+                  <a:srgbClr val="6B6B6B"/>
+                </a:solidFill>
+                <a:latin typeface="Calibri" pitchFamily="34" charset="0"/>
+                <a:ea typeface="Calibri" pitchFamily="34" charset="-122"/>
+                <a:cs typeface="Calibri" pitchFamily="34" charset="-120"/>
+              </a:rPr>
+              <a:t>QRコードの印刷ページ（自社1社分）。</a:t>
+            </a:r>
+            <a:endParaRPr lang="en-US" sz="950" dirty="0"/>
+          </a:p>
+        </p:txBody>
+      </p:sp>
+      <p:sp>
+        <p:nvSpPr>
+          <p:cNvPr id="13" name="Text 10"/>
           <p:cNvSpPr txBox="1"/>
           <p:nvPr/>
         </p:nvSpPr>

--- a/docs/manual-company.pptx
+++ b/docs/manual-company.pptx
@@ -2101,7 +2101,7 @@
                 <a:ea typeface="Calibri" pitchFamily="34" charset="-122"/>
                 <a:cs typeface="Calibri" pitchFamily="34" charset="-120"/>
               </a:rPr>
-              <a:t>分かりません。このシステムでは氏名・住所を一切集めていません。メールアドレスは、イベント終了後の全体アンケートの案内にのみ使われ、事務局側で管理されます（企業には共有されません）。</a:t>
+              <a:t>分かりません。このシステムでは氏名・住所を一切集めていません。メールアドレスは、イベント終了後の総合アンケートの案内にのみ使われ、事務局側で管理されます（企業には共有されません）。</a:t>
             </a:r>
             <a:endParaRPr lang="en-US" sz="1100" dirty="0"/>
           </a:p>

--- a/docs/manual-company.pptx
+++ b/docs/manual-company.pptx
@@ -6634,8 +6634,8 @@
         </p:blipFill>
         <p:spPr>
           <a:xfrm>
-            <a:off x="1504370" y="4842002"/>
-            <a:ext cx="4553347" cy="3474720"/>
+            <a:off x="566928" y="4842002"/>
+            <a:ext cx="6428232" cy="810327"/>
           </a:xfrm>
           <a:prstGeom prst="rect">
             <a:avLst/>
@@ -6650,7 +6650,7 @@
         </p:nvSpPr>
         <p:spPr>
           <a:xfrm>
-            <a:off x="566928" y="8371586"/>
+            <a:off x="566928" y="5707193"/>
             <a:ext cx="6428232" cy="274320"/>
           </a:xfrm>
           <a:prstGeom prst="rect">

--- a/docs/manual-company.pptx
+++ b/docs/manual-company.pptx
@@ -2101,7 +2101,7 @@
                 <a:ea typeface="Calibri" pitchFamily="34" charset="-122"/>
                 <a:cs typeface="Calibri" pitchFamily="34" charset="-120"/>
               </a:rPr>
-              <a:t>分かりません。このシステムでは氏名・住所を一切集めていません。メールアドレスは、イベント終了後の総合アンケートの案内にのみ使われ、事務局側で管理されます（企業には共有されません）。</a:t>
+              <a:t>分かりません。このシステムでは氏名・住所を一切集めていません。メールアドレスは、イベント終了後のスマホ壁紙のご案内にのみ使われ、事務局側で管理されます（企業には共有されません）。</a:t>
             </a:r>
             <a:endParaRPr lang="en-US" sz="1100" dirty="0"/>
           </a:p>
@@ -6327,13 +6327,297 @@
       </p:sp>
       <p:sp>
         <p:nvSpPr>
-          <p:cNvPr id="10" name="Text 8"/>
-          <p:cNvSpPr txBox="1"/>
-          <p:nvPr/>
-        </p:nvSpPr>
-        <p:spPr>
-          <a:xfrm>
-            <a:off x="566928" y="2986278"/>
+          <p:cNvPr id="10" name="Shape 8"/>
+          <p:cNvSpPr/>
+          <p:nvPr/>
+        </p:nvSpPr>
+        <p:spPr>
+          <a:xfrm>
+            <a:off x="566928" y="2876550"/>
+            <a:ext cx="6428232" cy="624459"/>
+          </a:xfrm>
+          <a:prstGeom prst="roundRect">
+            <a:avLst>
+              <a:gd name="adj" fmla="val 8786"/>
+            </a:avLst>
+          </a:prstGeom>
+          <a:solidFill>
+            <a:srgbClr val="E3F0F4"/>
+          </a:solidFill>
+          <a:ln w="9525">
+            <a:solidFill>
+              <a:srgbClr val="1C7293"/>
+            </a:solidFill>
+            <a:prstDash val="solid"/>
+          </a:ln>
+        </p:spPr>
+      </p:sp>
+      <p:sp>
+        <p:nvSpPr>
+          <p:cNvPr id="11" name="Text 9"/>
+          <p:cNvSpPr txBox="1"/>
+          <p:nvPr/>
+        </p:nvSpPr>
+        <p:spPr>
+          <a:xfrm>
+            <a:off x="658368" y="2967990"/>
+            <a:ext cx="237744" cy="237744"/>
+          </a:xfrm>
+          <a:prstGeom prst="rect">
+            <a:avLst/>
+          </a:prstGeom>
+          <a:noFill/>
+          <a:ln/>
+        </p:spPr>
+        <p:txBody>
+          <a:bodyPr wrap="square" lIns="0" tIns="0" rIns="0" bIns="0" rtlCol="0" anchor="ctr"/>
+          <a:lstStyle/>
+          <a:p>
+            <a:pPr algn="ctr" indent="0" marL="0">
+              <a:buNone/>
+            </a:pPr>
+            <a:r>
+              <a:rPr lang="en-US" sz="1200" b="1" dirty="0">
+                <a:solidFill>
+                  <a:srgbClr val="1C7293"/>
+                </a:solidFill>
+                <a:latin typeface="Calibri" pitchFamily="34" charset="0"/>
+                <a:ea typeface="Calibri" pitchFamily="34" charset="-122"/>
+                <a:cs typeface="Calibri" pitchFamily="34" charset="-120"/>
+              </a:rPr>
+              <a:t>i</a:t>
+            </a:r>
+            <a:endParaRPr lang="en-US" sz="1200" dirty="0"/>
+          </a:p>
+        </p:txBody>
+      </p:sp>
+      <p:sp>
+        <p:nvSpPr>
+          <p:cNvPr id="12" name="Text 10"/>
+          <p:cNvSpPr txBox="1"/>
+          <p:nvPr/>
+        </p:nvSpPr>
+        <p:spPr>
+          <a:xfrm>
+            <a:off x="950976" y="2986278"/>
+            <a:ext cx="5925312" cy="441579"/>
+          </a:xfrm>
+          <a:prstGeom prst="rect">
+            <a:avLst/>
+          </a:prstGeom>
+          <a:noFill/>
+          <a:ln/>
+        </p:spPr>
+        <p:txBody>
+          <a:bodyPr wrap="square" lIns="0" tIns="0" rIns="0" bIns="0" rtlCol="0" anchor="t"/>
+          <a:lstStyle/>
+          <a:p>
+            <a:pPr indent="0" marL="0">
+              <a:lnSpc>
+                <a:spcPct val="120000"/>
+              </a:lnSpc>
+              <a:buNone/>
+            </a:pPr>
+            <a:r>
+              <a:rPr lang="en-US" sz="1050" dirty="0">
+                <a:solidFill>
+                  <a:srgbClr val="222222"/>
+                </a:solidFill>
+                <a:latin typeface="Calibri" pitchFamily="34" charset="0"/>
+                <a:ea typeface="Calibri" pitchFamily="34" charset="-122"/>
+                <a:cs typeface="Calibri" pitchFamily="34" charset="-120"/>
+              </a:rPr>
+              <a:t>来場者の画面では、自社の設問の下に事務局の</a:t>
+            </a:r>
+            <a:pPr indent="0" marL="0">
+              <a:lnSpc>
+                <a:spcPct val="120000"/>
+              </a:lnSpc>
+              <a:buNone/>
+            </a:pPr>
+            <a:r>
+              <a:rPr lang="en-US" sz="1050" b="1" dirty="0">
+                <a:solidFill>
+                  <a:srgbClr val="222222"/>
+                </a:solidFill>
+                <a:latin typeface="Calibri" pitchFamily="34" charset="0"/>
+                <a:ea typeface="Calibri" pitchFamily="34" charset="-122"/>
+                <a:cs typeface="Calibri" pitchFamily="34" charset="-120"/>
+              </a:rPr>
+              <a:t>総合アンケート</a:t>
+            </a:r>
+            <a:pPr indent="0" marL="0">
+              <a:lnSpc>
+                <a:spcPct val="120000"/>
+              </a:lnSpc>
+              <a:buNone/>
+            </a:pPr>
+            <a:r>
+              <a:rPr lang="en-US" sz="1050" dirty="0">
+                <a:solidFill>
+                  <a:srgbClr val="222222"/>
+                </a:solidFill>
+                <a:latin typeface="Calibri" pitchFamily="34" charset="0"/>
+                <a:ea typeface="Calibri" pitchFamily="34" charset="-122"/>
+                <a:cs typeface="Calibri" pitchFamily="34" charset="-120"/>
+              </a:rPr>
+              <a:t>（イベント全体について聞くもの）が</a:t>
+            </a:r>
+            <a:endParaRPr lang="en-US" sz="1050" dirty="0"/>
+          </a:p>
+        </p:txBody>
+      </p:sp>
+      <p:sp>
+        <p:nvSpPr>
+          <p:cNvPr id="13" name="Shape 11"/>
+          <p:cNvSpPr/>
+          <p:nvPr/>
+        </p:nvSpPr>
+        <p:spPr>
+          <a:xfrm>
+            <a:off x="566928" y="3574161"/>
+            <a:ext cx="6428232" cy="624459"/>
+          </a:xfrm>
+          <a:prstGeom prst="roundRect">
+            <a:avLst>
+              <a:gd name="adj" fmla="val 8786"/>
+            </a:avLst>
+          </a:prstGeom>
+          <a:solidFill>
+            <a:srgbClr val="E3F0F4"/>
+          </a:solidFill>
+          <a:ln w="9525">
+            <a:solidFill>
+              <a:srgbClr val="1C7293"/>
+            </a:solidFill>
+            <a:prstDash val="solid"/>
+          </a:ln>
+        </p:spPr>
+      </p:sp>
+      <p:sp>
+        <p:nvSpPr>
+          <p:cNvPr id="14" name="Text 12"/>
+          <p:cNvSpPr txBox="1"/>
+          <p:nvPr/>
+        </p:nvSpPr>
+        <p:spPr>
+          <a:xfrm>
+            <a:off x="658368" y="3665601"/>
+            <a:ext cx="237744" cy="237744"/>
+          </a:xfrm>
+          <a:prstGeom prst="rect">
+            <a:avLst/>
+          </a:prstGeom>
+          <a:noFill/>
+          <a:ln/>
+        </p:spPr>
+        <p:txBody>
+          <a:bodyPr wrap="square" lIns="0" tIns="0" rIns="0" bIns="0" rtlCol="0" anchor="ctr"/>
+          <a:lstStyle/>
+          <a:p>
+            <a:pPr algn="ctr" indent="0" marL="0">
+              <a:buNone/>
+            </a:pPr>
+            <a:r>
+              <a:rPr lang="en-US" sz="1200" b="1" dirty="0">
+                <a:solidFill>
+                  <a:srgbClr val="1C7293"/>
+                </a:solidFill>
+                <a:latin typeface="Calibri" pitchFamily="34" charset="0"/>
+                <a:ea typeface="Calibri" pitchFamily="34" charset="-122"/>
+                <a:cs typeface="Calibri" pitchFamily="34" charset="-120"/>
+              </a:rPr>
+              <a:t>i</a:t>
+            </a:r>
+            <a:endParaRPr lang="en-US" sz="1200" dirty="0"/>
+          </a:p>
+        </p:txBody>
+      </p:sp>
+      <p:sp>
+        <p:nvSpPr>
+          <p:cNvPr id="15" name="Text 13"/>
+          <p:cNvSpPr txBox="1"/>
+          <p:nvPr/>
+        </p:nvSpPr>
+        <p:spPr>
+          <a:xfrm>
+            <a:off x="950976" y="3683889"/>
+            <a:ext cx="5925312" cy="441579"/>
+          </a:xfrm>
+          <a:prstGeom prst="rect">
+            <a:avLst/>
+          </a:prstGeom>
+          <a:noFill/>
+          <a:ln/>
+        </p:spPr>
+        <p:txBody>
+          <a:bodyPr wrap="square" lIns="0" tIns="0" rIns="0" bIns="0" rtlCol="0" anchor="t"/>
+          <a:lstStyle/>
+          <a:p>
+            <a:pPr indent="0" marL="0">
+              <a:lnSpc>
+                <a:spcPct val="120000"/>
+              </a:lnSpc>
+              <a:buNone/>
+            </a:pPr>
+            <a:r>
+              <a:rPr lang="en-US" sz="1050" dirty="0">
+                <a:solidFill>
+                  <a:srgbClr val="222222"/>
+                </a:solidFill>
+                <a:latin typeface="Calibri" pitchFamily="34" charset="0"/>
+                <a:ea typeface="Calibri" pitchFamily="34" charset="-122"/>
+                <a:cs typeface="Calibri" pitchFamily="34" charset="-120"/>
+              </a:rPr>
+              <a:t>出ることがあります。まだ答えていない方に1回だけ表示されるもので、</a:t>
+            </a:r>
+            <a:pPr indent="0" marL="0">
+              <a:lnSpc>
+                <a:spcPct val="120000"/>
+              </a:lnSpc>
+              <a:buNone/>
+            </a:pPr>
+            <a:r>
+              <a:rPr lang="en-US" sz="1050" b="1" dirty="0">
+                <a:solidFill>
+                  <a:srgbClr val="222222"/>
+                </a:solidFill>
+                <a:latin typeface="Calibri" pitchFamily="34" charset="0"/>
+                <a:ea typeface="Calibri" pitchFamily="34" charset="-122"/>
+                <a:cs typeface="Calibri" pitchFamily="34" charset="-120"/>
+              </a:rPr>
+              <a:t>自社の集計には入りません</a:t>
+            </a:r>
+            <a:pPr indent="0" marL="0">
+              <a:lnSpc>
+                <a:spcPct val="120000"/>
+              </a:lnSpc>
+              <a:buNone/>
+            </a:pPr>
+            <a:r>
+              <a:rPr lang="en-US" sz="1050" dirty="0">
+                <a:solidFill>
+                  <a:srgbClr val="222222"/>
+                </a:solidFill>
+                <a:latin typeface="Calibri" pitchFamily="34" charset="0"/>
+                <a:ea typeface="Calibri" pitchFamily="34" charset="-122"/>
+                <a:cs typeface="Calibri" pitchFamily="34" charset="-120"/>
+              </a:rPr>
+              <a:t>。</a:t>
+            </a:r>
+            <a:endParaRPr lang="en-US" sz="1050" dirty="0"/>
+          </a:p>
+        </p:txBody>
+      </p:sp>
+      <p:sp>
+        <p:nvSpPr>
+          <p:cNvPr id="16" name="Text 14"/>
+          <p:cNvSpPr txBox="1"/>
+          <p:nvPr/>
+        </p:nvSpPr>
+        <p:spPr>
+          <a:xfrm>
+            <a:off x="566928" y="4381500"/>
             <a:ext cx="6428232" cy="257810"/>
           </a:xfrm>
           <a:prstGeom prst="rect">
@@ -6366,13 +6650,13 @@
       </p:sp>
       <p:sp>
         <p:nvSpPr>
-          <p:cNvPr id="11" name="Text 9"/>
-          <p:cNvSpPr txBox="1"/>
-          <p:nvPr/>
-        </p:nvSpPr>
-        <p:spPr>
-          <a:xfrm>
-            <a:off x="713232" y="3317240"/>
+          <p:cNvPr id="17" name="Text 15"/>
+          <p:cNvSpPr txBox="1"/>
+          <p:nvPr/>
+        </p:nvSpPr>
+        <p:spPr>
+          <a:xfrm>
+            <a:off x="713232" y="4712462"/>
             <a:ext cx="6281928" cy="257429"/>
           </a:xfrm>
           <a:prstGeom prst="rect">
@@ -6409,13 +6693,13 @@
       </p:sp>
       <p:sp>
         <p:nvSpPr>
-          <p:cNvPr id="12" name="Text 10"/>
-          <p:cNvSpPr txBox="1"/>
-          <p:nvPr/>
-        </p:nvSpPr>
-        <p:spPr>
-          <a:xfrm>
-            <a:off x="713232" y="3592957"/>
+          <p:cNvPr id="18" name="Text 16"/>
+          <p:cNvSpPr txBox="1"/>
+          <p:nvPr/>
+        </p:nvSpPr>
+        <p:spPr>
+          <a:xfrm>
+            <a:off x="713232" y="4988179"/>
             <a:ext cx="6281928" cy="257429"/>
           </a:xfrm>
           <a:prstGeom prst="rect">
@@ -6469,13 +6753,13 @@
       </p:sp>
       <p:sp>
         <p:nvSpPr>
-          <p:cNvPr id="13" name="Text 11"/>
-          <p:cNvSpPr txBox="1"/>
-          <p:nvPr/>
-        </p:nvSpPr>
-        <p:spPr>
-          <a:xfrm>
-            <a:off x="713232" y="3868674"/>
+          <p:cNvPr id="19" name="Text 17"/>
+          <p:cNvSpPr txBox="1"/>
+          <p:nvPr/>
+        </p:nvSpPr>
+        <p:spPr>
+          <a:xfrm>
+            <a:off x="713232" y="5263896"/>
             <a:ext cx="6281928" cy="257429"/>
           </a:xfrm>
           <a:prstGeom prst="rect">
@@ -6512,13 +6796,13 @@
       </p:sp>
       <p:sp>
         <p:nvSpPr>
-          <p:cNvPr id="14" name="Shape 12"/>
+          <p:cNvPr id="20" name="Shape 18"/>
           <p:cNvSpPr/>
           <p:nvPr/>
         </p:nvSpPr>
         <p:spPr>
           <a:xfrm>
-            <a:off x="566928" y="4144391"/>
+            <a:off x="566928" y="5539613"/>
             <a:ext cx="6428232" cy="624459"/>
           </a:xfrm>
           <a:prstGeom prst="roundRect">
@@ -6539,13 +6823,13 @@
       </p:sp>
       <p:sp>
         <p:nvSpPr>
-          <p:cNvPr id="15" name="Text 13"/>
-          <p:cNvSpPr txBox="1"/>
-          <p:nvPr/>
-        </p:nvSpPr>
-        <p:spPr>
-          <a:xfrm>
-            <a:off x="658368" y="4235831"/>
+          <p:cNvPr id="21" name="Text 19"/>
+          <p:cNvSpPr txBox="1"/>
+          <p:nvPr/>
+        </p:nvSpPr>
+        <p:spPr>
+          <a:xfrm>
+            <a:off x="658368" y="5631053"/>
             <a:ext cx="237744" cy="237744"/>
           </a:xfrm>
           <a:prstGeom prst="rect">
@@ -6578,13 +6862,13 @@
       </p:sp>
       <p:sp>
         <p:nvSpPr>
-          <p:cNvPr id="16" name="Text 14"/>
-          <p:cNvSpPr txBox="1"/>
-          <p:nvPr/>
-        </p:nvSpPr>
-        <p:spPr>
-          <a:xfrm>
-            <a:off x="950976" y="4254119"/>
+          <p:cNvPr id="22" name="Text 20"/>
+          <p:cNvSpPr txBox="1"/>
+          <p:nvPr/>
+        </p:nvSpPr>
+        <p:spPr>
+          <a:xfrm>
+            <a:off x="950976" y="5649341"/>
             <a:ext cx="5925312" cy="441579"/>
           </a:xfrm>
           <a:prstGeom prst="rect">
@@ -6620,7 +6904,7 @@
       </p:sp>
       <p:pic>
         <p:nvPicPr>
-          <p:cNvPr id="17" name="Image 0" descr="C:\Users\sato\Desktop\enque\docs\images\c-publish.png">    </p:cNvPr>
+          <p:cNvPr id="23" name="Image 0" descr="C:\Users\sato\Desktop\enque\docs\images\c-publish.png">    </p:cNvPr>
           <p:cNvPicPr>
             <a:picLocks noChangeAspect="1"/>
           </p:cNvPicPr>
@@ -6634,7 +6918,7 @@
         </p:blipFill>
         <p:spPr>
           <a:xfrm>
-            <a:off x="566928" y="4842002"/>
+            <a:off x="566928" y="6237224"/>
             <a:ext cx="6428232" cy="810327"/>
           </a:xfrm>
           <a:prstGeom prst="rect">
@@ -6644,13 +6928,13 @@
       </p:pic>
       <p:sp>
         <p:nvSpPr>
-          <p:cNvPr id="18" name="Text 15"/>
-          <p:cNvSpPr txBox="1"/>
-          <p:nvPr/>
-        </p:nvSpPr>
-        <p:spPr>
-          <a:xfrm>
-            <a:off x="566928" y="5707193"/>
+          <p:cNvPr id="24" name="Text 21"/>
+          <p:cNvSpPr txBox="1"/>
+          <p:nvPr/>
+        </p:nvSpPr>
+        <p:spPr>
+          <a:xfrm>
+            <a:off x="566928" y="7102415"/>
             <a:ext cx="6428232" cy="274320"/>
           </a:xfrm>
           <a:prstGeom prst="rect">
@@ -6683,7 +6967,7 @@
       </p:sp>
       <p:sp>
         <p:nvSpPr>
-          <p:cNvPr id="19" name="Text 16"/>
+          <p:cNvPr id="25" name="Text 22"/>
           <p:cNvSpPr txBox="1"/>
           <p:nvPr/>
         </p:nvSpPr>

--- a/docs/manual-company.pptx
+++ b/docs/manual-company.pptx
@@ -3324,7 +3324,7 @@
                 <a:ea typeface="Calibri" pitchFamily="34" charset="-122"/>
                 <a:cs typeface="Calibri" pitchFamily="34" charset="-120"/>
               </a:rPr>
-              <a:t>自社ダッシュボードの全体像（回答数・重複送信・設問数のタイルが見えるもの）。</a:t>
+              <a:t>自社ダッシュボードの全体像（回答数・修正された回答・設問数のタイルが見えるもの）。</a:t>
             </a:r>
             <a:endParaRPr lang="en-US" sz="950" dirty="0"/>
           </a:p>
@@ -7253,7 +7253,7 @@
                 <a:ea typeface="Calibri" pitchFamily="34" charset="-122"/>
                 <a:cs typeface="Calibri" pitchFamily="34" charset="-120"/>
               </a:rPr>
-              <a:t>重複送信</a:t>
+              <a:t>修正された回答</a:t>
             </a:r>
             <a:pPr indent="0" marL="0">
               <a:lnSpc>
@@ -7270,7 +7270,7 @@
                 <a:ea typeface="Calibri" pitchFamily="34" charset="-122"/>
                 <a:cs typeface="Calibri" pitchFamily="34" charset="-120"/>
               </a:rPr>
-              <a:t>：同じ端末から同じブースに送り直された件数</a:t>
+              <a:t>：来場者があとから書き直した件数</a:t>
             </a:r>
             <a:endParaRPr lang="en-US" sz="1100" dirty="0"/>
           </a:p>
@@ -7580,7 +7580,7 @@
                 <a:ea typeface="Calibri" pitchFamily="34" charset="-122"/>
                 <a:cs typeface="Calibri" pitchFamily="34" charset="-120"/>
               </a:rPr>
-              <a:t>重複送信について</a:t>
+              <a:t>同じ来場者が2回答えたとき</a:t>
             </a:r>
             <a:endParaRPr lang="en-US" sz="1400" dirty="0"/>
           </a:p>
@@ -7622,7 +7622,7 @@
                 <a:ea typeface="Calibri" pitchFamily="34" charset="-122"/>
                 <a:cs typeface="Calibri" pitchFamily="34" charset="-120"/>
               </a:rPr>
-              <a:t>同じ来場者が同じブースで2回送信した場合、2回目以降は「重複」として記録され、</a:t>
+              <a:t>同じ方が自社のQRコードをもう一度読み取ると、来場者の画面には</a:t>
             </a:r>
             <a:pPr indent="0" marL="0">
               <a:lnSpc>
@@ -7639,7 +7639,7 @@
                 <a:ea typeface="Calibri" pitchFamily="34" charset="-122"/>
                 <a:cs typeface="Calibri" pitchFamily="34" charset="-120"/>
               </a:rPr>
-              <a:t>集計からは除かれます</a:t>
+              <a:t>前回の回答が入った状態</a:t>
             </a:r>
             <a:pPr indent="0" marL="0">
               <a:lnSpc>
@@ -7656,15 +7656,191 @@
                 <a:ea typeface="Calibri" pitchFamily="34" charset="-122"/>
                 <a:cs typeface="Calibri" pitchFamily="34" charset="-120"/>
               </a:rPr>
-              <a:t>。実際の回答数はそのぶん少なく表示されます。</a:t>
+              <a:t>で表示され、書き換えると</a:t>
+            </a:r>
+            <a:pPr indent="0" marL="0">
+              <a:lnSpc>
+                <a:spcPct val="125000"/>
+              </a:lnSpc>
+              <a:buNone/>
+            </a:pPr>
+            <a:r>
+              <a:rPr lang="en-US" sz="1100" b="1" dirty="0">
+                <a:solidFill>
+                  <a:srgbClr val="222222"/>
+                </a:solidFill>
+                <a:latin typeface="Calibri" pitchFamily="34" charset="0"/>
+                <a:ea typeface="Calibri" pitchFamily="34" charset="-122"/>
+                <a:cs typeface="Calibri" pitchFamily="34" charset="-120"/>
+              </a:rPr>
+              <a:t>前の回答が置き換わります</a:t>
+            </a:r>
+            <a:pPr indent="0" marL="0">
+              <a:lnSpc>
+                <a:spcPct val="125000"/>
+              </a:lnSpc>
+              <a:buNone/>
+            </a:pPr>
+            <a:r>
+              <a:rPr lang="en-US" sz="1100" dirty="0">
+                <a:solidFill>
+                  <a:srgbClr val="222222"/>
+                </a:solidFill>
+                <a:latin typeface="Calibri" pitchFamily="34" charset="0"/>
+                <a:ea typeface="Calibri" pitchFamily="34" charset="-122"/>
+                <a:cs typeface="Calibri" pitchFamily="34" charset="-120"/>
+              </a:rPr>
+              <a:t>。回答数は増えません。</a:t>
             </a:r>
             <a:endParaRPr lang="en-US" sz="1100" dirty="0"/>
+          </a:p>
+        </p:txBody>
+      </p:sp>
+      <p:sp>
+        <p:nvSpPr>
+          <p:cNvPr id="15" name="Shape 13"/>
+          <p:cNvSpPr/>
+          <p:nvPr/>
+        </p:nvSpPr>
+        <p:spPr>
+          <a:xfrm>
+            <a:off x="566928" y="4595432"/>
+            <a:ext cx="6428232" cy="624459"/>
+          </a:xfrm>
+          <a:prstGeom prst="roundRect">
+            <a:avLst>
+              <a:gd name="adj" fmla="val 8786"/>
+            </a:avLst>
+          </a:prstGeom>
+          <a:solidFill>
+            <a:srgbClr val="FDF0E6"/>
+          </a:solidFill>
+          <a:ln w="9525">
+            <a:solidFill>
+              <a:srgbClr val="E08A3C"/>
+            </a:solidFill>
+            <a:prstDash val="solid"/>
+          </a:ln>
+        </p:spPr>
+      </p:sp>
+      <p:sp>
+        <p:nvSpPr>
+          <p:cNvPr id="16" name="Text 14"/>
+          <p:cNvSpPr txBox="1"/>
+          <p:nvPr/>
+        </p:nvSpPr>
+        <p:spPr>
+          <a:xfrm>
+            <a:off x="658368" y="4686871"/>
+            <a:ext cx="237744" cy="237744"/>
+          </a:xfrm>
+          <a:prstGeom prst="rect">
+            <a:avLst/>
+          </a:prstGeom>
+          <a:noFill/>
+          <a:ln/>
+        </p:spPr>
+        <p:txBody>
+          <a:bodyPr wrap="square" lIns="0" tIns="0" rIns="0" bIns="0" rtlCol="0" anchor="ctr"/>
+          <a:lstStyle/>
+          <a:p>
+            <a:pPr algn="ctr" indent="0" marL="0">
+              <a:buNone/>
+            </a:pPr>
+            <a:r>
+              <a:rPr lang="en-US" sz="1200" b="1" dirty="0">
+                <a:solidFill>
+                  <a:srgbClr val="C25A17"/>
+                </a:solidFill>
+                <a:latin typeface="Calibri" pitchFamily="34" charset="0"/>
+                <a:ea typeface="Calibri" pitchFamily="34" charset="-122"/>
+                <a:cs typeface="Calibri" pitchFamily="34" charset="-120"/>
+              </a:rPr>
+              <a:t>！</a:t>
+            </a:r>
+            <a:endParaRPr lang="en-US" sz="1200" dirty="0"/>
+          </a:p>
+        </p:txBody>
+      </p:sp>
+      <p:sp>
+        <p:nvSpPr>
+          <p:cNvPr id="17" name="Text 15"/>
+          <p:cNvSpPr txBox="1"/>
+          <p:nvPr/>
+        </p:nvSpPr>
+        <p:spPr>
+          <a:xfrm>
+            <a:off x="950976" y="4705160"/>
+            <a:ext cx="5925312" cy="441579"/>
+          </a:xfrm>
+          <a:prstGeom prst="rect">
+            <a:avLst/>
+          </a:prstGeom>
+          <a:noFill/>
+          <a:ln/>
+        </p:spPr>
+        <p:txBody>
+          <a:bodyPr wrap="square" lIns="0" tIns="0" rIns="0" bIns="0" rtlCol="0" anchor="t"/>
+          <a:lstStyle/>
+          <a:p>
+            <a:pPr indent="0" marL="0">
+              <a:lnSpc>
+                <a:spcPct val="120000"/>
+              </a:lnSpc>
+              <a:buNone/>
+            </a:pPr>
+            <a:r>
+              <a:rPr lang="en-US" sz="1050" dirty="0">
+                <a:solidFill>
+                  <a:srgbClr val="222222"/>
+                </a:solidFill>
+                <a:latin typeface="Calibri" pitchFamily="34" charset="0"/>
+                <a:ea typeface="Calibri" pitchFamily="34" charset="-122"/>
+                <a:cs typeface="Calibri" pitchFamily="34" charset="-120"/>
+              </a:rPr>
+              <a:t>このため、</a:t>
+            </a:r>
+            <a:pPr indent="0" marL="0">
+              <a:lnSpc>
+                <a:spcPct val="120000"/>
+              </a:lnSpc>
+              <a:buNone/>
+            </a:pPr>
+            <a:r>
+              <a:rPr lang="en-US" sz="1050" b="1" dirty="0">
+                <a:solidFill>
+                  <a:srgbClr val="222222"/>
+                </a:solidFill>
+                <a:latin typeface="Calibri" pitchFamily="34" charset="0"/>
+                <a:ea typeface="Calibri" pitchFamily="34" charset="-122"/>
+                <a:cs typeface="Calibri" pitchFamily="34" charset="-120"/>
+              </a:rPr>
+              <a:t>一度見た集計の数字があとから変わることがあります</a:t>
+            </a:r>
+            <a:pPr indent="0" marL="0">
+              <a:lnSpc>
+                <a:spcPct val="120000"/>
+              </a:lnSpc>
+              <a:buNone/>
+            </a:pPr>
+            <a:r>
+              <a:rPr lang="en-US" sz="1050" dirty="0">
+                <a:solidFill>
+                  <a:srgbClr val="222222"/>
+                </a:solidFill>
+                <a:latin typeface="Calibri" pitchFamily="34" charset="0"/>
+                <a:ea typeface="Calibri" pitchFamily="34" charset="-122"/>
+                <a:cs typeface="Calibri" pitchFamily="34" charset="-120"/>
+              </a:rPr>
+              <a:t>（★4が★2になる、など）。ダッシュボードの「修正された回答」で、書き直しが何件あったか分かります。</a:t>
+            </a:r>
+            <a:endParaRPr lang="en-US" sz="1050" dirty="0"/>
           </a:p>
         </p:txBody>
       </p:sp>
       <p:pic>
         <p:nvPicPr>
-          <p:cNvPr id="15" name="Image 0" descr="C:\Users\sato\Desktop\enque\docs\images\c-stats.png">    </p:cNvPr>
+          <p:cNvPr id="18" name="Image 0" descr="C:\Users\sato\Desktop\enque\docs\images\c-stats.png">    </p:cNvPr>
           <p:cNvPicPr>
             <a:picLocks noChangeAspect="1"/>
           </p:cNvPicPr>
@@ -7678,7 +7854,7 @@
         </p:blipFill>
         <p:spPr>
           <a:xfrm>
-            <a:off x="2140821" y="4595432"/>
+            <a:off x="2140821" y="5293043"/>
             <a:ext cx="3280447" cy="3474720"/>
           </a:xfrm>
           <a:prstGeom prst="rect">
@@ -7688,13 +7864,13 @@
       </p:pic>
       <p:sp>
         <p:nvSpPr>
-          <p:cNvPr id="16" name="Text 13"/>
-          <p:cNvSpPr txBox="1"/>
-          <p:nvPr/>
-        </p:nvSpPr>
-        <p:spPr>
-          <a:xfrm>
-            <a:off x="566928" y="8125015"/>
+          <p:cNvPr id="19" name="Text 16"/>
+          <p:cNvSpPr txBox="1"/>
+          <p:nvPr/>
+        </p:nvSpPr>
+        <p:spPr>
+          <a:xfrm>
+            <a:off x="566928" y="8822627"/>
             <a:ext cx="6428232" cy="274320"/>
           </a:xfrm>
           <a:prstGeom prst="rect">
@@ -7727,7 +7903,7 @@
       </p:sp>
       <p:sp>
         <p:nvSpPr>
-          <p:cNvPr id="17" name="Text 14"/>
+          <p:cNvPr id="20" name="Text 17"/>
           <p:cNvSpPr txBox="1"/>
           <p:nvPr/>
         </p:nvSpPr>
@@ -8259,11 +8435,11 @@
         <p:spPr>
           <a:xfrm>
             <a:off x="566928" y="3980434"/>
-            <a:ext cx="6428232" cy="431102"/>
+            <a:ext cx="6428232" cy="624459"/>
           </a:xfrm>
           <a:prstGeom prst="roundRect">
             <a:avLst>
-              <a:gd name="adj" fmla="val 12726"/>
+              <a:gd name="adj" fmla="val 8786"/>
             </a:avLst>
           </a:prstGeom>
           <a:solidFill>
@@ -8325,7 +8501,7 @@
         <p:spPr>
           <a:xfrm>
             <a:off x="950976" y="4090162"/>
-            <a:ext cx="5925312" cy="248221"/>
+            <a:ext cx="5925312" cy="441579"/>
           </a:xfrm>
           <a:prstGeom prst="rect">
             <a:avLst/>
@@ -8352,7 +8528,7 @@
                 <a:ea typeface="Calibri" pitchFamily="34" charset="-122"/>
                 <a:cs typeface="Calibri" pitchFamily="34" charset="-120"/>
               </a:rPr>
-              <a:t>「重複を含めて表示」を選ぶと、送り直された回答も含めて確認・出力できます。</a:t>
+              <a:t>「重複を含めて表示」は、書き直しの仕組みが入る前に記録された重複を確認するためのものです。通常は使いません。</a:t>
             </a:r>
             <a:endParaRPr lang="en-US" sz="1050" dirty="0"/>
           </a:p>
@@ -8374,7 +8550,7 @@
         </p:blipFill>
         <p:spPr>
           <a:xfrm>
-            <a:off x="1828991" y="4484688"/>
+            <a:off x="1828991" y="4678045"/>
             <a:ext cx="3904106" cy="3474720"/>
           </a:xfrm>
           <a:prstGeom prst="rect">
@@ -8390,7 +8566,7 @@
         </p:nvSpPr>
         <p:spPr>
           <a:xfrm>
-            <a:off x="566928" y="8014272"/>
+            <a:off x="566928" y="8207629"/>
             <a:ext cx="6428232" cy="274320"/>
           </a:xfrm>
           <a:prstGeom prst="rect">

--- a/docs/manual-company.pptx
+++ b/docs/manual-company.pptx
@@ -15,9 +15,10 @@
     <p:sldId id="263" r:id="rId9"/>
     <p:sldId id="264" r:id="rId10"/>
     <p:sldId id="265" r:id="rId11"/>
+    <p:sldId id="266" r:id="rId12"/>
   </p:sldIdLst>
   <p:notesMasterIdLst>
-    <p:notesMasterId r:id="rId12"/>
+    <p:notesMasterId r:id="rId13"/>
   </p:notesMasterIdLst>
   <p:sldSz cx="7562088" cy="10689336"/>
   <p:notesSz cx="10689336" cy="7562088"/>
@@ -623,6 +624,94 @@
             <a:fld id="{F7021451-1387-4CA6-816F-3879F97B5CBC}" type="slidenum">
               <a:rPr lang="en-US"/>
               <a:t>10</a:t>
+            </a:fld>
+            <a:endParaRPr lang="en-US"/>
+          </a:p>
+        </p:txBody>
+      </p:sp>
+    </p:spTree>
+    <p:extLst>
+      <p:ext uri="{BB962C8B-B14F-4D97-AF65-F5344CB8AC3E}">
+        <p14:creationId xmlns:p14="http://schemas.microsoft.com/office/powerpoint/2010/main" val="1024086991"/>
+      </p:ext>
+    </p:extLst>
+  </p:cSld>
+  <p:clrMapOvr>
+    <a:masterClrMapping/>
+  </p:clrMapOvr>
+</p:notes>
+</file>
+
+<file path=ppt/notesSlides/notesSlide11.xml><?xml version="1.0" encoding="utf-8"?>
+<p:notes xmlns:a="http://schemas.openxmlformats.org/drawingml/2006/main" xmlns:r="http://schemas.openxmlformats.org/officeDocument/2006/relationships" xmlns:p="http://schemas.openxmlformats.org/presentationml/2006/main">
+  <p:cSld>
+    <p:spTree>
+      <p:nvGrpSpPr>
+        <p:cNvPr id="1" name=""/>
+        <p:cNvGrpSpPr/>
+        <p:nvPr/>
+      </p:nvGrpSpPr>
+      <p:grpSpPr>
+        <a:xfrm>
+          <a:off x="0" y="0"/>
+          <a:ext cx="0" cy="0"/>
+          <a:chOff x="0" y="0"/>
+          <a:chExt cx="0" cy="0"/>
+        </a:xfrm>
+      </p:grpSpPr>
+      <p:sp>
+        <p:nvSpPr>
+          <p:cNvPr id="2" name="Slide Image Placeholder 1"/>
+          <p:cNvSpPr>
+            <a:spLocks noGrp="1" noRot="1" noChangeAspect="1"/>
+          </p:cNvSpPr>
+          <p:nvPr>
+            <p:ph type="sldImg"/>
+          </p:nvPr>
+        </p:nvSpPr>
+        <p:spPr/>
+      </p:sp>
+      <p:sp>
+        <p:nvSpPr>
+          <p:cNvPr id="3" name="Notes Placeholder 2"/>
+          <p:cNvSpPr>
+            <a:spLocks noGrp="1"/>
+          </p:cNvSpPr>
+          <p:nvPr>
+            <p:ph type="body" idx="1"/>
+          </p:nvPr>
+        </p:nvSpPr>
+        <p:spPr/>
+        <p:txBody>
+          <a:bodyPr/>
+          <a:lstStyle/>
+          <a:p>
+            <a:r>
+              <a:rPr lang="en-US" dirty="0"/>
+              <a:t/>
+            </a:r>
+            <a:endParaRPr lang="en-US" dirty="0"/>
+          </a:p>
+        </p:txBody>
+      </p:sp>
+      <p:sp>
+        <p:nvSpPr>
+          <p:cNvPr id="4" name="Slide Number Placeholder 3"/>
+          <p:cNvSpPr>
+            <a:spLocks noGrp="1"/>
+          </p:cNvSpPr>
+          <p:nvPr>
+            <p:ph type="sldNum" sz="quarter" idx="10"/>
+          </p:nvPr>
+        </p:nvSpPr>
+        <p:spPr/>
+        <p:txBody>
+          <a:bodyPr/>
+          <a:lstStyle/>
+          <a:p>
+            <a:fld id="{F7021451-1387-4CA6-816F-3879F97B5CBC}" type="slidenum">
+              <a:rPr lang="en-US"/>
+              <a:t>11</a:t>
             </a:fld>
             <a:endParaRPr lang="en-US"/>
           </a:p>
@@ -1939,6 +2028,599 @@
                 <a:ea typeface="Calibri" pitchFamily="34" charset="-122"/>
                 <a:cs typeface="Calibri" pitchFamily="34" charset="-120"/>
               </a:rPr>
+              <a:t>自社のQRコード</a:t>
+            </a:r>
+            <a:endParaRPr lang="en-US" sz="2200" dirty="0"/>
+          </a:p>
+        </p:txBody>
+      </p:sp>
+      <p:sp>
+        <p:nvSpPr>
+          <p:cNvPr id="4" name="Text 2"/>
+          <p:cNvSpPr txBox="1"/>
+          <p:nvPr/>
+        </p:nvSpPr>
+        <p:spPr>
+          <a:xfrm>
+            <a:off x="566928" y="1481328"/>
+            <a:ext cx="6428232" cy="257429"/>
+          </a:xfrm>
+          <a:prstGeom prst="rect">
+            <a:avLst/>
+          </a:prstGeom>
+          <a:noFill/>
+          <a:ln/>
+        </p:spPr>
+        <p:txBody>
+          <a:bodyPr wrap="square" lIns="0" tIns="0" rIns="0" bIns="0" rtlCol="0" anchor="t"/>
+          <a:lstStyle/>
+          <a:p>
+            <a:pPr indent="0" marL="0">
+              <a:lnSpc>
+                <a:spcPct val="125000"/>
+              </a:lnSpc>
+              <a:buNone/>
+            </a:pPr>
+            <a:r>
+              <a:rPr lang="en-US" sz="1100" dirty="0">
+                <a:solidFill>
+                  <a:srgbClr val="222222"/>
+                </a:solidFill>
+                <a:latin typeface="Calibri" pitchFamily="34" charset="0"/>
+                <a:ea typeface="Calibri" pitchFamily="34" charset="-122"/>
+                <a:cs typeface="Calibri" pitchFamily="34" charset="-120"/>
+              </a:rPr>
+              <a:t>ダッシュボードの</a:t>
+            </a:r>
+            <a:pPr indent="0" marL="0">
+              <a:lnSpc>
+                <a:spcPct val="125000"/>
+              </a:lnSpc>
+              <a:buNone/>
+            </a:pPr>
+            <a:r>
+              <a:rPr lang="en-US" sz="1100" b="1" dirty="0">
+                <a:solidFill>
+                  <a:srgbClr val="222222"/>
+                </a:solidFill>
+                <a:latin typeface="Calibri" pitchFamily="34" charset="0"/>
+                <a:ea typeface="Calibri" pitchFamily="34" charset="-122"/>
+                <a:cs typeface="Calibri" pitchFamily="34" charset="-120"/>
+              </a:rPr>
+              <a:t>「QRコード」</a:t>
+            </a:r>
+            <a:pPr indent="0" marL="0">
+              <a:lnSpc>
+                <a:spcPct val="125000"/>
+              </a:lnSpc>
+              <a:buNone/>
+            </a:pPr>
+            <a:r>
+              <a:rPr lang="en-US" sz="1100" dirty="0">
+                <a:solidFill>
+                  <a:srgbClr val="222222"/>
+                </a:solidFill>
+                <a:latin typeface="Calibri" pitchFamily="34" charset="0"/>
+                <a:ea typeface="Calibri" pitchFamily="34" charset="-122"/>
+                <a:cs typeface="Calibri" pitchFamily="34" charset="-120"/>
+              </a:rPr>
+              <a:t>から、自社ブース用のQRコードを表示・印刷できます。</a:t>
+            </a:r>
+            <a:endParaRPr lang="en-US" sz="1100" dirty="0"/>
+          </a:p>
+        </p:txBody>
+      </p:sp>
+      <p:sp>
+        <p:nvSpPr>
+          <p:cNvPr id="5" name="Text 3"/>
+          <p:cNvSpPr txBox="1"/>
+          <p:nvPr/>
+        </p:nvSpPr>
+        <p:spPr>
+          <a:xfrm>
+            <a:off x="713232" y="1775333"/>
+            <a:ext cx="6281928" cy="257429"/>
+          </a:xfrm>
+          <a:prstGeom prst="rect">
+            <a:avLst/>
+          </a:prstGeom>
+          <a:noFill/>
+          <a:ln/>
+        </p:spPr>
+        <p:txBody>
+          <a:bodyPr wrap="square" lIns="0" tIns="0" rIns="0" bIns="0" rtlCol="0" anchor="t"/>
+          <a:lstStyle/>
+          <a:p>
+            <a:pPr marL="342900" indent="-342900">
+              <a:lnSpc>
+                <a:spcPct val="125000"/>
+              </a:lnSpc>
+              <a:buSzPct val="100000"/>
+              <a:buChar char="●"/>
+            </a:pPr>
+            <a:r>
+              <a:rPr lang="en-US" sz="1100" dirty="0">
+                <a:solidFill>
+                  <a:srgbClr val="222222"/>
+                </a:solidFill>
+                <a:latin typeface="Calibri" pitchFamily="34" charset="0"/>
+                <a:ea typeface="Calibri" pitchFamily="34" charset="-122"/>
+                <a:cs typeface="Calibri" pitchFamily="34" charset="-120"/>
+              </a:rPr>
+              <a:t>ブースに掲示するQRコードは</a:t>
+            </a:r>
+            <a:pPr indent="0" marL="0">
+              <a:lnSpc>
+                <a:spcPct val="125000"/>
+              </a:lnSpc>
+              <a:buNone/>
+            </a:pPr>
+            <a:r>
+              <a:rPr lang="en-US" sz="1100" b="1" dirty="0">
+                <a:solidFill>
+                  <a:srgbClr val="222222"/>
+                </a:solidFill>
+                <a:latin typeface="Calibri" pitchFamily="34" charset="0"/>
+                <a:ea typeface="Calibri" pitchFamily="34" charset="-122"/>
+                <a:cs typeface="Calibri" pitchFamily="34" charset="-120"/>
+              </a:rPr>
+              <a:t>事務局がまとめて印刷</a:t>
+            </a:r>
+            <a:pPr indent="0" marL="0">
+              <a:lnSpc>
+                <a:spcPct val="125000"/>
+              </a:lnSpc>
+              <a:buNone/>
+            </a:pPr>
+            <a:r>
+              <a:rPr lang="en-US" sz="1100" dirty="0">
+                <a:solidFill>
+                  <a:srgbClr val="222222"/>
+                </a:solidFill>
+                <a:latin typeface="Calibri" pitchFamily="34" charset="0"/>
+                <a:ea typeface="Calibri" pitchFamily="34" charset="-122"/>
+                <a:cs typeface="Calibri" pitchFamily="34" charset="-120"/>
+              </a:rPr>
+              <a:t>します</a:t>
+            </a:r>
+            <a:endParaRPr lang="en-US" sz="1100" dirty="0"/>
+          </a:p>
+        </p:txBody>
+      </p:sp>
+      <p:sp>
+        <p:nvSpPr>
+          <p:cNvPr id="6" name="Text 4"/>
+          <p:cNvSpPr txBox="1"/>
+          <p:nvPr/>
+        </p:nvSpPr>
+        <p:spPr>
+          <a:xfrm>
+            <a:off x="713232" y="2051050"/>
+            <a:ext cx="6281928" cy="257429"/>
+          </a:xfrm>
+          <a:prstGeom prst="rect">
+            <a:avLst/>
+          </a:prstGeom>
+          <a:noFill/>
+          <a:ln/>
+        </p:spPr>
+        <p:txBody>
+          <a:bodyPr wrap="square" lIns="0" tIns="0" rIns="0" bIns="0" rtlCol="0" anchor="t"/>
+          <a:lstStyle/>
+          <a:p>
+            <a:pPr marL="342900" indent="-342900">
+              <a:lnSpc>
+                <a:spcPct val="125000"/>
+              </a:lnSpc>
+              <a:buSzPct val="100000"/>
+              <a:buChar char="●"/>
+            </a:pPr>
+            <a:r>
+              <a:rPr lang="en-US" sz="1100" dirty="0">
+                <a:solidFill>
+                  <a:srgbClr val="222222"/>
+                </a:solidFill>
+                <a:latin typeface="Calibri" pitchFamily="34" charset="0"/>
+                <a:ea typeface="Calibri" pitchFamily="34" charset="-122"/>
+                <a:cs typeface="Calibri" pitchFamily="34" charset="-120"/>
+              </a:rPr>
+              <a:t>追加で必要になった場合や、予備が欲しい場合にお使いください</a:t>
+            </a:r>
+            <a:endParaRPr lang="en-US" sz="1100" dirty="0"/>
+          </a:p>
+        </p:txBody>
+      </p:sp>
+      <p:sp>
+        <p:nvSpPr>
+          <p:cNvPr id="7" name="Text 5"/>
+          <p:cNvSpPr txBox="1"/>
+          <p:nvPr/>
+        </p:nvSpPr>
+        <p:spPr>
+          <a:xfrm>
+            <a:off x="713232" y="2326767"/>
+            <a:ext cx="6281928" cy="257429"/>
+          </a:xfrm>
+          <a:prstGeom prst="rect">
+            <a:avLst/>
+          </a:prstGeom>
+          <a:noFill/>
+          <a:ln/>
+        </p:spPr>
+        <p:txBody>
+          <a:bodyPr wrap="square" lIns="0" tIns="0" rIns="0" bIns="0" rtlCol="0" anchor="t"/>
+          <a:lstStyle/>
+          <a:p>
+            <a:pPr marL="342900" indent="-342900">
+              <a:lnSpc>
+                <a:spcPct val="125000"/>
+              </a:lnSpc>
+              <a:buSzPct val="100000"/>
+              <a:buChar char="●"/>
+            </a:pPr>
+            <a:r>
+              <a:rPr lang="en-US" sz="1100" dirty="0">
+                <a:solidFill>
+                  <a:srgbClr val="222222"/>
+                </a:solidFill>
+                <a:latin typeface="Calibri" pitchFamily="34" charset="0"/>
+                <a:ea typeface="Calibri" pitchFamily="34" charset="-122"/>
+                <a:cs typeface="Calibri" pitchFamily="34" charset="-120"/>
+              </a:rPr>
+              <a:t>印刷ダイアログで「PDFとして保存」を選べばPDFになります</a:t>
+            </a:r>
+            <a:endParaRPr lang="en-US" sz="1100" dirty="0"/>
+          </a:p>
+        </p:txBody>
+      </p:sp>
+      <p:sp>
+        <p:nvSpPr>
+          <p:cNvPr id="8" name="Shape 6"/>
+          <p:cNvSpPr/>
+          <p:nvPr/>
+        </p:nvSpPr>
+        <p:spPr>
+          <a:xfrm>
+            <a:off x="566928" y="2602484"/>
+            <a:ext cx="6428232" cy="431102"/>
+          </a:xfrm>
+          <a:prstGeom prst="roundRect">
+            <a:avLst>
+              <a:gd name="adj" fmla="val 12726"/>
+            </a:avLst>
+          </a:prstGeom>
+          <a:solidFill>
+            <a:srgbClr val="FDF0E6"/>
+          </a:solidFill>
+          <a:ln w="9525">
+            <a:solidFill>
+              <a:srgbClr val="E08A3C"/>
+            </a:solidFill>
+            <a:prstDash val="solid"/>
+          </a:ln>
+        </p:spPr>
+      </p:sp>
+      <p:sp>
+        <p:nvSpPr>
+          <p:cNvPr id="9" name="Text 7"/>
+          <p:cNvSpPr txBox="1"/>
+          <p:nvPr/>
+        </p:nvSpPr>
+        <p:spPr>
+          <a:xfrm>
+            <a:off x="658368" y="2693924"/>
+            <a:ext cx="237744" cy="237744"/>
+          </a:xfrm>
+          <a:prstGeom prst="rect">
+            <a:avLst/>
+          </a:prstGeom>
+          <a:noFill/>
+          <a:ln/>
+        </p:spPr>
+        <p:txBody>
+          <a:bodyPr wrap="square" lIns="0" tIns="0" rIns="0" bIns="0" rtlCol="0" anchor="ctr"/>
+          <a:lstStyle/>
+          <a:p>
+            <a:pPr algn="ctr" indent="0" marL="0">
+              <a:buNone/>
+            </a:pPr>
+            <a:r>
+              <a:rPr lang="en-US" sz="1200" b="1" dirty="0">
+                <a:solidFill>
+                  <a:srgbClr val="C25A17"/>
+                </a:solidFill>
+                <a:latin typeface="Calibri" pitchFamily="34" charset="0"/>
+                <a:ea typeface="Calibri" pitchFamily="34" charset="-122"/>
+                <a:cs typeface="Calibri" pitchFamily="34" charset="-120"/>
+              </a:rPr>
+              <a:t>！</a:t>
+            </a:r>
+            <a:endParaRPr lang="en-US" sz="1200" dirty="0"/>
+          </a:p>
+        </p:txBody>
+      </p:sp>
+      <p:sp>
+        <p:nvSpPr>
+          <p:cNvPr id="10" name="Text 8"/>
+          <p:cNvSpPr txBox="1"/>
+          <p:nvPr/>
+        </p:nvSpPr>
+        <p:spPr>
+          <a:xfrm>
+            <a:off x="950976" y="2712212"/>
+            <a:ext cx="5925312" cy="248221"/>
+          </a:xfrm>
+          <a:prstGeom prst="rect">
+            <a:avLst/>
+          </a:prstGeom>
+          <a:noFill/>
+          <a:ln/>
+        </p:spPr>
+        <p:txBody>
+          <a:bodyPr wrap="square" lIns="0" tIns="0" rIns="0" bIns="0" rtlCol="0" anchor="t"/>
+          <a:lstStyle/>
+          <a:p>
+            <a:pPr indent="0" marL="0">
+              <a:lnSpc>
+                <a:spcPct val="120000"/>
+              </a:lnSpc>
+              <a:buNone/>
+            </a:pPr>
+            <a:r>
+              <a:rPr lang="en-US" sz="1050" dirty="0">
+                <a:solidFill>
+                  <a:srgbClr val="222222"/>
+                </a:solidFill>
+                <a:latin typeface="Calibri" pitchFamily="34" charset="0"/>
+                <a:ea typeface="Calibri" pitchFamily="34" charset="-122"/>
+                <a:cs typeface="Calibri" pitchFamily="34" charset="-120"/>
+              </a:rPr>
+              <a:t>QRコードのURLは企業ごとに違います。</a:t>
+            </a:r>
+            <a:pPr indent="0" marL="0">
+              <a:lnSpc>
+                <a:spcPct val="120000"/>
+              </a:lnSpc>
+              <a:buNone/>
+            </a:pPr>
+            <a:r>
+              <a:rPr lang="en-US" sz="1050" b="1" dirty="0">
+                <a:solidFill>
+                  <a:srgbClr val="222222"/>
+                </a:solidFill>
+                <a:latin typeface="Calibri" pitchFamily="34" charset="0"/>
+                <a:ea typeface="Calibri" pitchFamily="34" charset="-122"/>
+                <a:cs typeface="Calibri" pitchFamily="34" charset="-120"/>
+              </a:rPr>
+              <a:t>他社のQRコードを掲示しないよう</a:t>
+            </a:r>
+            <a:pPr indent="0" marL="0">
+              <a:lnSpc>
+                <a:spcPct val="120000"/>
+              </a:lnSpc>
+              <a:buNone/>
+            </a:pPr>
+            <a:r>
+              <a:rPr lang="en-US" sz="1050" dirty="0">
+                <a:solidFill>
+                  <a:srgbClr val="222222"/>
+                </a:solidFill>
+                <a:latin typeface="Calibri" pitchFamily="34" charset="0"/>
+                <a:ea typeface="Calibri" pitchFamily="34" charset="-122"/>
+                <a:cs typeface="Calibri" pitchFamily="34" charset="-120"/>
+              </a:rPr>
+              <a:t>ご注意ください。</a:t>
+            </a:r>
+            <a:endParaRPr lang="en-US" sz="1050" dirty="0"/>
+          </a:p>
+        </p:txBody>
+      </p:sp>
+      <p:pic>
+        <p:nvPicPr>
+          <p:cNvPr id="11" name="Image 0" descr="C:\Users\sato\Desktop\enque\docs\images\c-qr.png">    </p:cNvPr>
+          <p:cNvPicPr>
+            <a:picLocks noChangeAspect="1"/>
+          </p:cNvPicPr>
+          <p:nvPr/>
+        </p:nvPicPr>
+        <p:blipFill>
+          <a:blip r:embed="rId1"/>
+          <a:stretch>
+            <a:fillRect/>
+          </a:stretch>
+        </p:blipFill>
+        <p:spPr>
+          <a:xfrm>
+            <a:off x="566928" y="3106738"/>
+            <a:ext cx="6428232" cy="3181485"/>
+          </a:xfrm>
+          <a:prstGeom prst="rect">
+            <a:avLst/>
+          </a:prstGeom>
+        </p:spPr>
+      </p:pic>
+      <p:sp>
+        <p:nvSpPr>
+          <p:cNvPr id="12" name="Text 9"/>
+          <p:cNvSpPr txBox="1"/>
+          <p:nvPr/>
+        </p:nvSpPr>
+        <p:spPr>
+          <a:xfrm>
+            <a:off x="566928" y="6343087"/>
+            <a:ext cx="6428232" cy="274320"/>
+          </a:xfrm>
+          <a:prstGeom prst="rect">
+            <a:avLst/>
+          </a:prstGeom>
+          <a:noFill/>
+          <a:ln/>
+        </p:spPr>
+        <p:txBody>
+          <a:bodyPr wrap="square" lIns="0" tIns="0" rIns="0" bIns="0" rtlCol="0" anchor="ctr"/>
+          <a:lstStyle/>
+          <a:p>
+            <a:pPr algn="ctr" indent="0" marL="0">
+              <a:buNone/>
+            </a:pPr>
+            <a:r>
+              <a:rPr lang="en-US" sz="950" dirty="0">
+                <a:solidFill>
+                  <a:srgbClr val="6B6B6B"/>
+                </a:solidFill>
+                <a:latin typeface="Calibri" pitchFamily="34" charset="0"/>
+                <a:ea typeface="Calibri" pitchFamily="34" charset="-122"/>
+                <a:cs typeface="Calibri" pitchFamily="34" charset="-120"/>
+              </a:rPr>
+              <a:t>QRコードの印刷ページ（自社1社分）。</a:t>
+            </a:r>
+            <a:endParaRPr lang="en-US" sz="950" dirty="0"/>
+          </a:p>
+        </p:txBody>
+      </p:sp>
+      <p:sp>
+        <p:nvSpPr>
+          <p:cNvPr id="13" name="Text 10"/>
+          <p:cNvSpPr txBox="1"/>
+          <p:nvPr/>
+        </p:nvSpPr>
+        <p:spPr>
+          <a:xfrm>
+            <a:off x="566928" y="10186416"/>
+            <a:ext cx="6428232" cy="228600"/>
+          </a:xfrm>
+          <a:prstGeom prst="rect">
+            <a:avLst/>
+          </a:prstGeom>
+          <a:noFill/>
+          <a:ln/>
+        </p:spPr>
+        <p:txBody>
+          <a:bodyPr wrap="square" lIns="0" tIns="0" rIns="0" bIns="0" rtlCol="0" anchor="ctr"/>
+          <a:lstStyle/>
+          <a:p>
+            <a:pPr algn="r" indent="0" marL="0">
+              <a:buNone/>
+            </a:pPr>
+            <a:r>
+              <a:rPr lang="en-US" sz="900" dirty="0">
+                <a:solidFill>
+                  <a:srgbClr val="6B6B6B"/>
+                </a:solidFill>
+                <a:latin typeface="Calibri" pitchFamily="34" charset="0"/>
+                <a:ea typeface="Calibri" pitchFamily="34" charset="-122"/>
+                <a:cs typeface="Calibri" pitchFamily="34" charset="-120"/>
+              </a:rPr>
+              <a:t>企業担当者向け　10</a:t>
+            </a:r>
+            <a:endParaRPr lang="en-US" sz="900" dirty="0"/>
+          </a:p>
+        </p:txBody>
+      </p:sp>
+    </p:spTree>
+  </p:cSld>
+  <p:clrMapOvr>
+    <a:masterClrMapping/>
+  </p:clrMapOvr>
+</p:sld>
+</file>
+
+<file path=ppt/slides/slide11.xml><?xml version="1.0" encoding="utf-8"?>
+<p:sld xmlns:a="http://schemas.openxmlformats.org/drawingml/2006/main" xmlns:r="http://schemas.openxmlformats.org/officeDocument/2006/relationships" xmlns:p="http://schemas.openxmlformats.org/presentationml/2006/main">
+  <p:cSld name="Slide 11">
+    <p:bg>
+      <p:bgPr>
+        <a:solidFill>
+          <a:srgbClr val="FFFFFF"/>
+        </a:solidFill>
+      </p:bgPr>
+    </p:bg>
+    <p:spTree>
+      <p:nvGrpSpPr>
+        <p:cNvPr id="1" name=""/>
+        <p:cNvGrpSpPr/>
+        <p:nvPr/>
+      </p:nvGrpSpPr>
+      <p:grpSpPr>
+        <a:xfrm>
+          <a:off x="0" y="0"/>
+          <a:ext cx="0" cy="0"/>
+          <a:chOff x="0" y="0"/>
+          <a:chExt cx="0" cy="0"/>
+        </a:xfrm>
+      </p:grpSpPr>
+      <p:sp>
+        <p:nvSpPr>
+          <p:cNvPr id="2" name="Text 0"/>
+          <p:cNvSpPr txBox="1"/>
+          <p:nvPr/>
+        </p:nvSpPr>
+        <p:spPr>
+          <a:xfrm>
+            <a:off x="566928" y="457200"/>
+            <a:ext cx="6428232" cy="237744"/>
+          </a:xfrm>
+          <a:prstGeom prst="rect">
+            <a:avLst/>
+          </a:prstGeom>
+          <a:noFill/>
+          <a:ln/>
+        </p:spPr>
+        <p:txBody>
+          <a:bodyPr wrap="square" lIns="0" tIns="0" rIns="0" bIns="0" rtlCol="0" anchor="ctr"/>
+          <a:lstStyle/>
+          <a:p>
+            <a:pPr indent="0" marL="0">
+              <a:buNone/>
+            </a:pPr>
+            <a:r>
+              <a:rPr lang="en-US" sz="1000" b="1" dirty="0">
+                <a:solidFill>
+                  <a:srgbClr val="1C7293"/>
+                </a:solidFill>
+                <a:latin typeface="Calibri" pitchFamily="34" charset="0"/>
+                <a:ea typeface="Calibri" pitchFamily="34" charset="-122"/>
+                <a:cs typeface="Calibri" pitchFamily="34" charset="-120"/>
+              </a:rPr>
+              <a:t>企業担当者マニュアル</a:t>
+            </a:r>
+            <a:endParaRPr lang="en-US" sz="1000" dirty="0"/>
+          </a:p>
+        </p:txBody>
+      </p:sp>
+      <p:sp>
+        <p:nvSpPr>
+          <p:cNvPr id="3" name="Text 1"/>
+          <p:cNvSpPr txBox="1"/>
+          <p:nvPr/>
+        </p:nvSpPr>
+        <p:spPr>
+          <a:xfrm>
+            <a:off x="566928" y="713232"/>
+            <a:ext cx="6428232" cy="640080"/>
+          </a:xfrm>
+          <a:prstGeom prst="rect">
+            <a:avLst/>
+          </a:prstGeom>
+          <a:noFill/>
+          <a:ln/>
+        </p:spPr>
+        <p:txBody>
+          <a:bodyPr wrap="square" lIns="0" tIns="0" rIns="0" bIns="0" rtlCol="0" anchor="t"/>
+          <a:lstStyle/>
+          <a:p>
+            <a:pPr indent="0" marL="0">
+              <a:buNone/>
+            </a:pPr>
+            <a:r>
+              <a:rPr lang="en-US" sz="2200" b="1" dirty="0">
+                <a:solidFill>
+                  <a:srgbClr val="222222"/>
+                </a:solidFill>
+                <a:latin typeface="Calibri" pitchFamily="34" charset="0"/>
+                <a:ea typeface="Calibri" pitchFamily="34" charset="-122"/>
+                <a:cs typeface="Calibri" pitchFamily="34" charset="-120"/>
+              </a:rPr>
               <a:t>よくある質問</a:t>
             </a:r>
             <a:endParaRPr lang="en-US" sz="2200" dirty="0"/>
@@ -2559,7 +3241,7 @@
                 <a:ea typeface="Calibri" pitchFamily="34" charset="-122"/>
                 <a:cs typeface="Calibri" pitchFamily="34" charset="-120"/>
               </a:rPr>
-              <a:t>企業担当者向け　10</a:t>
+              <a:t>企業担当者向け　11</a:t>
             </a:r>
             <a:endParaRPr lang="en-US" sz="900" dirty="0"/>
           </a:p>
@@ -7555,8 +8237,8 @@
         </p:nvSpPr>
         <p:spPr>
           <a:xfrm>
-            <a:off x="566928" y="3767900"/>
-            <a:ext cx="6428232" cy="257810"/>
+            <a:off x="566928" y="3658172"/>
+            <a:ext cx="6428232" cy="459994"/>
           </a:xfrm>
           <a:prstGeom prst="rect">
             <a:avLst/>
@@ -7569,20 +8251,91 @@
           <a:lstStyle/>
           <a:p>
             <a:pPr indent="0" marL="0">
-              <a:buNone/>
-            </a:pPr>
-            <a:r>
-              <a:rPr lang="en-US" sz="1400" b="1" dirty="0">
-                <a:solidFill>
-                  <a:srgbClr val="1C7293"/>
-                </a:solidFill>
-                <a:latin typeface="Calibri" pitchFamily="34" charset="0"/>
-                <a:ea typeface="Calibri" pitchFamily="34" charset="-122"/>
-                <a:cs typeface="Calibri" pitchFamily="34" charset="-120"/>
-              </a:rPr>
-              <a:t>同じ来場者が2回答えたとき</a:t>
-            </a:r>
-            <a:endParaRPr lang="en-US" sz="1400" dirty="0"/>
+              <a:lnSpc>
+                <a:spcPct val="125000"/>
+              </a:lnSpc>
+              <a:buNone/>
+            </a:pPr>
+            <a:r>
+              <a:rPr lang="en-US" sz="1100" dirty="0">
+                <a:solidFill>
+                  <a:srgbClr val="222222"/>
+                </a:solidFill>
+                <a:latin typeface="Calibri" pitchFamily="34" charset="0"/>
+                <a:ea typeface="Calibri" pitchFamily="34" charset="-122"/>
+                <a:cs typeface="Calibri" pitchFamily="34" charset="-120"/>
+              </a:rPr>
+              <a:t>設問ごとのグラフは、上が</a:t>
+            </a:r>
+            <a:pPr indent="0" marL="0">
+              <a:lnSpc>
+                <a:spcPct val="125000"/>
+              </a:lnSpc>
+              <a:buNone/>
+            </a:pPr>
+            <a:r>
+              <a:rPr lang="en-US" sz="1100" b="1" dirty="0">
+                <a:solidFill>
+                  <a:srgbClr val="222222"/>
+                </a:solidFill>
+                <a:latin typeface="Calibri" pitchFamily="34" charset="0"/>
+                <a:ea typeface="Calibri" pitchFamily="34" charset="-122"/>
+                <a:cs typeface="Calibri" pitchFamily="34" charset="-120"/>
+              </a:rPr>
+              <a:t>帯グラフ</a:t>
+            </a:r>
+            <a:pPr indent="0" marL="0">
+              <a:lnSpc>
+                <a:spcPct val="125000"/>
+              </a:lnSpc>
+              <a:buNone/>
+            </a:pPr>
+            <a:r>
+              <a:rPr lang="en-US" sz="1100" dirty="0">
+                <a:solidFill>
+                  <a:srgbClr val="222222"/>
+                </a:solidFill>
+                <a:latin typeface="Calibri" pitchFamily="34" charset="0"/>
+                <a:ea typeface="Calibri" pitchFamily="34" charset="-122"/>
+                <a:cs typeface="Calibri" pitchFamily="34" charset="-120"/>
+              </a:rPr>
+              <a:t>（全体を100%とした構成比）、下が</a:t>
+            </a:r>
+            <a:pPr indent="0" marL="0">
+              <a:lnSpc>
+                <a:spcPct val="125000"/>
+              </a:lnSpc>
+              <a:buNone/>
+            </a:pPr>
+            <a:r>
+              <a:rPr lang="en-US" sz="1100" b="1" dirty="0">
+                <a:solidFill>
+                  <a:srgbClr val="222222"/>
+                </a:solidFill>
+                <a:latin typeface="Calibri" pitchFamily="34" charset="0"/>
+                <a:ea typeface="Calibri" pitchFamily="34" charset="-122"/>
+                <a:cs typeface="Calibri" pitchFamily="34" charset="-120"/>
+              </a:rPr>
+              <a:t>横棒グラフ</a:t>
+            </a:r>
+            <a:pPr indent="0" marL="0">
+              <a:lnSpc>
+                <a:spcPct val="125000"/>
+              </a:lnSpc>
+              <a:buNone/>
+            </a:pPr>
+            <a:r>
+              <a:rPr lang="en-US" sz="1100" dirty="0">
+                <a:solidFill>
+                  <a:srgbClr val="222222"/>
+                </a:solidFill>
+                <a:latin typeface="Calibri" pitchFamily="34" charset="0"/>
+                <a:ea typeface="Calibri" pitchFamily="34" charset="-122"/>
+                <a:cs typeface="Calibri" pitchFamily="34" charset="-120"/>
+              </a:rPr>
+              <a:t>（項目ごとの件数）です。</a:t>
+            </a:r>
+            <a:endParaRPr lang="en-US" sz="1100" dirty="0"/>
           </a:p>
         </p:txBody>
       </p:sp>
@@ -7594,7 +8347,7 @@
         </p:nvSpPr>
         <p:spPr>
           <a:xfrm>
-            <a:off x="566928" y="4098862"/>
+            <a:off x="566928" y="4154742"/>
             <a:ext cx="6428232" cy="459994"/>
           </a:xfrm>
           <a:prstGeom prst="rect">
@@ -7622,7 +8375,7 @@
                 <a:ea typeface="Calibri" pitchFamily="34" charset="-122"/>
                 <a:cs typeface="Calibri" pitchFamily="34" charset="-120"/>
               </a:rPr>
-              <a:t>同じ方が自社のQRコードをもう一度読み取ると、来場者の画面には</a:t>
+              <a:t>棒の長さは</a:t>
             </a:r>
             <a:pPr indent="0" marL="0">
               <a:lnSpc>
@@ -7639,7 +8392,7 @@
                 <a:ea typeface="Calibri" pitchFamily="34" charset="-122"/>
                 <a:cs typeface="Calibri" pitchFamily="34" charset="-120"/>
               </a:rPr>
-              <a:t>前回の回答が入った状態</a:t>
+              <a:t>全体に対する割合</a:t>
             </a:r>
             <a:pPr indent="0" marL="0">
               <a:lnSpc>
@@ -7656,41 +8409,7 @@
                 <a:ea typeface="Calibri" pitchFamily="34" charset="-122"/>
                 <a:cs typeface="Calibri" pitchFamily="34" charset="-120"/>
               </a:rPr>
-              <a:t>で表示され、書き換えると</a:t>
-            </a:r>
-            <a:pPr indent="0" marL="0">
-              <a:lnSpc>
-                <a:spcPct val="125000"/>
-              </a:lnSpc>
-              <a:buNone/>
-            </a:pPr>
-            <a:r>
-              <a:rPr lang="en-US" sz="1100" b="1" dirty="0">
-                <a:solidFill>
-                  <a:srgbClr val="222222"/>
-                </a:solidFill>
-                <a:latin typeface="Calibri" pitchFamily="34" charset="0"/>
-                <a:ea typeface="Calibri" pitchFamily="34" charset="-122"/>
-                <a:cs typeface="Calibri" pitchFamily="34" charset="-120"/>
-              </a:rPr>
-              <a:t>前の回答が置き換わります</a:t>
-            </a:r>
-            <a:pPr indent="0" marL="0">
-              <a:lnSpc>
-                <a:spcPct val="125000"/>
-              </a:lnSpc>
-              <a:buNone/>
-            </a:pPr>
-            <a:r>
-              <a:rPr lang="en-US" sz="1100" dirty="0">
-                <a:solidFill>
-                  <a:srgbClr val="222222"/>
-                </a:solidFill>
-                <a:latin typeface="Calibri" pitchFamily="34" charset="0"/>
-                <a:ea typeface="Calibri" pitchFamily="34" charset="-122"/>
-                <a:cs typeface="Calibri" pitchFamily="34" charset="-120"/>
-              </a:rPr>
-              <a:t>。回答数は増えません。</a:t>
+              <a:t>で、灰色の下地がちょうど100%にあたります。色の意味は帯の下の凡例で読みます。</a:t>
             </a:r>
             <a:endParaRPr lang="en-US" sz="1100" dirty="0"/>
           </a:p>
@@ -7704,7 +8423,7 @@
         </p:nvSpPr>
         <p:spPr>
           <a:xfrm>
-            <a:off x="566928" y="4595432"/>
+            <a:off x="566928" y="4651312"/>
             <a:ext cx="6428232" cy="624459"/>
           </a:xfrm>
           <a:prstGeom prst="roundRect">
@@ -7731,7 +8450,7 @@
         </p:nvSpPr>
         <p:spPr>
           <a:xfrm>
-            <a:off x="658368" y="4686871"/>
+            <a:off x="658368" y="4742752"/>
             <a:ext cx="237744" cy="237744"/>
           </a:xfrm>
           <a:prstGeom prst="rect">
@@ -7770,7 +8489,7 @@
         </p:nvSpPr>
         <p:spPr>
           <a:xfrm>
-            <a:off x="950976" y="4705160"/>
+            <a:off x="950976" y="4761040"/>
             <a:ext cx="5925312" cy="441579"/>
           </a:xfrm>
           <a:prstGeom prst="rect">
@@ -7790,6 +8509,23 @@
               <a:buNone/>
             </a:pPr>
             <a:r>
+              <a:rPr lang="en-US" sz="1050" b="1" dirty="0">
+                <a:solidFill>
+                  <a:srgbClr val="222222"/>
+                </a:solidFill>
+                <a:latin typeface="Calibri" pitchFamily="34" charset="0"/>
+                <a:ea typeface="Calibri" pitchFamily="34" charset="-122"/>
+                <a:cs typeface="Calibri" pitchFamily="34" charset="-120"/>
+              </a:rPr>
+              <a:t>複数選択の設問には帯グラフが出ません。</a:t>
+            </a:r>
+            <a:pPr indent="0" marL="0">
+              <a:lnSpc>
+                <a:spcPct val="120000"/>
+              </a:lnSpc>
+              <a:buNone/>
+            </a:pPr>
+            <a:r>
               <a:rPr lang="en-US" sz="1050" dirty="0">
                 <a:solidFill>
                   <a:srgbClr val="222222"/>
@@ -7798,6 +8534,263 @@
                 <a:ea typeface="Calibri" pitchFamily="34" charset="-122"/>
                 <a:cs typeface="Calibri" pitchFamily="34" charset="-120"/>
               </a:rPr>
+              <a:t> 1人が2つ以上選べるため、割合の合計が100%を超えるからです。</a:t>
+            </a:r>
+            <a:endParaRPr lang="en-US" sz="1050" dirty="0"/>
+          </a:p>
+        </p:txBody>
+      </p:sp>
+      <p:sp>
+        <p:nvSpPr>
+          <p:cNvPr id="18" name="Text 16"/>
+          <p:cNvSpPr txBox="1"/>
+          <p:nvPr/>
+        </p:nvSpPr>
+        <p:spPr>
+          <a:xfrm>
+            <a:off x="566928" y="5458651"/>
+            <a:ext cx="6428232" cy="257810"/>
+          </a:xfrm>
+          <a:prstGeom prst="rect">
+            <a:avLst/>
+          </a:prstGeom>
+          <a:noFill/>
+          <a:ln/>
+        </p:spPr>
+        <p:txBody>
+          <a:bodyPr wrap="square" lIns="0" tIns="0" rIns="0" bIns="0" rtlCol="0" anchor="t"/>
+          <a:lstStyle/>
+          <a:p>
+            <a:pPr indent="0" marL="0">
+              <a:buNone/>
+            </a:pPr>
+            <a:r>
+              <a:rPr lang="en-US" sz="1400" b="1" dirty="0">
+                <a:solidFill>
+                  <a:srgbClr val="1C7293"/>
+                </a:solidFill>
+                <a:latin typeface="Calibri" pitchFamily="34" charset="0"/>
+                <a:ea typeface="Calibri" pitchFamily="34" charset="-122"/>
+                <a:cs typeface="Calibri" pitchFamily="34" charset="-120"/>
+              </a:rPr>
+              <a:t>同じ来場者が2回答えたとき</a:t>
+            </a:r>
+            <a:endParaRPr lang="en-US" sz="1400" dirty="0"/>
+          </a:p>
+        </p:txBody>
+      </p:sp>
+      <p:sp>
+        <p:nvSpPr>
+          <p:cNvPr id="19" name="Text 17"/>
+          <p:cNvSpPr txBox="1"/>
+          <p:nvPr/>
+        </p:nvSpPr>
+        <p:spPr>
+          <a:xfrm>
+            <a:off x="566928" y="5789613"/>
+            <a:ext cx="6428232" cy="459994"/>
+          </a:xfrm>
+          <a:prstGeom prst="rect">
+            <a:avLst/>
+          </a:prstGeom>
+          <a:noFill/>
+          <a:ln/>
+        </p:spPr>
+        <p:txBody>
+          <a:bodyPr wrap="square" lIns="0" tIns="0" rIns="0" bIns="0" rtlCol="0" anchor="t"/>
+          <a:lstStyle/>
+          <a:p>
+            <a:pPr indent="0" marL="0">
+              <a:lnSpc>
+                <a:spcPct val="125000"/>
+              </a:lnSpc>
+              <a:buNone/>
+            </a:pPr>
+            <a:r>
+              <a:rPr lang="en-US" sz="1100" dirty="0">
+                <a:solidFill>
+                  <a:srgbClr val="222222"/>
+                </a:solidFill>
+                <a:latin typeface="Calibri" pitchFamily="34" charset="0"/>
+                <a:ea typeface="Calibri" pitchFamily="34" charset="-122"/>
+                <a:cs typeface="Calibri" pitchFamily="34" charset="-120"/>
+              </a:rPr>
+              <a:t>同じ方が自社のQRコードをもう一度読み取ると、来場者の画面には</a:t>
+            </a:r>
+            <a:pPr indent="0" marL="0">
+              <a:lnSpc>
+                <a:spcPct val="125000"/>
+              </a:lnSpc>
+              <a:buNone/>
+            </a:pPr>
+            <a:r>
+              <a:rPr lang="en-US" sz="1100" b="1" dirty="0">
+                <a:solidFill>
+                  <a:srgbClr val="222222"/>
+                </a:solidFill>
+                <a:latin typeface="Calibri" pitchFamily="34" charset="0"/>
+                <a:ea typeface="Calibri" pitchFamily="34" charset="-122"/>
+                <a:cs typeface="Calibri" pitchFamily="34" charset="-120"/>
+              </a:rPr>
+              <a:t>前回の回答が入った状態</a:t>
+            </a:r>
+            <a:pPr indent="0" marL="0">
+              <a:lnSpc>
+                <a:spcPct val="125000"/>
+              </a:lnSpc>
+              <a:buNone/>
+            </a:pPr>
+            <a:r>
+              <a:rPr lang="en-US" sz="1100" dirty="0">
+                <a:solidFill>
+                  <a:srgbClr val="222222"/>
+                </a:solidFill>
+                <a:latin typeface="Calibri" pitchFamily="34" charset="0"/>
+                <a:ea typeface="Calibri" pitchFamily="34" charset="-122"/>
+                <a:cs typeface="Calibri" pitchFamily="34" charset="-120"/>
+              </a:rPr>
+              <a:t>で表示され、書き換えると</a:t>
+            </a:r>
+            <a:pPr indent="0" marL="0">
+              <a:lnSpc>
+                <a:spcPct val="125000"/>
+              </a:lnSpc>
+              <a:buNone/>
+            </a:pPr>
+            <a:r>
+              <a:rPr lang="en-US" sz="1100" b="1" dirty="0">
+                <a:solidFill>
+                  <a:srgbClr val="222222"/>
+                </a:solidFill>
+                <a:latin typeface="Calibri" pitchFamily="34" charset="0"/>
+                <a:ea typeface="Calibri" pitchFamily="34" charset="-122"/>
+                <a:cs typeface="Calibri" pitchFamily="34" charset="-120"/>
+              </a:rPr>
+              <a:t>前の回答が置き換わります</a:t>
+            </a:r>
+            <a:pPr indent="0" marL="0">
+              <a:lnSpc>
+                <a:spcPct val="125000"/>
+              </a:lnSpc>
+              <a:buNone/>
+            </a:pPr>
+            <a:r>
+              <a:rPr lang="en-US" sz="1100" dirty="0">
+                <a:solidFill>
+                  <a:srgbClr val="222222"/>
+                </a:solidFill>
+                <a:latin typeface="Calibri" pitchFamily="34" charset="0"/>
+                <a:ea typeface="Calibri" pitchFamily="34" charset="-122"/>
+                <a:cs typeface="Calibri" pitchFamily="34" charset="-120"/>
+              </a:rPr>
+              <a:t>。回答数は増えません。</a:t>
+            </a:r>
+            <a:endParaRPr lang="en-US" sz="1100" dirty="0"/>
+          </a:p>
+        </p:txBody>
+      </p:sp>
+      <p:sp>
+        <p:nvSpPr>
+          <p:cNvPr id="20" name="Shape 18"/>
+          <p:cNvSpPr/>
+          <p:nvPr/>
+        </p:nvSpPr>
+        <p:spPr>
+          <a:xfrm>
+            <a:off x="566928" y="6286183"/>
+            <a:ext cx="6428232" cy="624459"/>
+          </a:xfrm>
+          <a:prstGeom prst="roundRect">
+            <a:avLst>
+              <a:gd name="adj" fmla="val 8786"/>
+            </a:avLst>
+          </a:prstGeom>
+          <a:solidFill>
+            <a:srgbClr val="FDF0E6"/>
+          </a:solidFill>
+          <a:ln w="9525">
+            <a:solidFill>
+              <a:srgbClr val="E08A3C"/>
+            </a:solidFill>
+            <a:prstDash val="solid"/>
+          </a:ln>
+        </p:spPr>
+      </p:sp>
+      <p:sp>
+        <p:nvSpPr>
+          <p:cNvPr id="21" name="Text 19"/>
+          <p:cNvSpPr txBox="1"/>
+          <p:nvPr/>
+        </p:nvSpPr>
+        <p:spPr>
+          <a:xfrm>
+            <a:off x="658368" y="6377622"/>
+            <a:ext cx="237744" cy="237744"/>
+          </a:xfrm>
+          <a:prstGeom prst="rect">
+            <a:avLst/>
+          </a:prstGeom>
+          <a:noFill/>
+          <a:ln/>
+        </p:spPr>
+        <p:txBody>
+          <a:bodyPr wrap="square" lIns="0" tIns="0" rIns="0" bIns="0" rtlCol="0" anchor="ctr"/>
+          <a:lstStyle/>
+          <a:p>
+            <a:pPr algn="ctr" indent="0" marL="0">
+              <a:buNone/>
+            </a:pPr>
+            <a:r>
+              <a:rPr lang="en-US" sz="1200" b="1" dirty="0">
+                <a:solidFill>
+                  <a:srgbClr val="C25A17"/>
+                </a:solidFill>
+                <a:latin typeface="Calibri" pitchFamily="34" charset="0"/>
+                <a:ea typeface="Calibri" pitchFamily="34" charset="-122"/>
+                <a:cs typeface="Calibri" pitchFamily="34" charset="-120"/>
+              </a:rPr>
+              <a:t>！</a:t>
+            </a:r>
+            <a:endParaRPr lang="en-US" sz="1200" dirty="0"/>
+          </a:p>
+        </p:txBody>
+      </p:sp>
+      <p:sp>
+        <p:nvSpPr>
+          <p:cNvPr id="22" name="Text 20"/>
+          <p:cNvSpPr txBox="1"/>
+          <p:nvPr/>
+        </p:nvSpPr>
+        <p:spPr>
+          <a:xfrm>
+            <a:off x="950976" y="6395911"/>
+            <a:ext cx="5925312" cy="441579"/>
+          </a:xfrm>
+          <a:prstGeom prst="rect">
+            <a:avLst/>
+          </a:prstGeom>
+          <a:noFill/>
+          <a:ln/>
+        </p:spPr>
+        <p:txBody>
+          <a:bodyPr wrap="square" lIns="0" tIns="0" rIns="0" bIns="0" rtlCol="0" anchor="t"/>
+          <a:lstStyle/>
+          <a:p>
+            <a:pPr indent="0" marL="0">
+              <a:lnSpc>
+                <a:spcPct val="120000"/>
+              </a:lnSpc>
+              <a:buNone/>
+            </a:pPr>
+            <a:r>
+              <a:rPr lang="en-US" sz="1050" dirty="0">
+                <a:solidFill>
+                  <a:srgbClr val="222222"/>
+                </a:solidFill>
+                <a:latin typeface="Calibri" pitchFamily="34" charset="0"/>
+                <a:ea typeface="Calibri" pitchFamily="34" charset="-122"/>
+                <a:cs typeface="Calibri" pitchFamily="34" charset="-120"/>
+              </a:rPr>
               <a:t>このため、</a:t>
             </a:r>
             <a:pPr indent="0" marL="0">
@@ -7838,72 +8831,9 @@
           </a:p>
         </p:txBody>
       </p:sp>
-      <p:pic>
-        <p:nvPicPr>
-          <p:cNvPr id="18" name="Image 0" descr="C:\Users\sato\Desktop\enque\docs\images\c-stats.png">    </p:cNvPr>
-          <p:cNvPicPr>
-            <a:picLocks noChangeAspect="1"/>
-          </p:cNvPicPr>
-          <p:nvPr/>
-        </p:nvPicPr>
-        <p:blipFill>
-          <a:blip r:embed="rId1"/>
-          <a:stretch>
-            <a:fillRect/>
-          </a:stretch>
-        </p:blipFill>
-        <p:spPr>
-          <a:xfrm>
-            <a:off x="2140821" y="5293043"/>
-            <a:ext cx="3280447" cy="3474720"/>
-          </a:xfrm>
-          <a:prstGeom prst="rect">
-            <a:avLst/>
-          </a:prstGeom>
-        </p:spPr>
-      </p:pic>
-      <p:sp>
-        <p:nvSpPr>
-          <p:cNvPr id="19" name="Text 16"/>
-          <p:cNvSpPr txBox="1"/>
-          <p:nvPr/>
-        </p:nvSpPr>
-        <p:spPr>
-          <a:xfrm>
-            <a:off x="566928" y="8822627"/>
-            <a:ext cx="6428232" cy="274320"/>
-          </a:xfrm>
-          <a:prstGeom prst="rect">
-            <a:avLst/>
-          </a:prstGeom>
-          <a:noFill/>
-          <a:ln/>
-        </p:spPr>
-        <p:txBody>
-          <a:bodyPr wrap="square" lIns="0" tIns="0" rIns="0" bIns="0" rtlCol="0" anchor="ctr"/>
-          <a:lstStyle/>
-          <a:p>
-            <a:pPr algn="ctr" indent="0" marL="0">
-              <a:buNone/>
-            </a:pPr>
-            <a:r>
-              <a:rPr lang="en-US" sz="950" dirty="0">
-                <a:solidFill>
-                  <a:srgbClr val="6B6B6B"/>
-                </a:solidFill>
-                <a:latin typeface="Calibri" pitchFamily="34" charset="0"/>
-                <a:ea typeface="Calibri" pitchFamily="34" charset="-122"/>
-                <a:cs typeface="Calibri" pitchFamily="34" charset="-120"/>
-              </a:rPr>
-              <a:t>設問ごとの集計グラフ（棒グラフとNPS・星評価の数字が見えるもの）。</a:t>
-            </a:r>
-            <a:endParaRPr lang="en-US" sz="950" dirty="0"/>
-          </a:p>
-        </p:txBody>
-      </p:sp>
-      <p:sp>
-        <p:nvSpPr>
-          <p:cNvPr id="20" name="Text 17"/>
+      <p:sp>
+        <p:nvSpPr>
+          <p:cNvPr id="23" name="Text 21"/>
           <p:cNvSpPr txBox="1"/>
           <p:nvPr/>
         </p:nvSpPr>
@@ -8044,499 +8974,15 @@
                 <a:ea typeface="Calibri" pitchFamily="34" charset="-122"/>
                 <a:cs typeface="Calibri" pitchFamily="34" charset="-120"/>
               </a:rPr>
-              <a:t>回答の一覧とCSV</a:t>
+              <a:t>回答状況を見る（つづき）</a:t>
             </a:r>
             <a:endParaRPr lang="en-US" sz="2200" dirty="0"/>
-          </a:p>
-        </p:txBody>
-      </p:sp>
-      <p:sp>
-        <p:nvSpPr>
-          <p:cNvPr id="4" name="Text 2"/>
-          <p:cNvSpPr txBox="1"/>
-          <p:nvPr/>
-        </p:nvSpPr>
-        <p:spPr>
-          <a:xfrm>
-            <a:off x="566928" y="1591056"/>
-            <a:ext cx="6428232" cy="257810"/>
-          </a:xfrm>
-          <a:prstGeom prst="rect">
-            <a:avLst/>
-          </a:prstGeom>
-          <a:noFill/>
-          <a:ln/>
-        </p:spPr>
-        <p:txBody>
-          <a:bodyPr wrap="square" lIns="0" tIns="0" rIns="0" bIns="0" rtlCol="0" anchor="t"/>
-          <a:lstStyle/>
-          <a:p>
-            <a:pPr indent="0" marL="0">
-              <a:buNone/>
-            </a:pPr>
-            <a:r>
-              <a:rPr lang="en-US" sz="1400" b="1" dirty="0">
-                <a:solidFill>
-                  <a:srgbClr val="1C7293"/>
-                </a:solidFill>
-                <a:latin typeface="Calibri" pitchFamily="34" charset="0"/>
-                <a:ea typeface="Calibri" pitchFamily="34" charset="-122"/>
-                <a:cs typeface="Calibri" pitchFamily="34" charset="-120"/>
-              </a:rPr>
-              <a:t>一覧で見る</a:t>
-            </a:r>
-            <a:endParaRPr lang="en-US" sz="1400" dirty="0"/>
-          </a:p>
-        </p:txBody>
-      </p:sp>
-      <p:sp>
-        <p:nvSpPr>
-          <p:cNvPr id="5" name="Text 3"/>
-          <p:cNvSpPr txBox="1"/>
-          <p:nvPr/>
-        </p:nvSpPr>
-        <p:spPr>
-          <a:xfrm>
-            <a:off x="566928" y="1922018"/>
-            <a:ext cx="6428232" cy="459994"/>
-          </a:xfrm>
-          <a:prstGeom prst="rect">
-            <a:avLst/>
-          </a:prstGeom>
-          <a:noFill/>
-          <a:ln/>
-        </p:spPr>
-        <p:txBody>
-          <a:bodyPr wrap="square" lIns="0" tIns="0" rIns="0" bIns="0" rtlCol="0" anchor="t"/>
-          <a:lstStyle/>
-          <a:p>
-            <a:pPr indent="0" marL="0">
-              <a:lnSpc>
-                <a:spcPct val="125000"/>
-              </a:lnSpc>
-              <a:buNone/>
-            </a:pPr>
-            <a:r>
-              <a:rPr lang="en-US" sz="1100" dirty="0">
-                <a:solidFill>
-                  <a:srgbClr val="222222"/>
-                </a:solidFill>
-                <a:latin typeface="Calibri" pitchFamily="34" charset="0"/>
-                <a:ea typeface="Calibri" pitchFamily="34" charset="-122"/>
-                <a:cs typeface="Calibri" pitchFamily="34" charset="-120"/>
-              </a:rPr>
-              <a:t>ダッシュボードの</a:t>
-            </a:r>
-            <a:pPr indent="0" marL="0">
-              <a:lnSpc>
-                <a:spcPct val="125000"/>
-              </a:lnSpc>
-              <a:buNone/>
-            </a:pPr>
-            <a:r>
-              <a:rPr lang="en-US" sz="1100" b="1" dirty="0">
-                <a:solidFill>
-                  <a:srgbClr val="222222"/>
-                </a:solidFill>
-                <a:latin typeface="Calibri" pitchFamily="34" charset="0"/>
-                <a:ea typeface="Calibri" pitchFamily="34" charset="-122"/>
-                <a:cs typeface="Calibri" pitchFamily="34" charset="-120"/>
-              </a:rPr>
-              <a:t>「回答一覧」</a:t>
-            </a:r>
-            <a:pPr indent="0" marL="0">
-              <a:lnSpc>
-                <a:spcPct val="125000"/>
-              </a:lnSpc>
-              <a:buNone/>
-            </a:pPr>
-            <a:r>
-              <a:rPr lang="en-US" sz="1100" dirty="0">
-                <a:solidFill>
-                  <a:srgbClr val="222222"/>
-                </a:solidFill>
-                <a:latin typeface="Calibri" pitchFamily="34" charset="0"/>
-                <a:ea typeface="Calibri" pitchFamily="34" charset="-122"/>
-                <a:cs typeface="Calibri" pitchFamily="34" charset="-120"/>
-              </a:rPr>
-              <a:t>を押すと、1件ずつの回答内容を新しい順に確認できます（1ページ50件）。</a:t>
-            </a:r>
-            <a:endParaRPr lang="en-US" sz="1100" dirty="0"/>
-          </a:p>
-        </p:txBody>
-      </p:sp>
-      <p:sp>
-        <p:nvSpPr>
-          <p:cNvPr id="6" name="Text 4"/>
-          <p:cNvSpPr txBox="1"/>
-          <p:nvPr/>
-        </p:nvSpPr>
-        <p:spPr>
-          <a:xfrm>
-            <a:off x="566928" y="2528316"/>
-            <a:ext cx="6428232" cy="257810"/>
-          </a:xfrm>
-          <a:prstGeom prst="rect">
-            <a:avLst/>
-          </a:prstGeom>
-          <a:noFill/>
-          <a:ln/>
-        </p:spPr>
-        <p:txBody>
-          <a:bodyPr wrap="square" lIns="0" tIns="0" rIns="0" bIns="0" rtlCol="0" anchor="t"/>
-          <a:lstStyle/>
-          <a:p>
-            <a:pPr indent="0" marL="0">
-              <a:buNone/>
-            </a:pPr>
-            <a:r>
-              <a:rPr lang="en-US" sz="1400" b="1" dirty="0">
-                <a:solidFill>
-                  <a:srgbClr val="1C7293"/>
-                </a:solidFill>
-                <a:latin typeface="Calibri" pitchFamily="34" charset="0"/>
-                <a:ea typeface="Calibri" pitchFamily="34" charset="-122"/>
-                <a:cs typeface="Calibri" pitchFamily="34" charset="-120"/>
-              </a:rPr>
-              <a:t>CSVでダウンロードする</a:t>
-            </a:r>
-            <a:endParaRPr lang="en-US" sz="1400" dirty="0"/>
-          </a:p>
-        </p:txBody>
-      </p:sp>
-      <p:sp>
-        <p:nvSpPr>
-          <p:cNvPr id="7" name="Text 5"/>
-          <p:cNvSpPr txBox="1"/>
-          <p:nvPr/>
-        </p:nvSpPr>
-        <p:spPr>
-          <a:xfrm>
-            <a:off x="566928" y="2859278"/>
-            <a:ext cx="6428232" cy="257429"/>
-          </a:xfrm>
-          <a:prstGeom prst="rect">
-            <a:avLst/>
-          </a:prstGeom>
-          <a:noFill/>
-          <a:ln/>
-        </p:spPr>
-        <p:txBody>
-          <a:bodyPr wrap="square" lIns="0" tIns="0" rIns="0" bIns="0" rtlCol="0" anchor="t"/>
-          <a:lstStyle/>
-          <a:p>
-            <a:pPr indent="0" marL="0">
-              <a:lnSpc>
-                <a:spcPct val="125000"/>
-              </a:lnSpc>
-              <a:buNone/>
-            </a:pPr>
-            <a:r>
-              <a:rPr lang="en-US" sz="1100" b="1" dirty="0">
-                <a:solidFill>
-                  <a:srgbClr val="222222"/>
-                </a:solidFill>
-                <a:latin typeface="Calibri" pitchFamily="34" charset="0"/>
-                <a:ea typeface="Calibri" pitchFamily="34" charset="-122"/>
-                <a:cs typeface="Calibri" pitchFamily="34" charset="-120"/>
-              </a:rPr>
-              <a:t>「CSVダウンロード」</a:t>
-            </a:r>
-            <a:pPr indent="0" marL="0">
-              <a:lnSpc>
-                <a:spcPct val="125000"/>
-              </a:lnSpc>
-              <a:buNone/>
-            </a:pPr>
-            <a:r>
-              <a:rPr lang="en-US" sz="1100" dirty="0">
-                <a:solidFill>
-                  <a:srgbClr val="222222"/>
-                </a:solidFill>
-                <a:latin typeface="Calibri" pitchFamily="34" charset="0"/>
-                <a:ea typeface="Calibri" pitchFamily="34" charset="-122"/>
-                <a:cs typeface="Calibri" pitchFamily="34" charset="-120"/>
-              </a:rPr>
-              <a:t>を押すと、自社ぶんの回答がCSVファイルで保存されます。</a:t>
-            </a:r>
-            <a:endParaRPr lang="en-US" sz="1100" dirty="0"/>
-          </a:p>
-        </p:txBody>
-      </p:sp>
-      <p:sp>
-        <p:nvSpPr>
-          <p:cNvPr id="8" name="Text 6"/>
-          <p:cNvSpPr txBox="1"/>
-          <p:nvPr/>
-        </p:nvSpPr>
-        <p:spPr>
-          <a:xfrm>
-            <a:off x="713232" y="3153283"/>
-            <a:ext cx="6281928" cy="257429"/>
-          </a:xfrm>
-          <a:prstGeom prst="rect">
-            <a:avLst/>
-          </a:prstGeom>
-          <a:noFill/>
-          <a:ln/>
-        </p:spPr>
-        <p:txBody>
-          <a:bodyPr wrap="square" lIns="0" tIns="0" rIns="0" bIns="0" rtlCol="0" anchor="t"/>
-          <a:lstStyle/>
-          <a:p>
-            <a:pPr marL="342900" indent="-342900">
-              <a:lnSpc>
-                <a:spcPct val="125000"/>
-              </a:lnSpc>
-              <a:buSzPct val="100000"/>
-              <a:buChar char="●"/>
-            </a:pPr>
-            <a:r>
-              <a:rPr lang="en-US" sz="1100" b="1" dirty="0">
-                <a:solidFill>
-                  <a:srgbClr val="222222"/>
-                </a:solidFill>
-                <a:latin typeface="Calibri" pitchFamily="34" charset="0"/>
-                <a:ea typeface="Calibri" pitchFamily="34" charset="-122"/>
-                <a:cs typeface="Calibri" pitchFamily="34" charset="-120"/>
-              </a:rPr>
-              <a:t>UTF-8（BOM付き）</a:t>
-            </a:r>
-            <a:pPr indent="0" marL="0">
-              <a:lnSpc>
-                <a:spcPct val="125000"/>
-              </a:lnSpc>
-              <a:buNone/>
-            </a:pPr>
-            <a:r>
-              <a:rPr lang="en-US" sz="1100" dirty="0">
-                <a:solidFill>
-                  <a:srgbClr val="222222"/>
-                </a:solidFill>
-                <a:latin typeface="Calibri" pitchFamily="34" charset="0"/>
-                <a:ea typeface="Calibri" pitchFamily="34" charset="-122"/>
-                <a:cs typeface="Calibri" pitchFamily="34" charset="-120"/>
-              </a:rPr>
-              <a:t>なので、Excelでそのまま開けます</a:t>
-            </a:r>
-            <a:endParaRPr lang="en-US" sz="1100" dirty="0"/>
-          </a:p>
-        </p:txBody>
-      </p:sp>
-      <p:sp>
-        <p:nvSpPr>
-          <p:cNvPr id="9" name="Text 7"/>
-          <p:cNvSpPr txBox="1"/>
-          <p:nvPr/>
-        </p:nvSpPr>
-        <p:spPr>
-          <a:xfrm>
-            <a:off x="713232" y="3429000"/>
-            <a:ext cx="6281928" cy="257429"/>
-          </a:xfrm>
-          <a:prstGeom prst="rect">
-            <a:avLst/>
-          </a:prstGeom>
-          <a:noFill/>
-          <a:ln/>
-        </p:spPr>
-        <p:txBody>
-          <a:bodyPr wrap="square" lIns="0" tIns="0" rIns="0" bIns="0" rtlCol="0" anchor="t"/>
-          <a:lstStyle/>
-          <a:p>
-            <a:pPr marL="342900" indent="-342900">
-              <a:lnSpc>
-                <a:spcPct val="125000"/>
-              </a:lnSpc>
-              <a:buSzPct val="100000"/>
-              <a:buChar char="●"/>
-            </a:pPr>
-            <a:r>
-              <a:rPr lang="en-US" sz="1100" dirty="0">
-                <a:solidFill>
-                  <a:srgbClr val="222222"/>
-                </a:solidFill>
-                <a:latin typeface="Calibri" pitchFamily="34" charset="0"/>
-                <a:ea typeface="Calibri" pitchFamily="34" charset="-122"/>
-                <a:cs typeface="Calibri" pitchFamily="34" charset="-120"/>
-              </a:rPr>
-              <a:t>1行が1件の回答、設問が列になります</a:t>
-            </a:r>
-            <a:endParaRPr lang="en-US" sz="1100" dirty="0"/>
-          </a:p>
-        </p:txBody>
-      </p:sp>
-      <p:sp>
-        <p:nvSpPr>
-          <p:cNvPr id="10" name="Text 8"/>
-          <p:cNvSpPr txBox="1"/>
-          <p:nvPr/>
-        </p:nvSpPr>
-        <p:spPr>
-          <a:xfrm>
-            <a:off x="713232" y="3704717"/>
-            <a:ext cx="6281928" cy="257429"/>
-          </a:xfrm>
-          <a:prstGeom prst="rect">
-            <a:avLst/>
-          </a:prstGeom>
-          <a:noFill/>
-          <a:ln/>
-        </p:spPr>
-        <p:txBody>
-          <a:bodyPr wrap="square" lIns="0" tIns="0" rIns="0" bIns="0" rtlCol="0" anchor="t"/>
-          <a:lstStyle/>
-          <a:p>
-            <a:pPr marL="342900" indent="-342900">
-              <a:lnSpc>
-                <a:spcPct val="125000"/>
-              </a:lnSpc>
-              <a:buSzPct val="100000"/>
-              <a:buChar char="●"/>
-            </a:pPr>
-            <a:r>
-              <a:rPr lang="en-US" sz="1100" b="1" dirty="0">
-                <a:solidFill>
-                  <a:srgbClr val="222222"/>
-                </a:solidFill>
-                <a:latin typeface="Calibri" pitchFamily="34" charset="0"/>
-                <a:ea typeface="Calibri" pitchFamily="34" charset="-122"/>
-                <a:cs typeface="Calibri" pitchFamily="34" charset="-120"/>
-              </a:rPr>
-              <a:t>来場者のメールアドレスは含まれません</a:t>
-            </a:r>
-            <a:pPr indent="0" marL="0">
-              <a:lnSpc>
-                <a:spcPct val="125000"/>
-              </a:lnSpc>
-              <a:buNone/>
-            </a:pPr>
-            <a:r>
-              <a:rPr lang="en-US" sz="1100" dirty="0">
-                <a:solidFill>
-                  <a:srgbClr val="222222"/>
-                </a:solidFill>
-                <a:latin typeface="Calibri" pitchFamily="34" charset="0"/>
-                <a:ea typeface="Calibri" pitchFamily="34" charset="-122"/>
-                <a:cs typeface="Calibri" pitchFamily="34" charset="-120"/>
-              </a:rPr>
-              <a:t>（匿名のIDのみ）</a:t>
-            </a:r>
-            <a:endParaRPr lang="en-US" sz="1100" dirty="0"/>
-          </a:p>
-        </p:txBody>
-      </p:sp>
-      <p:sp>
-        <p:nvSpPr>
-          <p:cNvPr id="11" name="Shape 9"/>
-          <p:cNvSpPr/>
-          <p:nvPr/>
-        </p:nvSpPr>
-        <p:spPr>
-          <a:xfrm>
-            <a:off x="566928" y="3980434"/>
-            <a:ext cx="6428232" cy="624459"/>
-          </a:xfrm>
-          <a:prstGeom prst="roundRect">
-            <a:avLst>
-              <a:gd name="adj" fmla="val 8786"/>
-            </a:avLst>
-          </a:prstGeom>
-          <a:solidFill>
-            <a:srgbClr val="E3F0F4"/>
-          </a:solidFill>
-          <a:ln w="9525">
-            <a:solidFill>
-              <a:srgbClr val="1C7293"/>
-            </a:solidFill>
-            <a:prstDash val="solid"/>
-          </a:ln>
-        </p:spPr>
-      </p:sp>
-      <p:sp>
-        <p:nvSpPr>
-          <p:cNvPr id="12" name="Text 10"/>
-          <p:cNvSpPr txBox="1"/>
-          <p:nvPr/>
-        </p:nvSpPr>
-        <p:spPr>
-          <a:xfrm>
-            <a:off x="658368" y="4071874"/>
-            <a:ext cx="237744" cy="237744"/>
-          </a:xfrm>
-          <a:prstGeom prst="rect">
-            <a:avLst/>
-          </a:prstGeom>
-          <a:noFill/>
-          <a:ln/>
-        </p:spPr>
-        <p:txBody>
-          <a:bodyPr wrap="square" lIns="0" tIns="0" rIns="0" bIns="0" rtlCol="0" anchor="ctr"/>
-          <a:lstStyle/>
-          <a:p>
-            <a:pPr algn="ctr" indent="0" marL="0">
-              <a:buNone/>
-            </a:pPr>
-            <a:r>
-              <a:rPr lang="en-US" sz="1200" b="1" dirty="0">
-                <a:solidFill>
-                  <a:srgbClr val="1C7293"/>
-                </a:solidFill>
-                <a:latin typeface="Calibri" pitchFamily="34" charset="0"/>
-                <a:ea typeface="Calibri" pitchFamily="34" charset="-122"/>
-                <a:cs typeface="Calibri" pitchFamily="34" charset="-120"/>
-              </a:rPr>
-              <a:t>i</a:t>
-            </a:r>
-            <a:endParaRPr lang="en-US" sz="1200" dirty="0"/>
-          </a:p>
-        </p:txBody>
-      </p:sp>
-      <p:sp>
-        <p:nvSpPr>
-          <p:cNvPr id="13" name="Text 11"/>
-          <p:cNvSpPr txBox="1"/>
-          <p:nvPr/>
-        </p:nvSpPr>
-        <p:spPr>
-          <a:xfrm>
-            <a:off x="950976" y="4090162"/>
-            <a:ext cx="5925312" cy="441579"/>
-          </a:xfrm>
-          <a:prstGeom prst="rect">
-            <a:avLst/>
-          </a:prstGeom>
-          <a:noFill/>
-          <a:ln/>
-        </p:spPr>
-        <p:txBody>
-          <a:bodyPr wrap="square" lIns="0" tIns="0" rIns="0" bIns="0" rtlCol="0" anchor="t"/>
-          <a:lstStyle/>
-          <a:p>
-            <a:pPr indent="0" marL="0">
-              <a:lnSpc>
-                <a:spcPct val="120000"/>
-              </a:lnSpc>
-              <a:buNone/>
-            </a:pPr>
-            <a:r>
-              <a:rPr lang="en-US" sz="1050" dirty="0">
-                <a:solidFill>
-                  <a:srgbClr val="222222"/>
-                </a:solidFill>
-                <a:latin typeface="Calibri" pitchFamily="34" charset="0"/>
-                <a:ea typeface="Calibri" pitchFamily="34" charset="-122"/>
-                <a:cs typeface="Calibri" pitchFamily="34" charset="-120"/>
-              </a:rPr>
-              <a:t>「重複を含めて表示」は、書き直しの仕組みが入る前に記録された重複を確認するためのものです。通常は使いません。</a:t>
-            </a:r>
-            <a:endParaRPr lang="en-US" sz="1050" dirty="0"/>
           </a:p>
         </p:txBody>
       </p:sp>
       <p:pic>
         <p:nvPicPr>
-          <p:cNvPr id="14" name="Image 0" descr="C:\Users\sato\Desktop\enque\docs\images\c-responses.png">    </p:cNvPr>
+          <p:cNvPr id="4" name="Image 0" descr="C:\Users\sato\Desktop\enque\docs\images\c-stats.png">    </p:cNvPr>
           <p:cNvPicPr>
             <a:picLocks noChangeAspect="1"/>
           </p:cNvPicPr>
@@ -8550,8 +8996,8 @@
         </p:blipFill>
         <p:spPr>
           <a:xfrm>
-            <a:off x="1828991" y="4678045"/>
-            <a:ext cx="3904106" cy="3474720"/>
+            <a:off x="2267736" y="1481328"/>
+            <a:ext cx="3026617" cy="3474720"/>
           </a:xfrm>
           <a:prstGeom prst="rect">
             <a:avLst/>
@@ -8560,13 +9006,13 @@
       </p:pic>
       <p:sp>
         <p:nvSpPr>
-          <p:cNvPr id="15" name="Text 12"/>
-          <p:cNvSpPr txBox="1"/>
-          <p:nvPr/>
-        </p:nvSpPr>
-        <p:spPr>
-          <a:xfrm>
-            <a:off x="566928" y="8207629"/>
+          <p:cNvPr id="5" name="Text 2"/>
+          <p:cNvSpPr txBox="1"/>
+          <p:nvPr/>
+        </p:nvSpPr>
+        <p:spPr>
+          <a:xfrm>
+            <a:off x="566928" y="5010912"/>
             <a:ext cx="6428232" cy="274320"/>
           </a:xfrm>
           <a:prstGeom prst="rect">
@@ -8591,7 +9037,7 @@
                 <a:ea typeface="Calibri" pitchFamily="34" charset="-122"/>
                 <a:cs typeface="Calibri" pitchFamily="34" charset="-120"/>
               </a:rPr>
-              <a:t>回答一覧の画面（送信日時と回答内容が並んでいるもの）。</a:t>
+              <a:t>設問ごとの集計グラフ（棒グラフとNPS・星評価の数字が見えるもの）。</a:t>
             </a:r>
             <a:endParaRPr lang="en-US" sz="950" dirty="0"/>
           </a:p>
@@ -8599,7 +9045,7 @@
       </p:sp>
       <p:sp>
         <p:nvSpPr>
-          <p:cNvPr id="16" name="Text 13"/>
+          <p:cNvPr id="6" name="Text 3"/>
           <p:cNvSpPr txBox="1"/>
           <p:nvPr/>
         </p:nvSpPr>
@@ -8740,7 +9186,7 @@
                 <a:ea typeface="Calibri" pitchFamily="34" charset="-122"/>
                 <a:cs typeface="Calibri" pitchFamily="34" charset="-120"/>
               </a:rPr>
-              <a:t>自社のQRコード</a:t>
+              <a:t>回答の一覧とCSV</a:t>
             </a:r>
             <a:endParaRPr lang="en-US" sz="2200" dirty="0"/>
           </a:p>
@@ -8754,7 +9200,161 @@
         </p:nvSpPr>
         <p:spPr>
           <a:xfrm>
-            <a:off x="566928" y="1481328"/>
+            <a:off x="566928" y="1591056"/>
+            <a:ext cx="6428232" cy="257810"/>
+          </a:xfrm>
+          <a:prstGeom prst="rect">
+            <a:avLst/>
+          </a:prstGeom>
+          <a:noFill/>
+          <a:ln/>
+        </p:spPr>
+        <p:txBody>
+          <a:bodyPr wrap="square" lIns="0" tIns="0" rIns="0" bIns="0" rtlCol="0" anchor="t"/>
+          <a:lstStyle/>
+          <a:p>
+            <a:pPr indent="0" marL="0">
+              <a:buNone/>
+            </a:pPr>
+            <a:r>
+              <a:rPr lang="en-US" sz="1400" b="1" dirty="0">
+                <a:solidFill>
+                  <a:srgbClr val="1C7293"/>
+                </a:solidFill>
+                <a:latin typeface="Calibri" pitchFamily="34" charset="0"/>
+                <a:ea typeface="Calibri" pitchFamily="34" charset="-122"/>
+                <a:cs typeface="Calibri" pitchFamily="34" charset="-120"/>
+              </a:rPr>
+              <a:t>一覧で見る</a:t>
+            </a:r>
+            <a:endParaRPr lang="en-US" sz="1400" dirty="0"/>
+          </a:p>
+        </p:txBody>
+      </p:sp>
+      <p:sp>
+        <p:nvSpPr>
+          <p:cNvPr id="5" name="Text 3"/>
+          <p:cNvSpPr txBox="1"/>
+          <p:nvPr/>
+        </p:nvSpPr>
+        <p:spPr>
+          <a:xfrm>
+            <a:off x="566928" y="1922018"/>
+            <a:ext cx="6428232" cy="459994"/>
+          </a:xfrm>
+          <a:prstGeom prst="rect">
+            <a:avLst/>
+          </a:prstGeom>
+          <a:noFill/>
+          <a:ln/>
+        </p:spPr>
+        <p:txBody>
+          <a:bodyPr wrap="square" lIns="0" tIns="0" rIns="0" bIns="0" rtlCol="0" anchor="t"/>
+          <a:lstStyle/>
+          <a:p>
+            <a:pPr indent="0" marL="0">
+              <a:lnSpc>
+                <a:spcPct val="125000"/>
+              </a:lnSpc>
+              <a:buNone/>
+            </a:pPr>
+            <a:r>
+              <a:rPr lang="en-US" sz="1100" dirty="0">
+                <a:solidFill>
+                  <a:srgbClr val="222222"/>
+                </a:solidFill>
+                <a:latin typeface="Calibri" pitchFamily="34" charset="0"/>
+                <a:ea typeface="Calibri" pitchFamily="34" charset="-122"/>
+                <a:cs typeface="Calibri" pitchFamily="34" charset="-120"/>
+              </a:rPr>
+              <a:t>ダッシュボードの</a:t>
+            </a:r>
+            <a:pPr indent="0" marL="0">
+              <a:lnSpc>
+                <a:spcPct val="125000"/>
+              </a:lnSpc>
+              <a:buNone/>
+            </a:pPr>
+            <a:r>
+              <a:rPr lang="en-US" sz="1100" b="1" dirty="0">
+                <a:solidFill>
+                  <a:srgbClr val="222222"/>
+                </a:solidFill>
+                <a:latin typeface="Calibri" pitchFamily="34" charset="0"/>
+                <a:ea typeface="Calibri" pitchFamily="34" charset="-122"/>
+                <a:cs typeface="Calibri" pitchFamily="34" charset="-120"/>
+              </a:rPr>
+              <a:t>「回答一覧」</a:t>
+            </a:r>
+            <a:pPr indent="0" marL="0">
+              <a:lnSpc>
+                <a:spcPct val="125000"/>
+              </a:lnSpc>
+              <a:buNone/>
+            </a:pPr>
+            <a:r>
+              <a:rPr lang="en-US" sz="1100" dirty="0">
+                <a:solidFill>
+                  <a:srgbClr val="222222"/>
+                </a:solidFill>
+                <a:latin typeface="Calibri" pitchFamily="34" charset="0"/>
+                <a:ea typeface="Calibri" pitchFamily="34" charset="-122"/>
+                <a:cs typeface="Calibri" pitchFamily="34" charset="-120"/>
+              </a:rPr>
+              <a:t>を押すと、1件ずつの回答内容を新しい順に確認できます（1ページ50件）。</a:t>
+            </a:r>
+            <a:endParaRPr lang="en-US" sz="1100" dirty="0"/>
+          </a:p>
+        </p:txBody>
+      </p:sp>
+      <p:sp>
+        <p:nvSpPr>
+          <p:cNvPr id="6" name="Text 4"/>
+          <p:cNvSpPr txBox="1"/>
+          <p:nvPr/>
+        </p:nvSpPr>
+        <p:spPr>
+          <a:xfrm>
+            <a:off x="566928" y="2528316"/>
+            <a:ext cx="6428232" cy="257810"/>
+          </a:xfrm>
+          <a:prstGeom prst="rect">
+            <a:avLst/>
+          </a:prstGeom>
+          <a:noFill/>
+          <a:ln/>
+        </p:spPr>
+        <p:txBody>
+          <a:bodyPr wrap="square" lIns="0" tIns="0" rIns="0" bIns="0" rtlCol="0" anchor="t"/>
+          <a:lstStyle/>
+          <a:p>
+            <a:pPr indent="0" marL="0">
+              <a:buNone/>
+            </a:pPr>
+            <a:r>
+              <a:rPr lang="en-US" sz="1400" b="1" dirty="0">
+                <a:solidFill>
+                  <a:srgbClr val="1C7293"/>
+                </a:solidFill>
+                <a:latin typeface="Calibri" pitchFamily="34" charset="0"/>
+                <a:ea typeface="Calibri" pitchFamily="34" charset="-122"/>
+                <a:cs typeface="Calibri" pitchFamily="34" charset="-120"/>
+              </a:rPr>
+              <a:t>CSVでダウンロードする</a:t>
+            </a:r>
+            <a:endParaRPr lang="en-US" sz="1400" dirty="0"/>
+          </a:p>
+        </p:txBody>
+      </p:sp>
+      <p:sp>
+        <p:nvSpPr>
+          <p:cNvPr id="7" name="Text 5"/>
+          <p:cNvSpPr txBox="1"/>
+          <p:nvPr/>
+        </p:nvSpPr>
+        <p:spPr>
+          <a:xfrm>
+            <a:off x="566928" y="2859278"/>
             <a:ext cx="6428232" cy="257429"/>
           </a:xfrm>
           <a:prstGeom prst="rect">
@@ -8774,6 +9374,23 @@
               <a:buNone/>
             </a:pPr>
             <a:r>
+              <a:rPr lang="en-US" sz="1100" b="1" dirty="0">
+                <a:solidFill>
+                  <a:srgbClr val="222222"/>
+                </a:solidFill>
+                <a:latin typeface="Calibri" pitchFamily="34" charset="0"/>
+                <a:ea typeface="Calibri" pitchFamily="34" charset="-122"/>
+                <a:cs typeface="Calibri" pitchFamily="34" charset="-120"/>
+              </a:rPr>
+              <a:t>「CSVダウンロード」</a:t>
+            </a:r>
+            <a:pPr indent="0" marL="0">
+              <a:lnSpc>
+                <a:spcPct val="125000"/>
+              </a:lnSpc>
+              <a:buNone/>
+            </a:pPr>
+            <a:r>
               <a:rPr lang="en-US" sz="1100" dirty="0">
                 <a:solidFill>
                   <a:srgbClr val="222222"/>
@@ -8782,41 +9399,7 @@
                 <a:ea typeface="Calibri" pitchFamily="34" charset="-122"/>
                 <a:cs typeface="Calibri" pitchFamily="34" charset="-120"/>
               </a:rPr>
-              <a:t>ダッシュボードの</a:t>
-            </a:r>
-            <a:pPr indent="0" marL="0">
-              <a:lnSpc>
-                <a:spcPct val="125000"/>
-              </a:lnSpc>
-              <a:buNone/>
-            </a:pPr>
-            <a:r>
-              <a:rPr lang="en-US" sz="1100" b="1" dirty="0">
-                <a:solidFill>
-                  <a:srgbClr val="222222"/>
-                </a:solidFill>
-                <a:latin typeface="Calibri" pitchFamily="34" charset="0"/>
-                <a:ea typeface="Calibri" pitchFamily="34" charset="-122"/>
-                <a:cs typeface="Calibri" pitchFamily="34" charset="-120"/>
-              </a:rPr>
-              <a:t>「QRコード」</a:t>
-            </a:r>
-            <a:pPr indent="0" marL="0">
-              <a:lnSpc>
-                <a:spcPct val="125000"/>
-              </a:lnSpc>
-              <a:buNone/>
-            </a:pPr>
-            <a:r>
-              <a:rPr lang="en-US" sz="1100" dirty="0">
-                <a:solidFill>
-                  <a:srgbClr val="222222"/>
-                </a:solidFill>
-                <a:latin typeface="Calibri" pitchFamily="34" charset="0"/>
-                <a:ea typeface="Calibri" pitchFamily="34" charset="-122"/>
-                <a:cs typeface="Calibri" pitchFamily="34" charset="-120"/>
-              </a:rPr>
-              <a:t>から、自社ブース用のQRコードを表示・印刷できます。</a:t>
+              <a:t>を押すと、自社ぶんの回答がCSVファイルで保存されます。</a:t>
             </a:r>
             <a:endParaRPr lang="en-US" sz="1100" dirty="0"/>
           </a:p>
@@ -8824,13 +9407,13 @@
       </p:sp>
       <p:sp>
         <p:nvSpPr>
-          <p:cNvPr id="5" name="Text 3"/>
-          <p:cNvSpPr txBox="1"/>
-          <p:nvPr/>
-        </p:nvSpPr>
-        <p:spPr>
-          <a:xfrm>
-            <a:off x="713232" y="1775333"/>
+          <p:cNvPr id="8" name="Text 6"/>
+          <p:cNvSpPr txBox="1"/>
+          <p:nvPr/>
+        </p:nvSpPr>
+        <p:spPr>
+          <a:xfrm>
+            <a:off x="713232" y="3153283"/>
             <a:ext cx="6281928" cy="257429"/>
           </a:xfrm>
           <a:prstGeom prst="rect">
@@ -8851,6 +9434,23 @@
               <a:buChar char="●"/>
             </a:pPr>
             <a:r>
+              <a:rPr lang="en-US" sz="1100" b="1" dirty="0">
+                <a:solidFill>
+                  <a:srgbClr val="222222"/>
+                </a:solidFill>
+                <a:latin typeface="Calibri" pitchFamily="34" charset="0"/>
+                <a:ea typeface="Calibri" pitchFamily="34" charset="-122"/>
+                <a:cs typeface="Calibri" pitchFamily="34" charset="-120"/>
+              </a:rPr>
+              <a:t>UTF-8（BOM付き）</a:t>
+            </a:r>
+            <a:pPr indent="0" marL="0">
+              <a:lnSpc>
+                <a:spcPct val="125000"/>
+              </a:lnSpc>
+              <a:buNone/>
+            </a:pPr>
+            <a:r>
               <a:rPr lang="en-US" sz="1100" dirty="0">
                 <a:solidFill>
                   <a:srgbClr val="222222"/>
@@ -8859,41 +9459,7 @@
                 <a:ea typeface="Calibri" pitchFamily="34" charset="-122"/>
                 <a:cs typeface="Calibri" pitchFamily="34" charset="-120"/>
               </a:rPr>
-              <a:t>ブースに掲示するQRコードは</a:t>
-            </a:r>
-            <a:pPr indent="0" marL="0">
-              <a:lnSpc>
-                <a:spcPct val="125000"/>
-              </a:lnSpc>
-              <a:buNone/>
-            </a:pPr>
-            <a:r>
-              <a:rPr lang="en-US" sz="1100" b="1" dirty="0">
-                <a:solidFill>
-                  <a:srgbClr val="222222"/>
-                </a:solidFill>
-                <a:latin typeface="Calibri" pitchFamily="34" charset="0"/>
-                <a:ea typeface="Calibri" pitchFamily="34" charset="-122"/>
-                <a:cs typeface="Calibri" pitchFamily="34" charset="-120"/>
-              </a:rPr>
-              <a:t>事務局がまとめて印刷</a:t>
-            </a:r>
-            <a:pPr indent="0" marL="0">
-              <a:lnSpc>
-                <a:spcPct val="125000"/>
-              </a:lnSpc>
-              <a:buNone/>
-            </a:pPr>
-            <a:r>
-              <a:rPr lang="en-US" sz="1100" dirty="0">
-                <a:solidFill>
-                  <a:srgbClr val="222222"/>
-                </a:solidFill>
-                <a:latin typeface="Calibri" pitchFamily="34" charset="0"/>
-                <a:ea typeface="Calibri" pitchFamily="34" charset="-122"/>
-                <a:cs typeface="Calibri" pitchFamily="34" charset="-120"/>
-              </a:rPr>
-              <a:t>します</a:t>
+              <a:t>なので、Excelでそのまま開けます</a:t>
             </a:r>
             <a:endParaRPr lang="en-US" sz="1100" dirty="0"/>
           </a:p>
@@ -8901,13 +9467,13 @@
       </p:sp>
       <p:sp>
         <p:nvSpPr>
-          <p:cNvPr id="6" name="Text 4"/>
-          <p:cNvSpPr txBox="1"/>
-          <p:nvPr/>
-        </p:nvSpPr>
-        <p:spPr>
-          <a:xfrm>
-            <a:off x="713232" y="2051050"/>
+          <p:cNvPr id="9" name="Text 7"/>
+          <p:cNvSpPr txBox="1"/>
+          <p:nvPr/>
+        </p:nvSpPr>
+        <p:spPr>
+          <a:xfrm>
+            <a:off x="713232" y="3429000"/>
             <a:ext cx="6281928" cy="257429"/>
           </a:xfrm>
           <a:prstGeom prst="rect">
@@ -8936,7 +9502,7 @@
                 <a:ea typeface="Calibri" pitchFamily="34" charset="-122"/>
                 <a:cs typeface="Calibri" pitchFamily="34" charset="-120"/>
               </a:rPr>
-              <a:t>追加で必要になった場合や、予備が欲しい場合にお使いください</a:t>
+              <a:t>1行が1件の回答、設問が列になります</a:t>
             </a:r>
             <a:endParaRPr lang="en-US" sz="1100" dirty="0"/>
           </a:p>
@@ -8944,13 +9510,13 @@
       </p:sp>
       <p:sp>
         <p:nvSpPr>
-          <p:cNvPr id="7" name="Text 5"/>
-          <p:cNvSpPr txBox="1"/>
-          <p:nvPr/>
-        </p:nvSpPr>
-        <p:spPr>
-          <a:xfrm>
-            <a:off x="713232" y="2326767"/>
+          <p:cNvPr id="10" name="Text 8"/>
+          <p:cNvSpPr txBox="1"/>
+          <p:nvPr/>
+        </p:nvSpPr>
+        <p:spPr>
+          <a:xfrm>
+            <a:off x="713232" y="3704717"/>
             <a:ext cx="6281928" cy="257429"/>
           </a:xfrm>
           <a:prstGeom prst="rect">
@@ -8971,6 +9537,23 @@
               <a:buChar char="●"/>
             </a:pPr>
             <a:r>
+              <a:rPr lang="en-US" sz="1100" b="1" dirty="0">
+                <a:solidFill>
+                  <a:srgbClr val="222222"/>
+                </a:solidFill>
+                <a:latin typeface="Calibri" pitchFamily="34" charset="0"/>
+                <a:ea typeface="Calibri" pitchFamily="34" charset="-122"/>
+                <a:cs typeface="Calibri" pitchFamily="34" charset="-120"/>
+              </a:rPr>
+              <a:t>来場者のメールアドレスは含まれません</a:t>
+            </a:r>
+            <a:pPr indent="0" marL="0">
+              <a:lnSpc>
+                <a:spcPct val="125000"/>
+              </a:lnSpc>
+              <a:buNone/>
+            </a:pPr>
+            <a:r>
               <a:rPr lang="en-US" sz="1100" dirty="0">
                 <a:solidFill>
                   <a:srgbClr val="222222"/>
@@ -8979,7 +9562,7 @@
                 <a:ea typeface="Calibri" pitchFamily="34" charset="-122"/>
                 <a:cs typeface="Calibri" pitchFamily="34" charset="-120"/>
               </a:rPr>
-              <a:t>印刷ダイアログで「PDFとして保存」を選べばPDFになります</a:t>
+              <a:t>（匿名のIDのみ）</a:t>
             </a:r>
             <a:endParaRPr lang="en-US" sz="1100" dirty="0"/>
           </a:p>
@@ -8987,26 +9570,26 @@
       </p:sp>
       <p:sp>
         <p:nvSpPr>
-          <p:cNvPr id="8" name="Shape 6"/>
+          <p:cNvPr id="11" name="Shape 9"/>
           <p:cNvSpPr/>
           <p:nvPr/>
         </p:nvSpPr>
         <p:spPr>
           <a:xfrm>
-            <a:off x="566928" y="2602484"/>
-            <a:ext cx="6428232" cy="431102"/>
+            <a:off x="566928" y="3980434"/>
+            <a:ext cx="6428232" cy="624459"/>
           </a:xfrm>
           <a:prstGeom prst="roundRect">
             <a:avLst>
-              <a:gd name="adj" fmla="val 12726"/>
+              <a:gd name="adj" fmla="val 8786"/>
             </a:avLst>
           </a:prstGeom>
           <a:solidFill>
-            <a:srgbClr val="FDF0E6"/>
+            <a:srgbClr val="E3F0F4"/>
           </a:solidFill>
           <a:ln w="9525">
             <a:solidFill>
-              <a:srgbClr val="E08A3C"/>
+              <a:srgbClr val="1C7293"/>
             </a:solidFill>
             <a:prstDash val="solid"/>
           </a:ln>
@@ -9014,13 +9597,13 @@
       </p:sp>
       <p:sp>
         <p:nvSpPr>
-          <p:cNvPr id="9" name="Text 7"/>
-          <p:cNvSpPr txBox="1"/>
-          <p:nvPr/>
-        </p:nvSpPr>
-        <p:spPr>
-          <a:xfrm>
-            <a:off x="658368" y="2693924"/>
+          <p:cNvPr id="12" name="Text 10"/>
+          <p:cNvSpPr txBox="1"/>
+          <p:nvPr/>
+        </p:nvSpPr>
+        <p:spPr>
+          <a:xfrm>
+            <a:off x="658368" y="4071874"/>
             <a:ext cx="237744" cy="237744"/>
           </a:xfrm>
           <a:prstGeom prst="rect">
@@ -9039,13 +9622,13 @@
             <a:r>
               <a:rPr lang="en-US" sz="1200" b="1" dirty="0">
                 <a:solidFill>
-                  <a:srgbClr val="C25A17"/>
-                </a:solidFill>
-                <a:latin typeface="Calibri" pitchFamily="34" charset="0"/>
-                <a:ea typeface="Calibri" pitchFamily="34" charset="-122"/>
-                <a:cs typeface="Calibri" pitchFamily="34" charset="-120"/>
-              </a:rPr>
-              <a:t>！</a:t>
+                  <a:srgbClr val="1C7293"/>
+                </a:solidFill>
+                <a:latin typeface="Calibri" pitchFamily="34" charset="0"/>
+                <a:ea typeface="Calibri" pitchFamily="34" charset="-122"/>
+                <a:cs typeface="Calibri" pitchFamily="34" charset="-120"/>
+              </a:rPr>
+              <a:t>i</a:t>
             </a:r>
             <a:endParaRPr lang="en-US" sz="1200" dirty="0"/>
           </a:p>
@@ -9053,14 +9636,14 @@
       </p:sp>
       <p:sp>
         <p:nvSpPr>
-          <p:cNvPr id="10" name="Text 8"/>
-          <p:cNvSpPr txBox="1"/>
-          <p:nvPr/>
-        </p:nvSpPr>
-        <p:spPr>
-          <a:xfrm>
-            <a:off x="950976" y="2712212"/>
-            <a:ext cx="5925312" cy="248221"/>
+          <p:cNvPr id="13" name="Text 11"/>
+          <p:cNvSpPr txBox="1"/>
+          <p:nvPr/>
+        </p:nvSpPr>
+        <p:spPr>
+          <a:xfrm>
+            <a:off x="950976" y="4090162"/>
+            <a:ext cx="5925312" cy="441579"/>
           </a:xfrm>
           <a:prstGeom prst="rect">
             <a:avLst/>
@@ -9087,41 +9670,7 @@
                 <a:ea typeface="Calibri" pitchFamily="34" charset="-122"/>
                 <a:cs typeface="Calibri" pitchFamily="34" charset="-120"/>
               </a:rPr>
-              <a:t>QRコードのURLは企業ごとに違います。</a:t>
-            </a:r>
-            <a:pPr indent="0" marL="0">
-              <a:lnSpc>
-                <a:spcPct val="120000"/>
-              </a:lnSpc>
-              <a:buNone/>
-            </a:pPr>
-            <a:r>
-              <a:rPr lang="en-US" sz="1050" b="1" dirty="0">
-                <a:solidFill>
-                  <a:srgbClr val="222222"/>
-                </a:solidFill>
-                <a:latin typeface="Calibri" pitchFamily="34" charset="0"/>
-                <a:ea typeface="Calibri" pitchFamily="34" charset="-122"/>
-                <a:cs typeface="Calibri" pitchFamily="34" charset="-120"/>
-              </a:rPr>
-              <a:t>他社のQRコードを掲示しないよう</a:t>
-            </a:r>
-            <a:pPr indent="0" marL="0">
-              <a:lnSpc>
-                <a:spcPct val="120000"/>
-              </a:lnSpc>
-              <a:buNone/>
-            </a:pPr>
-            <a:r>
-              <a:rPr lang="en-US" sz="1050" dirty="0">
-                <a:solidFill>
-                  <a:srgbClr val="222222"/>
-                </a:solidFill>
-                <a:latin typeface="Calibri" pitchFamily="34" charset="0"/>
-                <a:ea typeface="Calibri" pitchFamily="34" charset="-122"/>
-                <a:cs typeface="Calibri" pitchFamily="34" charset="-120"/>
-              </a:rPr>
-              <a:t>ご注意ください。</a:t>
+              <a:t>「重複を含めて表示」は、書き直しの仕組みが入る前に記録された重複を確認するためのものです。通常は使いません。</a:t>
             </a:r>
             <a:endParaRPr lang="en-US" sz="1050" dirty="0"/>
           </a:p>
@@ -9129,7 +9678,7 @@
       </p:sp>
       <p:pic>
         <p:nvPicPr>
-          <p:cNvPr id="11" name="Image 0" descr="C:\Users\sato\Desktop\enque\docs\images\c-qr.png">    </p:cNvPr>
+          <p:cNvPr id="14" name="Image 0" descr="C:\Users\sato\Desktop\enque\docs\images\c-responses.png">    </p:cNvPr>
           <p:cNvPicPr>
             <a:picLocks noChangeAspect="1"/>
           </p:cNvPicPr>
@@ -9143,8 +9692,8 @@
         </p:blipFill>
         <p:spPr>
           <a:xfrm>
-            <a:off x="566928" y="3106738"/>
-            <a:ext cx="6428232" cy="3181485"/>
+            <a:off x="1828991" y="4678045"/>
+            <a:ext cx="3904106" cy="3474720"/>
           </a:xfrm>
           <a:prstGeom prst="rect">
             <a:avLst/>
@@ -9153,13 +9702,13 @@
       </p:pic>
       <p:sp>
         <p:nvSpPr>
-          <p:cNvPr id="12" name="Text 9"/>
-          <p:cNvSpPr txBox="1"/>
-          <p:nvPr/>
-        </p:nvSpPr>
-        <p:spPr>
-          <a:xfrm>
-            <a:off x="566928" y="6343087"/>
+          <p:cNvPr id="15" name="Text 12"/>
+          <p:cNvSpPr txBox="1"/>
+          <p:nvPr/>
+        </p:nvSpPr>
+        <p:spPr>
+          <a:xfrm>
+            <a:off x="566928" y="8207629"/>
             <a:ext cx="6428232" cy="274320"/>
           </a:xfrm>
           <a:prstGeom prst="rect">
@@ -9184,7 +9733,7 @@
                 <a:ea typeface="Calibri" pitchFamily="34" charset="-122"/>
                 <a:cs typeface="Calibri" pitchFamily="34" charset="-120"/>
               </a:rPr>
-              <a:t>QRコードの印刷ページ（自社1社分）。</a:t>
+              <a:t>回答一覧の画面（送信日時と回答内容が並んでいるもの）。</a:t>
             </a:r>
             <a:endParaRPr lang="en-US" sz="950" dirty="0"/>
           </a:p>
@@ -9192,7 +9741,7 @@
       </p:sp>
       <p:sp>
         <p:nvSpPr>
-          <p:cNvPr id="13" name="Text 10"/>
+          <p:cNvPr id="16" name="Text 13"/>
           <p:cNvSpPr txBox="1"/>
           <p:nvPr/>
         </p:nvSpPr>
